--- a/reports/report_source/DS-MINI-Design-울산_1반-김낙근.pptx
+++ b/reports/report_source/DS-MINI-Design-울산_1반-김낙근.pptx
@@ -2,21 +2,21 @@
 <file path=ppt/presentation.xml><?xml version="1.0" encoding="utf-8"?>
 <p:presentation xmlns:p="http://schemas.openxmlformats.org/presentationml/2006/main">
   <p:sldMasterIdLst>
-    <p:sldMasterId xmlns:r="http://schemas.openxmlformats.org/officeDocument/2006/relationships" id="2147483648" r:id="R6d4761e36cf04f0e"/>
+    <p:sldMasterId xmlns:r="http://schemas.openxmlformats.org/officeDocument/2006/relationships" id="2147483648" r:id="Rd2a8fd3feaac4bd8"/>
   </p:sldMasterIdLst>
   <p:notesMasterIdLst>
-    <p:notesMasterId xmlns:r="http://schemas.openxmlformats.org/officeDocument/2006/relationships" r:id="R0d66fa9e9edf4f46"/>
+    <p:notesMasterId xmlns:r="http://schemas.openxmlformats.org/officeDocument/2006/relationships" r:id="R9590e53f22154f35"/>
   </p:notesMasterIdLst>
   <p:sldIdLst>
-    <p:sldId xmlns:r="http://schemas.openxmlformats.org/officeDocument/2006/relationships" id="256" r:id="R5d6919a213b14dc4"/>
-    <p:sldId xmlns:r="http://schemas.openxmlformats.org/officeDocument/2006/relationships" id="257" r:id="Rc8aadfaaf3ed42c0"/>
-    <p:sldId xmlns:r="http://schemas.openxmlformats.org/officeDocument/2006/relationships" id="258" r:id="Rf8ec939c28f94293"/>
-    <p:sldId xmlns:r="http://schemas.openxmlformats.org/officeDocument/2006/relationships" id="259" r:id="R325be580e49d4090"/>
-    <p:sldId xmlns:r="http://schemas.openxmlformats.org/officeDocument/2006/relationships" id="260" r:id="R16250d43c969466e"/>
-    <p:sldId xmlns:r="http://schemas.openxmlformats.org/officeDocument/2006/relationships" id="261" r:id="R183d951afbf84f82"/>
-    <p:sldId xmlns:r="http://schemas.openxmlformats.org/officeDocument/2006/relationships" id="262" r:id="R4a131545c62b4f19"/>
-    <p:sldId xmlns:r="http://schemas.openxmlformats.org/officeDocument/2006/relationships" id="263" r:id="Red90ee68857b4edf"/>
-    <p:sldId xmlns:r="http://schemas.openxmlformats.org/officeDocument/2006/relationships" id="264" r:id="R8a9e9c320a6e4c1e"/>
+    <p:sldId xmlns:r="http://schemas.openxmlformats.org/officeDocument/2006/relationships" id="256" r:id="R67576c7abd144c46"/>
+    <p:sldId xmlns:r="http://schemas.openxmlformats.org/officeDocument/2006/relationships" id="257" r:id="Rdbcbeb4a71b84d74"/>
+    <p:sldId xmlns:r="http://schemas.openxmlformats.org/officeDocument/2006/relationships" id="258" r:id="Rcb40d5d46b934937"/>
+    <p:sldId xmlns:r="http://schemas.openxmlformats.org/officeDocument/2006/relationships" id="259" r:id="R4627a8baf54b435f"/>
+    <p:sldId xmlns:r="http://schemas.openxmlformats.org/officeDocument/2006/relationships" id="260" r:id="Rf5a54d2f8a4249d6"/>
+    <p:sldId xmlns:r="http://schemas.openxmlformats.org/officeDocument/2006/relationships" id="261" r:id="R865b008525554b26"/>
+    <p:sldId xmlns:r="http://schemas.openxmlformats.org/officeDocument/2006/relationships" id="262" r:id="R8bede01cf01e434e"/>
+    <p:sldId xmlns:r="http://schemas.openxmlformats.org/officeDocument/2006/relationships" id="263" r:id="Re1393190ce874433"/>
+    <p:sldId xmlns:r="http://schemas.openxmlformats.org/officeDocument/2006/relationships" id="264" r:id="Ra10c569662f6412e"/>
   </p:sldIdLst>
   <p:sldSz cx="12192000" cy="6858000"/>
   <p:notesSz cx="6858000" cy="9144000"/>
@@ -1078,7 +1078,7 @@
   </p:cSld>
   <p:clrMap bg1="lt1" tx1="dk1" bg2="lt2" tx2="dk2" accent1="accent1" accent2="accent2" accent3="accent3" accent4="accent4" accent5="accent5" accent6="accent6" hlink="hlink" folHlink="folHlink"/>
   <p:sldLayoutIdLst>
-    <p:sldLayoutId xmlns:r="http://schemas.openxmlformats.org/officeDocument/2006/relationships" id="2147483649" r:id="Rcc0f4477d3404389"/>
+    <p:sldLayoutId xmlns:r="http://schemas.openxmlformats.org/officeDocument/2006/relationships" id="2147483649" r:id="R0a6c866d38b344ce"/>
   </p:sldLayoutIdLst>
   <p:txStyles>
     <p:titleStyle>
@@ -1629,7 +1629,7 @@
           <p:cNvPr id="20" name="">
             <a:extLst xmlns:a="http://schemas.openxmlformats.org/drawingml/2006/main">
               <a:ext uri="{FF2B5EF4-FFF2-40B4-BE49-F238E27FC236}">
-                <a16:creationId xmlns:a16="http://schemas.microsoft.com/office/drawing/2014/main" id="{EA3E2EFC-9AC3-4D1F-88BD-597DD2D79D37}"/>
+                <a16:creationId xmlns:a16="http://schemas.microsoft.com/office/drawing/2014/main" id="{EF4E0A6B-5934-44D0-B40E-ECE245A453F3}"/>
               </a:ext>
             </a:extLst>
           </p:cNvPr>
@@ -1686,7 +1686,7 @@
           <p:cNvPr id="2" name="">
             <a:extLst xmlns:a="http://schemas.openxmlformats.org/drawingml/2006/main">
               <a:ext uri="{FF2B5EF4-FFF2-40B4-BE49-F238E27FC236}">
-                <a16:creationId xmlns:a16="http://schemas.microsoft.com/office/drawing/2014/main" id="{65DAE1BC-5091-483F-83C4-EB223E71922A}"/>
+                <a16:creationId xmlns:a16="http://schemas.microsoft.com/office/drawing/2014/main" id="{32B78745-DADA-4F82-8E61-E8B5C909ACF6}"/>
               </a:ext>
             </a:extLst>
           </p:cNvPr>
@@ -1743,7 +1743,7 @@
           <p:cNvPr id="3" name="">
             <a:extLst xmlns:a="http://schemas.openxmlformats.org/drawingml/2006/main">
               <a:ext uri="{FF2B5EF4-FFF2-40B4-BE49-F238E27FC236}">
-                <a16:creationId xmlns:a16="http://schemas.microsoft.com/office/drawing/2014/main" id="{9E899A65-1E68-4E6B-AA15-FA3A056AA4A8}"/>
+                <a16:creationId xmlns:a16="http://schemas.microsoft.com/office/drawing/2014/main" id="{A2C3C389-F792-4BF5-8965-D5CE8239BF44}"/>
               </a:ext>
             </a:extLst>
           </p:cNvPr>
@@ -1775,7 +1775,7 @@
           <p:cNvPr id="4" name="">
             <a:extLst xmlns:a="http://schemas.openxmlformats.org/drawingml/2006/main">
               <a:ext uri="{FF2B5EF4-FFF2-40B4-BE49-F238E27FC236}">
-                <a16:creationId xmlns:a16="http://schemas.microsoft.com/office/drawing/2014/main" id="{C5AA89BC-DFB4-4625-87AC-4591726CF2C9}"/>
+                <a16:creationId xmlns:a16="http://schemas.microsoft.com/office/drawing/2014/main" id="{7524CC6A-199D-4C59-B815-84599E0F7B6C}"/>
               </a:ext>
             </a:extLst>
           </p:cNvPr>
@@ -1832,7 +1832,7 @@
           <p:cNvPr id="5" name="">
             <a:extLst xmlns:a="http://schemas.openxmlformats.org/drawingml/2006/main">
               <a:ext uri="{FF2B5EF4-FFF2-40B4-BE49-F238E27FC236}">
-                <a16:creationId xmlns:a16="http://schemas.microsoft.com/office/drawing/2014/main" id="{B7C83E0E-F714-42A5-B6E4-B43280A1516F}"/>
+                <a16:creationId xmlns:a16="http://schemas.microsoft.com/office/drawing/2014/main" id="{12F33458-518D-4DC6-9BED-3B174B67171E}"/>
               </a:ext>
             </a:extLst>
           </p:cNvPr>
@@ -1889,7 +1889,7 @@
           <p:cNvPr id="6" name="">
             <a:extLst xmlns:a="http://schemas.openxmlformats.org/drawingml/2006/main">
               <a:ext uri="{FF2B5EF4-FFF2-40B4-BE49-F238E27FC236}">
-                <a16:creationId xmlns:a16="http://schemas.microsoft.com/office/drawing/2014/main" id="{3D7E8B1A-2B42-430F-91E7-E21D1835087C}"/>
+                <a16:creationId xmlns:a16="http://schemas.microsoft.com/office/drawing/2014/main" id="{FB8EFC78-F9B6-4366-B364-403E9DF75F89}"/>
               </a:ext>
             </a:extLst>
           </p:cNvPr>
@@ -1919,7 +1919,7 @@
           <p:cNvPr id="7" name="">
             <a:extLst xmlns:a="http://schemas.openxmlformats.org/drawingml/2006/main">
               <a:ext uri="{FF2B5EF4-FFF2-40B4-BE49-F238E27FC236}">
-                <a16:creationId xmlns:a16="http://schemas.microsoft.com/office/drawing/2014/main" id="{749EBF63-7F9D-48DB-BBE1-827C5A60E503}"/>
+                <a16:creationId xmlns:a16="http://schemas.microsoft.com/office/drawing/2014/main" id="{4409C683-01C4-4351-B7F7-F1DF532CF213}"/>
               </a:ext>
             </a:extLst>
           </p:cNvPr>
@@ -1976,7 +1976,7 @@
           <p:cNvPr id="8" name="">
             <a:extLst xmlns:a="http://schemas.openxmlformats.org/drawingml/2006/main">
               <a:ext uri="{FF2B5EF4-FFF2-40B4-BE49-F238E27FC236}">
-                <a16:creationId xmlns:a16="http://schemas.microsoft.com/office/drawing/2014/main" id="{8E0D6460-9AE0-41E2-AB4B-03FD941B0A76}"/>
+                <a16:creationId xmlns:a16="http://schemas.microsoft.com/office/drawing/2014/main" id="{42804BB2-C44B-4BBA-A2AF-6FEDDFE92836}"/>
               </a:ext>
             </a:extLst>
           </p:cNvPr>
@@ -2033,7 +2033,7 @@
           <p:cNvPr id="9" name="">
             <a:extLst xmlns:a="http://schemas.openxmlformats.org/drawingml/2006/main">
               <a:ext uri="{FF2B5EF4-FFF2-40B4-BE49-F238E27FC236}">
-                <a16:creationId xmlns:a16="http://schemas.microsoft.com/office/drawing/2014/main" id="{E0C113A2-8515-40D8-A20C-DFB908494D12}"/>
+                <a16:creationId xmlns:a16="http://schemas.microsoft.com/office/drawing/2014/main" id="{4BFEFA22-C2AD-4FF7-BF4A-D65DBFEB4856}"/>
               </a:ext>
             </a:extLst>
           </p:cNvPr>
@@ -2065,7 +2065,7 @@
           <p:cNvPr id="10" name="">
             <a:extLst xmlns:a="http://schemas.openxmlformats.org/drawingml/2006/main">
               <a:ext uri="{FF2B5EF4-FFF2-40B4-BE49-F238E27FC236}">
-                <a16:creationId xmlns:a16="http://schemas.microsoft.com/office/drawing/2014/main" id="{1A77FE7D-F0D1-44A1-B87A-266378E98007}"/>
+                <a16:creationId xmlns:a16="http://schemas.microsoft.com/office/drawing/2014/main" id="{C06E4D6F-6E53-4854-8B28-58D62F5D29AC}"/>
               </a:ext>
             </a:extLst>
           </p:cNvPr>
@@ -2122,7 +2122,7 @@
           <p:cNvPr id="11" name="">
             <a:extLst xmlns:a="http://schemas.openxmlformats.org/drawingml/2006/main">
               <a:ext uri="{FF2B5EF4-FFF2-40B4-BE49-F238E27FC236}">
-                <a16:creationId xmlns:a16="http://schemas.microsoft.com/office/drawing/2014/main" id="{FAA3AC4C-E24C-408D-A050-67E27BD10B45}"/>
+                <a16:creationId xmlns:a16="http://schemas.microsoft.com/office/drawing/2014/main" id="{EFAB55D3-511A-4235-BCE4-B0B9A508494B}"/>
               </a:ext>
             </a:extLst>
           </p:cNvPr>
@@ -2179,7 +2179,7 @@
           <p:cNvPr id="12" name="">
             <a:extLst xmlns:a="http://schemas.openxmlformats.org/drawingml/2006/main">
               <a:ext uri="{FF2B5EF4-FFF2-40B4-BE49-F238E27FC236}">
-                <a16:creationId xmlns:a16="http://schemas.microsoft.com/office/drawing/2014/main" id="{D89A0DB1-68A3-425F-AB7E-F040C82A6EA4}"/>
+                <a16:creationId xmlns:a16="http://schemas.microsoft.com/office/drawing/2014/main" id="{EBDED0FE-0C20-4D6E-91B8-0BC315D478B1}"/>
               </a:ext>
             </a:extLst>
           </p:cNvPr>
@@ -2211,7 +2211,7 @@
           <p:cNvPr id="13" name="">
             <a:extLst xmlns:a="http://schemas.openxmlformats.org/drawingml/2006/main">
               <a:ext uri="{FF2B5EF4-FFF2-40B4-BE49-F238E27FC236}">
-                <a16:creationId xmlns:a16="http://schemas.microsoft.com/office/drawing/2014/main" id="{3E4F7996-F41D-41BE-B7D7-FB183414ED7E}"/>
+                <a16:creationId xmlns:a16="http://schemas.microsoft.com/office/drawing/2014/main" id="{0B2F43B0-8B54-401C-B8D8-B70D0895E8F1}"/>
               </a:ext>
             </a:extLst>
           </p:cNvPr>
@@ -2268,7 +2268,7 @@
           <p:cNvPr id="14" name="">
             <a:extLst xmlns:a="http://schemas.openxmlformats.org/drawingml/2006/main">
               <a:ext uri="{FF2B5EF4-FFF2-40B4-BE49-F238E27FC236}">
-                <a16:creationId xmlns:a16="http://schemas.microsoft.com/office/drawing/2014/main" id="{76DB8C76-48BE-461C-B4A0-66075031799E}"/>
+                <a16:creationId xmlns:a16="http://schemas.microsoft.com/office/drawing/2014/main" id="{3CEAB112-3FE7-4034-AF2F-4D39E5FD9BF0}"/>
               </a:ext>
             </a:extLst>
           </p:cNvPr>
@@ -2348,7 +2348,7 @@
           <p:cNvPr id="15" name="">
             <a:extLst xmlns:a="http://schemas.openxmlformats.org/drawingml/2006/main">
               <a:ext uri="{FF2B5EF4-FFF2-40B4-BE49-F238E27FC236}">
-                <a16:creationId xmlns:a16="http://schemas.microsoft.com/office/drawing/2014/main" id="{57B9FDDB-E101-42B7-B6CD-22AC1E14E587}"/>
+                <a16:creationId xmlns:a16="http://schemas.microsoft.com/office/drawing/2014/main" id="{4DFECEEA-6017-4287-943E-AD9E09F8764C}"/>
               </a:ext>
             </a:extLst>
           </p:cNvPr>
@@ -2380,7 +2380,7 @@
           <p:cNvPr id="16" name="">
             <a:extLst xmlns:a="http://schemas.openxmlformats.org/drawingml/2006/main">
               <a:ext uri="{FF2B5EF4-FFF2-40B4-BE49-F238E27FC236}">
-                <a16:creationId xmlns:a16="http://schemas.microsoft.com/office/drawing/2014/main" id="{C7E8B131-BA92-442E-A638-A149F6D60434}"/>
+                <a16:creationId xmlns:a16="http://schemas.microsoft.com/office/drawing/2014/main" id="{914853F6-790B-4AAE-A0F3-D5A932B3D4AD}"/>
               </a:ext>
             </a:extLst>
           </p:cNvPr>
@@ -2437,7 +2437,7 @@
           <p:cNvPr id="17" name="">
             <a:extLst xmlns:a="http://schemas.openxmlformats.org/drawingml/2006/main">
               <a:ext uri="{FF2B5EF4-FFF2-40B4-BE49-F238E27FC236}">
-                <a16:creationId xmlns:a16="http://schemas.microsoft.com/office/drawing/2014/main" id="{CB48571A-B2F3-497C-8A95-7CEF65DCA294}"/>
+                <a16:creationId xmlns:a16="http://schemas.microsoft.com/office/drawing/2014/main" id="{A2EAEC10-02EE-461B-897C-0093F5C11FF9}"/>
               </a:ext>
             </a:extLst>
           </p:cNvPr>
@@ -2517,7 +2517,7 @@
           <p:cNvPr id="18" name="">
             <a:extLst xmlns:a="http://schemas.openxmlformats.org/drawingml/2006/main">
               <a:ext uri="{FF2B5EF4-FFF2-40B4-BE49-F238E27FC236}">
-                <a16:creationId xmlns:a16="http://schemas.microsoft.com/office/drawing/2014/main" id="{62B71395-293C-4FC9-92F8-561D5ED16CEE}"/>
+                <a16:creationId xmlns:a16="http://schemas.microsoft.com/office/drawing/2014/main" id="{B5A8D77C-6B20-4421-8D66-04C21CE5EA0B}"/>
               </a:ext>
             </a:extLst>
           </p:cNvPr>
@@ -2574,7 +2574,7 @@
           <p:cNvPr id="19" name="">
             <a:extLst xmlns:a="http://schemas.openxmlformats.org/drawingml/2006/main">
               <a:ext uri="{FF2B5EF4-FFF2-40B4-BE49-F238E27FC236}">
-                <a16:creationId xmlns:a16="http://schemas.microsoft.com/office/drawing/2014/main" id="{93B980BA-7AD2-43E9-B0BB-9F49CFBA3D9E}"/>
+                <a16:creationId xmlns:a16="http://schemas.microsoft.com/office/drawing/2014/main" id="{606C9DE5-D7A9-4314-B7D9-2043DBA69C67}"/>
               </a:ext>
             </a:extLst>
           </p:cNvPr>
@@ -2629,7 +2629,7 @@
     </p:spTree>
     <p:extLst>
       <p:ext uri="{BB962C8B-B14F-4D97-AF65-F5344CB8AC3E}">
-        <p14:creationId xmlns:p14="http://schemas.microsoft.com/office/powerpoint/2010/main" val="1605214796"/>
+        <p14:creationId xmlns:p14="http://schemas.microsoft.com/office/powerpoint/2010/main" val="1126197171"/>
       </p:ext>
     </p:extLst>
   </p:cSld>
@@ -2657,10 +2657,10 @@
       </p:grpSpPr>
       <p:sp>
         <p:nvSpPr>
-          <p:cNvPr id="19" name="">
-            <a:extLst xmlns:a="http://schemas.openxmlformats.org/drawingml/2006/main">
-              <a:ext uri="{FF2B5EF4-FFF2-40B4-BE49-F238E27FC236}">
-                <a16:creationId xmlns:a16="http://schemas.microsoft.com/office/drawing/2014/main" id="{3B28C5DC-E108-420F-8294-B8FE84F32B59}"/>
+          <p:cNvPr id="20" name="">
+            <a:extLst xmlns:a="http://schemas.openxmlformats.org/drawingml/2006/main">
+              <a:ext uri="{FF2B5EF4-FFF2-40B4-BE49-F238E27FC236}">
+                <a16:creationId xmlns:a16="http://schemas.microsoft.com/office/drawing/2014/main" id="{BED0FDC9-0BDC-43BC-862D-2BD8AF02EFB6}"/>
               </a:ext>
             </a:extLst>
           </p:cNvPr>
@@ -2717,7 +2717,7 @@
           <p:cNvPr id="2" name="">
             <a:extLst xmlns:a="http://schemas.openxmlformats.org/drawingml/2006/main">
               <a:ext uri="{FF2B5EF4-FFF2-40B4-BE49-F238E27FC236}">
-                <a16:creationId xmlns:a16="http://schemas.microsoft.com/office/drawing/2014/main" id="{79576ED2-CF43-4041-ACDD-102B079450C6}"/>
+                <a16:creationId xmlns:a16="http://schemas.microsoft.com/office/drawing/2014/main" id="{C5782DFF-A119-4005-90B9-0CC4639DBCF3}"/>
               </a:ext>
             </a:extLst>
           </p:cNvPr>
@@ -2774,7 +2774,7 @@
           <p:cNvPr id="3" name="">
             <a:extLst xmlns:a="http://schemas.openxmlformats.org/drawingml/2006/main">
               <a:ext uri="{FF2B5EF4-FFF2-40B4-BE49-F238E27FC236}">
-                <a16:creationId xmlns:a16="http://schemas.microsoft.com/office/drawing/2014/main" id="{410E863D-83CF-4215-A61C-FCD432144473}"/>
+                <a16:creationId xmlns:a16="http://schemas.microsoft.com/office/drawing/2014/main" id="{77E5BA02-B0A5-4486-97A7-D4E29F3265E1}"/>
               </a:ext>
             </a:extLst>
           </p:cNvPr>
@@ -2806,7 +2806,7 @@
           <p:cNvPr id="4" name="">
             <a:extLst xmlns:a="http://schemas.openxmlformats.org/drawingml/2006/main">
               <a:ext uri="{FF2B5EF4-FFF2-40B4-BE49-F238E27FC236}">
-                <a16:creationId xmlns:a16="http://schemas.microsoft.com/office/drawing/2014/main" id="{152FF0E3-D6C5-4049-B8CE-BC98E5DD3128}"/>
+                <a16:creationId xmlns:a16="http://schemas.microsoft.com/office/drawing/2014/main" id="{C62E246E-4E64-4961-9DBC-81D45DD43FC6}"/>
               </a:ext>
             </a:extLst>
           </p:cNvPr>
@@ -2863,7 +2863,7 @@
           <p:cNvPr id="5" name="">
             <a:extLst xmlns:a="http://schemas.openxmlformats.org/drawingml/2006/main">
               <a:ext uri="{FF2B5EF4-FFF2-40B4-BE49-F238E27FC236}">
-                <a16:creationId xmlns:a16="http://schemas.microsoft.com/office/drawing/2014/main" id="{4A3043E3-B8A1-428D-89E5-0DF1C1EBDFDB}"/>
+                <a16:creationId xmlns:a16="http://schemas.microsoft.com/office/drawing/2014/main" id="{93D9F276-A8E1-4E4E-A1EA-DC71AFA673E7}"/>
               </a:ext>
             </a:extLst>
           </p:cNvPr>
@@ -2920,7 +2920,7 @@
           <p:cNvPr id="6" name="">
             <a:extLst xmlns:a="http://schemas.openxmlformats.org/drawingml/2006/main">
               <a:ext uri="{FF2B5EF4-FFF2-40B4-BE49-F238E27FC236}">
-                <a16:creationId xmlns:a16="http://schemas.microsoft.com/office/drawing/2014/main" id="{BA555D49-34DA-4CEB-9E5D-E7C2369B9F29}"/>
+                <a16:creationId xmlns:a16="http://schemas.microsoft.com/office/drawing/2014/main" id="{ABED2BF0-4440-4DC2-9BD9-26613CCCFE6D}"/>
               </a:ext>
             </a:extLst>
           </p:cNvPr>
@@ -2949,14 +2949,14 @@
       </p:sp>
       <p:pic>
         <p:nvPicPr>
-          <p:cNvPr id="25" name=""/>
+          <p:cNvPr id="26" name=""/>
           <p:cNvPicPr>
             <a:picLocks xmlns:a="http://schemas.openxmlformats.org/drawingml/2006/main" noChangeAspect="1"/>
           </p:cNvPicPr>
           <p:nvPr/>
         </p:nvPicPr>
         <p:blipFill>
-          <a:blip xmlns:r="http://schemas.openxmlformats.org/officeDocument/2006/relationships" xmlns:a="http://schemas.openxmlformats.org/drawingml/2006/main" r:embed="Re4ce5330de504c66"/>
+          <a:blip xmlns:r="http://schemas.openxmlformats.org/officeDocument/2006/relationships" xmlns:a="http://schemas.openxmlformats.org/drawingml/2006/main" r:embed="R6ef24ecdcf9f4c84"/>
           <a:stretch xmlns:a="http://schemas.openxmlformats.org/drawingml/2006/main"/>
         </p:blipFill>
         <p:spPr>
@@ -2974,7 +2974,7 @@
           <p:cNvPr id="8" name="">
             <a:extLst xmlns:a="http://schemas.openxmlformats.org/drawingml/2006/main">
               <a:ext uri="{FF2B5EF4-FFF2-40B4-BE49-F238E27FC236}">
-                <a16:creationId xmlns:a16="http://schemas.microsoft.com/office/drawing/2014/main" id="{F19CC88B-2ACC-4A2E-A8AC-2EE1121818BE}"/>
+                <a16:creationId xmlns:a16="http://schemas.microsoft.com/office/drawing/2014/main" id="{5A20AF16-398E-4B5F-9ED5-7E5E65F8D468}"/>
               </a:ext>
             </a:extLst>
           </p:cNvPr>
@@ -3003,14 +3003,14 @@
       </p:sp>
       <p:pic>
         <p:nvPicPr>
-          <p:cNvPr id="27" name=""/>
+          <p:cNvPr id="28" name=""/>
           <p:cNvPicPr>
             <a:picLocks xmlns:a="http://schemas.openxmlformats.org/drawingml/2006/main" noChangeAspect="1"/>
           </p:cNvPicPr>
           <p:nvPr/>
         </p:nvPicPr>
         <p:blipFill>
-          <a:blip xmlns:r="http://schemas.openxmlformats.org/officeDocument/2006/relationships" xmlns:a="http://schemas.openxmlformats.org/drawingml/2006/main" r:embed="R0506c1d901a3456a"/>
+          <a:blip xmlns:r="http://schemas.openxmlformats.org/officeDocument/2006/relationships" xmlns:a="http://schemas.openxmlformats.org/drawingml/2006/main" r:embed="R3bfda1cc801649a7"/>
           <a:stretch xmlns:a="http://schemas.openxmlformats.org/drawingml/2006/main"/>
         </p:blipFill>
         <p:spPr>
@@ -3028,7 +3028,7 @@
           <p:cNvPr id="10" name="">
             <a:extLst xmlns:a="http://schemas.openxmlformats.org/drawingml/2006/main">
               <a:ext uri="{FF2B5EF4-FFF2-40B4-BE49-F238E27FC236}">
-                <a16:creationId xmlns:a16="http://schemas.microsoft.com/office/drawing/2014/main" id="{0A1ED5FE-EFF7-4793-9890-6608DC079249}"/>
+                <a16:creationId xmlns:a16="http://schemas.microsoft.com/office/drawing/2014/main" id="{5C7A64D8-CCC0-4292-9641-D8629DD99FB5}"/>
               </a:ext>
             </a:extLst>
           </p:cNvPr>
@@ -3060,7 +3060,7 @@
           <p:cNvPr id="11" name="">
             <a:extLst xmlns:a="http://schemas.openxmlformats.org/drawingml/2006/main">
               <a:ext uri="{FF2B5EF4-FFF2-40B4-BE49-F238E27FC236}">
-                <a16:creationId xmlns:a16="http://schemas.microsoft.com/office/drawing/2014/main" id="{EA08DD8D-F3D3-4326-A301-4802DA0F7CE6}"/>
+                <a16:creationId xmlns:a16="http://schemas.microsoft.com/office/drawing/2014/main" id="{93EA26C0-01EC-4975-8041-AAB219E6F58A}"/>
               </a:ext>
             </a:extLst>
           </p:cNvPr>
@@ -3117,7 +3117,7 @@
           <p:cNvPr id="12" name="">
             <a:extLst xmlns:a="http://schemas.openxmlformats.org/drawingml/2006/main">
               <a:ext uri="{FF2B5EF4-FFF2-40B4-BE49-F238E27FC236}">
-                <a16:creationId xmlns:a16="http://schemas.microsoft.com/office/drawing/2014/main" id="{55681CBB-D439-4D0C-97AD-F8DFD5C7FC53}"/>
+                <a16:creationId xmlns:a16="http://schemas.microsoft.com/office/drawing/2014/main" id="{8069F740-FE38-486C-9337-CAD9F4CB0CD8}"/>
               </a:ext>
             </a:extLst>
           </p:cNvPr>
@@ -3174,7 +3174,7 @@
           <p:cNvPr id="13" name="">
             <a:extLst xmlns:a="http://schemas.openxmlformats.org/drawingml/2006/main">
               <a:ext uri="{FF2B5EF4-FFF2-40B4-BE49-F238E27FC236}">
-                <a16:creationId xmlns:a16="http://schemas.microsoft.com/office/drawing/2014/main" id="{275D01C2-2351-44D2-BD8E-9AA0FF21FF04}"/>
+                <a16:creationId xmlns:a16="http://schemas.microsoft.com/office/drawing/2014/main" id="{9B6E1F2E-D59B-452D-B43F-653B32018EC7}"/>
               </a:ext>
             </a:extLst>
           </p:cNvPr>
@@ -3186,15 +3186,15 @@
         <p:spPr>
           <a:xfrm xmlns:a="http://schemas.openxmlformats.org/drawingml/2006/main">
             <a:off x="5715000" y="3105150"/>
-            <a:ext cx="5524500" cy="1238250"/>
+            <a:ext cx="5524500" cy="1390650"/>
           </a:xfrm>
           <a:prstGeom xmlns:a="http://schemas.openxmlformats.org/drawingml/2006/main" prst="roundRect">
             <a:avLst>
-              <a:gd name="adj" fmla="val 6154"/>
+              <a:gd name="adj" fmla="val 5479"/>
             </a:avLst>
           </a:prstGeom>
           <a:solidFill xmlns:a="http://schemas.openxmlformats.org/drawingml/2006/main">
-            <a:srgbClr val="EEF3F8"/>
+            <a:srgbClr val="17324D"/>
           </a:solidFill>
           <a:ln xmlns:a="http://schemas.openxmlformats.org/drawingml/2006/main" w="0">
             <a:noFill/>
@@ -3206,137 +3206,169 @@
           <p:cNvPr id="14" name="">
             <a:extLst xmlns:a="http://schemas.openxmlformats.org/drawingml/2006/main">
               <a:ext uri="{FF2B5EF4-FFF2-40B4-BE49-F238E27FC236}">
-                <a16:creationId xmlns:a16="http://schemas.microsoft.com/office/drawing/2014/main" id="{E50EF532-9FD3-4621-B075-A3C114545BD7}"/>
-              </a:ext>
-            </a:extLst>
-          </p:cNvPr>
-          <p:cNvSpPr>
-            <a:spLocks xmlns:a="http://schemas.openxmlformats.org/drawingml/2006/main" noGrp="1"/>
-          </p:cNvSpPr>
-          <p:nvPr/>
-        </p:nvSpPr>
-        <p:spPr>
-          <a:xfrm xmlns:a="http://schemas.openxmlformats.org/drawingml/2006/main">
-            <a:off x="5886450" y="3219450"/>
-            <a:ext cx="5181600" cy="228600"/>
-          </a:xfrm>
-          <a:prstGeom xmlns:a="http://schemas.openxmlformats.org/drawingml/2006/main" prst="rect">
-            <a:avLst/>
-          </a:prstGeom>
-          <a:noFill xmlns:a="http://schemas.openxmlformats.org/drawingml/2006/main"/>
-          <a:ln xmlns:a="http://schemas.openxmlformats.org/drawingml/2006/main" w="0">
-            <a:noFill/>
-          </a:ln>
-        </p:spPr>
-        <p:txBody>
-          <a:bodyPr xmlns:a="http://schemas.openxmlformats.org/drawingml/2006/main" anchor="ctr">
-            <a:normAutofit fontScale="85714"/>
-          </a:bodyPr>
-          <a:lstStyle xmlns:a="http://schemas.openxmlformats.org/drawingml/2006/main"/>
-          <a:p xmlns:a="http://schemas.openxmlformats.org/drawingml/2006/main">
-            <a:pPr algn="l">
-              <a:defRPr sz="1050" b="1">
-                <a:solidFill>
-                  <a:srgbClr val="17324D"/>
-                </a:solidFill>
-                <a:latin typeface="Pretendard"/>
-                <a:ea typeface="Pretendard"/>
-                <a:cs typeface="Pretendard"/>
-              </a:defRPr>
-            </a:pPr>
-            <a:r>
-              <a:rPr sz="1050" b="1">
-                <a:solidFill>
-                  <a:srgbClr val="17324D"/>
-                </a:solidFill>
-                <a:latin typeface="Pretendard"/>
-                <a:ea typeface="Pretendard"/>
-                <a:cs typeface="Pretendard"/>
-              </a:rPr>
-              <a:t>ESS 시사점</a:t>
-            </a:r>
-          </a:p>
-        </p:txBody>
-      </p:sp>
-      <p:sp>
-        <p:nvSpPr>
-          <p:cNvPr id="15" name="">
-            <a:extLst xmlns:a="http://schemas.openxmlformats.org/drawingml/2006/main">
-              <a:ext uri="{FF2B5EF4-FFF2-40B4-BE49-F238E27FC236}">
-                <a16:creationId xmlns:a16="http://schemas.microsoft.com/office/drawing/2014/main" id="{3696F1D5-2351-4CC8-B517-5DB0D1E63FCC}"/>
-              </a:ext>
-            </a:extLst>
-          </p:cNvPr>
-          <p:cNvSpPr>
-            <a:spLocks xmlns:a="http://schemas.openxmlformats.org/drawingml/2006/main" noGrp="1"/>
-          </p:cNvSpPr>
-          <p:nvPr/>
-        </p:nvSpPr>
-        <p:spPr>
-          <a:xfrm xmlns:a="http://schemas.openxmlformats.org/drawingml/2006/main">
-            <a:off x="5886450" y="3467100"/>
-            <a:ext cx="5181600" cy="781050"/>
-          </a:xfrm>
-          <a:prstGeom xmlns:a="http://schemas.openxmlformats.org/drawingml/2006/main" prst="rect">
-            <a:avLst/>
-          </a:prstGeom>
-          <a:noFill xmlns:a="http://schemas.openxmlformats.org/drawingml/2006/main"/>
-          <a:ln xmlns:a="http://schemas.openxmlformats.org/drawingml/2006/main" w="0">
-            <a:noFill/>
-          </a:ln>
-        </p:spPr>
-        <p:txBody>
-          <a:bodyPr xmlns:a="http://schemas.openxmlformats.org/drawingml/2006/main" anchor="ctr">
-            <a:normAutofit fontScale="100000"/>
-          </a:bodyPr>
-          <a:lstStyle xmlns:a="http://schemas.openxmlformats.org/drawingml/2006/main"/>
-          <a:p xmlns:a="http://schemas.openxmlformats.org/drawingml/2006/main">
-            <a:pPr algn="l">
-              <a:defRPr sz="1275" b="0">
-                <a:solidFill>
-                  <a:srgbClr val="1F2933"/>
-                </a:solidFill>
-                <a:latin typeface="Pretendard"/>
-                <a:ea typeface="Pretendard"/>
-                <a:cs typeface="Pretendard"/>
-              </a:defRPr>
-            </a:pPr>
-            <a:r>
-              <a:rPr sz="1275" b="0">
-                <a:solidFill>
-                  <a:srgbClr val="1F2933"/>
-                </a:solidFill>
-                <a:latin typeface="Pretendard"/>
-                <a:ea typeface="Pretendard"/>
-                <a:cs typeface="Pretendard"/>
-              </a:rPr>
-              <a:t>실제 ESS에서도 운전환경이나 사용조건이 달라지면 학습 데이터와 현장 데이터 사이에 분포 이동이 발생할 수 있다.</a:t>
-            </a:r>
-          </a:p>
-        </p:txBody>
-      </p:sp>
-      <p:sp>
-        <p:nvSpPr>
-          <p:cNvPr id="16" name="">
-            <a:extLst xmlns:a="http://schemas.openxmlformats.org/drawingml/2006/main">
-              <a:ext uri="{FF2B5EF4-FFF2-40B4-BE49-F238E27FC236}">
-                <a16:creationId xmlns:a16="http://schemas.microsoft.com/office/drawing/2014/main" id="{56B47334-3210-4566-939F-1C1B0130E6FB}"/>
-              </a:ext>
-            </a:extLst>
-          </p:cNvPr>
-          <p:cNvSpPr>
-            <a:spLocks xmlns:a="http://schemas.openxmlformats.org/drawingml/2006/main" noGrp="1"/>
-          </p:cNvSpPr>
-          <p:nvPr/>
-        </p:nvSpPr>
-        <p:spPr>
-          <a:xfrm xmlns:a="http://schemas.openxmlformats.org/drawingml/2006/main">
-            <a:off x="5715000" y="4533900"/>
-            <a:ext cx="5524500" cy="1409700"/>
+                <a16:creationId xmlns:a16="http://schemas.microsoft.com/office/drawing/2014/main" id="{02A5C125-9831-4D57-B93E-4C2FCB1CC032}"/>
+              </a:ext>
+            </a:extLst>
+          </p:cNvPr>
+          <p:cNvSpPr>
+            <a:spLocks xmlns:a="http://schemas.openxmlformats.org/drawingml/2006/main" noGrp="1"/>
+          </p:cNvSpPr>
+          <p:nvPr/>
+        </p:nvSpPr>
+        <p:spPr>
+          <a:xfrm xmlns:a="http://schemas.openxmlformats.org/drawingml/2006/main">
+            <a:off x="5715000" y="3105150"/>
+            <a:ext cx="76200" cy="1390650"/>
           </a:xfrm>
           <a:prstGeom xmlns:a="http://schemas.openxmlformats.org/drawingml/2006/main" prst="roundRect">
             <a:avLst>
-              <a:gd name="adj" fmla="val 5405"/>
+              <a:gd name="adj" fmla="val 50000"/>
+            </a:avLst>
+          </a:prstGeom>
+          <a:solidFill xmlns:a="http://schemas.openxmlformats.org/drawingml/2006/main">
+            <a:srgbClr val="008C85"/>
+          </a:solidFill>
+          <a:ln xmlns:a="http://schemas.openxmlformats.org/drawingml/2006/main" w="0">
+            <a:noFill/>
+          </a:ln>
+        </p:spPr>
+      </p:sp>
+      <p:sp>
+        <p:nvSpPr>
+          <p:cNvPr id="15" name="">
+            <a:extLst xmlns:a="http://schemas.openxmlformats.org/drawingml/2006/main">
+              <a:ext uri="{FF2B5EF4-FFF2-40B4-BE49-F238E27FC236}">
+                <a16:creationId xmlns:a16="http://schemas.microsoft.com/office/drawing/2014/main" id="{23D2BA91-6031-47B6-A71A-C7A03AB76FB2}"/>
+              </a:ext>
+            </a:extLst>
+          </p:cNvPr>
+          <p:cNvSpPr>
+            <a:spLocks xmlns:a="http://schemas.openxmlformats.org/drawingml/2006/main" noGrp="1"/>
+          </p:cNvSpPr>
+          <p:nvPr/>
+        </p:nvSpPr>
+        <p:spPr>
+          <a:xfrm xmlns:a="http://schemas.openxmlformats.org/drawingml/2006/main">
+            <a:off x="5943600" y="3219450"/>
+            <a:ext cx="5067300" cy="342900"/>
+          </a:xfrm>
+          <a:prstGeom xmlns:a="http://schemas.openxmlformats.org/drawingml/2006/main" prst="rect">
+            <a:avLst/>
+          </a:prstGeom>
+          <a:noFill xmlns:a="http://schemas.openxmlformats.org/drawingml/2006/main"/>
+          <a:ln xmlns:a="http://schemas.openxmlformats.org/drawingml/2006/main" w="0">
+            <a:noFill/>
+          </a:ln>
+        </p:spPr>
+        <p:txBody>
+          <a:bodyPr xmlns:a="http://schemas.openxmlformats.org/drawingml/2006/main" anchor="ctr">
+            <a:normAutofit fontScale="100000"/>
+          </a:bodyPr>
+          <a:lstStyle xmlns:a="http://schemas.openxmlformats.org/drawingml/2006/main"/>
+          <a:p xmlns:a="http://schemas.openxmlformats.org/drawingml/2006/main">
+            <a:pPr algn="l">
+              <a:defRPr sz="1575" b="1">
+                <a:solidFill>
+                  <a:srgbClr val="58D1C8"/>
+                </a:solidFill>
+                <a:latin typeface="Pretendard"/>
+                <a:ea typeface="Pretendard"/>
+                <a:cs typeface="Pretendard"/>
+              </a:defRPr>
+            </a:pPr>
+            <a:r>
+              <a:rPr sz="1575" b="1">
+                <a:solidFill>
+                  <a:srgbClr val="58D1C8"/>
+                </a:solidFill>
+                <a:latin typeface="Pretendard"/>
+                <a:ea typeface="Pretendard"/>
+                <a:cs typeface="Pretendard"/>
+              </a:rPr>
+              <a:t>한 Batch의 높은 정확도만으로 현장 적용성을 판단할 수 없다</a:t>
+            </a:r>
+          </a:p>
+        </p:txBody>
+      </p:sp>
+      <p:sp>
+        <p:nvSpPr>
+          <p:cNvPr id="16" name="">
+            <a:extLst xmlns:a="http://schemas.openxmlformats.org/drawingml/2006/main">
+              <a:ext uri="{FF2B5EF4-FFF2-40B4-BE49-F238E27FC236}">
+                <a16:creationId xmlns:a16="http://schemas.microsoft.com/office/drawing/2014/main" id="{EAFF6DDC-D816-487A-9025-260C3F17EE44}"/>
+              </a:ext>
+            </a:extLst>
+          </p:cNvPr>
+          <p:cNvSpPr>
+            <a:spLocks xmlns:a="http://schemas.openxmlformats.org/drawingml/2006/main" noGrp="1"/>
+          </p:cNvSpPr>
+          <p:nvPr/>
+        </p:nvSpPr>
+        <p:spPr>
+          <a:xfrm xmlns:a="http://schemas.openxmlformats.org/drawingml/2006/main">
+            <a:off x="5943600" y="3581400"/>
+            <a:ext cx="5067300" cy="800100"/>
+          </a:xfrm>
+          <a:prstGeom xmlns:a="http://schemas.openxmlformats.org/drawingml/2006/main" prst="rect">
+            <a:avLst/>
+          </a:prstGeom>
+          <a:noFill xmlns:a="http://schemas.openxmlformats.org/drawingml/2006/main"/>
+          <a:ln xmlns:a="http://schemas.openxmlformats.org/drawingml/2006/main" w="0">
+            <a:noFill/>
+          </a:ln>
+        </p:spPr>
+        <p:txBody>
+          <a:bodyPr xmlns:a="http://schemas.openxmlformats.org/drawingml/2006/main" anchor="ctr">
+            <a:normAutofit fontScale="100000"/>
+          </a:bodyPr>
+          <a:lstStyle xmlns:a="http://schemas.openxmlformats.org/drawingml/2006/main"/>
+          <a:p xmlns:a="http://schemas.openxmlformats.org/drawingml/2006/main">
+            <a:pPr algn="l">
+              <a:defRPr sz="1200" b="0">
+                <a:solidFill>
+                  <a:srgbClr val="FFFFFF"/>
+                </a:solidFill>
+                <a:latin typeface="Pretendard"/>
+                <a:ea typeface="Pretendard"/>
+                <a:cs typeface="Pretendard"/>
+              </a:defRPr>
+            </a:pPr>
+            <a:r>
+              <a:rPr sz="1200" b="0">
+                <a:solidFill>
+                  <a:srgbClr val="FFFFFF"/>
+                </a:solidFill>
+                <a:latin typeface="Pretendard"/>
+                <a:ea typeface="Pretendard"/>
+                <a:cs typeface="Pretendard"/>
+              </a:rPr>
+              <a:t>운전환경에 따라 수명 분포가 크게 달라진다. Batch 2·3에서 외부 일반화 성능을 확인해야 한다.</a:t>
+            </a:r>
+          </a:p>
+        </p:txBody>
+      </p:sp>
+      <p:sp>
+        <p:nvSpPr>
+          <p:cNvPr id="17" name="">
+            <a:extLst xmlns:a="http://schemas.openxmlformats.org/drawingml/2006/main">
+              <a:ext uri="{FF2B5EF4-FFF2-40B4-BE49-F238E27FC236}">
+                <a16:creationId xmlns:a16="http://schemas.microsoft.com/office/drawing/2014/main" id="{BD0E6DC3-6A32-4A4B-8DF4-CC188AB8EE7A}"/>
+              </a:ext>
+            </a:extLst>
+          </p:cNvPr>
+          <p:cNvSpPr>
+            <a:spLocks xmlns:a="http://schemas.openxmlformats.org/drawingml/2006/main" noGrp="1"/>
+          </p:cNvSpPr>
+          <p:nvPr/>
+        </p:nvSpPr>
+        <p:spPr>
+          <a:xfrm xmlns:a="http://schemas.openxmlformats.org/drawingml/2006/main">
+            <a:off x="5715000" y="4686300"/>
+            <a:ext cx="5524500" cy="1257300"/>
+          </a:xfrm>
+          <a:prstGeom xmlns:a="http://schemas.openxmlformats.org/drawingml/2006/main" prst="roundRect">
+            <a:avLst>
+              <a:gd name="adj" fmla="val 6061"/>
             </a:avLst>
           </a:prstGeom>
           <a:solidFill xmlns:a="http://schemas.openxmlformats.org/drawingml/2006/main">
@@ -3349,21 +3381,21 @@
       </p:sp>
       <p:sp>
         <p:nvSpPr>
-          <p:cNvPr id="17" name="">
-            <a:extLst xmlns:a="http://schemas.openxmlformats.org/drawingml/2006/main">
-              <a:ext uri="{FF2B5EF4-FFF2-40B4-BE49-F238E27FC236}">
-                <a16:creationId xmlns:a16="http://schemas.microsoft.com/office/drawing/2014/main" id="{3C305ED3-E5B2-43F0-BC3F-A6F7EF999454}"/>
-              </a:ext>
-            </a:extLst>
-          </p:cNvPr>
-          <p:cNvSpPr>
-            <a:spLocks xmlns:a="http://schemas.openxmlformats.org/drawingml/2006/main" noGrp="1"/>
-          </p:cNvSpPr>
-          <p:nvPr/>
-        </p:nvSpPr>
-        <p:spPr>
-          <a:xfrm xmlns:a="http://schemas.openxmlformats.org/drawingml/2006/main">
-            <a:off x="5886450" y="4648200"/>
+          <p:cNvPr id="18" name="">
+            <a:extLst xmlns:a="http://schemas.openxmlformats.org/drawingml/2006/main">
+              <a:ext uri="{FF2B5EF4-FFF2-40B4-BE49-F238E27FC236}">
+                <a16:creationId xmlns:a16="http://schemas.microsoft.com/office/drawing/2014/main" id="{DFBA4ED9-9A1B-44DE-BB9B-4E98EECD833E}"/>
+              </a:ext>
+            </a:extLst>
+          </p:cNvPr>
+          <p:cNvSpPr>
+            <a:spLocks xmlns:a="http://schemas.openxmlformats.org/drawingml/2006/main" noGrp="1"/>
+          </p:cNvSpPr>
+          <p:nvPr/>
+        </p:nvSpPr>
+        <p:spPr>
+          <a:xfrm xmlns:a="http://schemas.openxmlformats.org/drawingml/2006/main">
+            <a:off x="5886450" y="4800600"/>
             <a:ext cx="5181600" cy="228600"/>
           </a:xfrm>
           <a:prstGeom xmlns:a="http://schemas.openxmlformats.org/drawingml/2006/main" prst="rect">
@@ -3406,22 +3438,22 @@
       </p:sp>
       <p:sp>
         <p:nvSpPr>
-          <p:cNvPr id="18" name="">
-            <a:extLst xmlns:a="http://schemas.openxmlformats.org/drawingml/2006/main">
-              <a:ext uri="{FF2B5EF4-FFF2-40B4-BE49-F238E27FC236}">
-                <a16:creationId xmlns:a16="http://schemas.microsoft.com/office/drawing/2014/main" id="{41EC39B9-57EB-401A-AE36-CD57A27C07DF}"/>
-              </a:ext>
-            </a:extLst>
-          </p:cNvPr>
-          <p:cNvSpPr>
-            <a:spLocks xmlns:a="http://schemas.openxmlformats.org/drawingml/2006/main" noGrp="1"/>
-          </p:cNvSpPr>
-          <p:nvPr/>
-        </p:nvSpPr>
-        <p:spPr>
-          <a:xfrm xmlns:a="http://schemas.openxmlformats.org/drawingml/2006/main">
-            <a:off x="5886450" y="4895850"/>
-            <a:ext cx="5181600" cy="952500"/>
+          <p:cNvPr id="19" name="">
+            <a:extLst xmlns:a="http://schemas.openxmlformats.org/drawingml/2006/main">
+              <a:ext uri="{FF2B5EF4-FFF2-40B4-BE49-F238E27FC236}">
+                <a16:creationId xmlns:a16="http://schemas.microsoft.com/office/drawing/2014/main" id="{951E9ECC-57B6-45E5-977E-1CDB6E6B2BEE}"/>
+              </a:ext>
+            </a:extLst>
+          </p:cNvPr>
+          <p:cNvSpPr>
+            <a:spLocks xmlns:a="http://schemas.openxmlformats.org/drawingml/2006/main" noGrp="1"/>
+          </p:cNvSpPr>
+          <p:nvPr/>
+        </p:nvSpPr>
+        <p:spPr>
+          <a:xfrm xmlns:a="http://schemas.openxmlformats.org/drawingml/2006/main">
+            <a:off x="5886450" y="5048250"/>
+            <a:ext cx="5181600" cy="800100"/>
           </a:xfrm>
           <a:prstGeom xmlns:a="http://schemas.openxmlformats.org/drawingml/2006/main" prst="rect">
             <a:avLst/>
@@ -3464,7 +3496,7 @@
     </p:spTree>
     <p:extLst>
       <p:ext uri="{BB962C8B-B14F-4D97-AF65-F5344CB8AC3E}">
-        <p14:creationId xmlns:p14="http://schemas.microsoft.com/office/powerpoint/2010/main" val="717306825"/>
+        <p14:creationId xmlns:p14="http://schemas.microsoft.com/office/powerpoint/2010/main" val="972945454"/>
       </p:ext>
     </p:extLst>
   </p:cSld>
@@ -3492,10 +3524,10 @@
       </p:grpSpPr>
       <p:sp>
         <p:nvSpPr>
-          <p:cNvPr id="21" name="">
-            <a:extLst xmlns:a="http://schemas.openxmlformats.org/drawingml/2006/main">
-              <a:ext uri="{FF2B5EF4-FFF2-40B4-BE49-F238E27FC236}">
-                <a16:creationId xmlns:a16="http://schemas.microsoft.com/office/drawing/2014/main" id="{DE7E7E98-DEE8-46D0-8C49-18AED13A341A}"/>
+          <p:cNvPr id="22" name="">
+            <a:extLst xmlns:a="http://schemas.openxmlformats.org/drawingml/2006/main">
+              <a:ext uri="{FF2B5EF4-FFF2-40B4-BE49-F238E27FC236}">
+                <a16:creationId xmlns:a16="http://schemas.microsoft.com/office/drawing/2014/main" id="{CF7E8C9C-938C-447D-9F48-DD5C4446085C}"/>
               </a:ext>
             </a:extLst>
           </p:cNvPr>
@@ -3552,7 +3584,7 @@
           <p:cNvPr id="2" name="">
             <a:extLst xmlns:a="http://schemas.openxmlformats.org/drawingml/2006/main">
               <a:ext uri="{FF2B5EF4-FFF2-40B4-BE49-F238E27FC236}">
-                <a16:creationId xmlns:a16="http://schemas.microsoft.com/office/drawing/2014/main" id="{BD81BF2F-F6A7-4554-9129-D4AB37E1B9FB}"/>
+                <a16:creationId xmlns:a16="http://schemas.microsoft.com/office/drawing/2014/main" id="{078496B6-2321-4F23-962F-B7AED8F9861C}"/>
               </a:ext>
             </a:extLst>
           </p:cNvPr>
@@ -3609,7 +3641,7 @@
           <p:cNvPr id="3" name="">
             <a:extLst xmlns:a="http://schemas.openxmlformats.org/drawingml/2006/main">
               <a:ext uri="{FF2B5EF4-FFF2-40B4-BE49-F238E27FC236}">
-                <a16:creationId xmlns:a16="http://schemas.microsoft.com/office/drawing/2014/main" id="{4EA5B2C8-E48A-423A-81A9-C30FDCB831E2}"/>
+                <a16:creationId xmlns:a16="http://schemas.microsoft.com/office/drawing/2014/main" id="{C1988420-36AB-4A00-A5C5-DA67ACBFF178}"/>
               </a:ext>
             </a:extLst>
           </p:cNvPr>
@@ -3641,7 +3673,7 @@
           <p:cNvPr id="4" name="">
             <a:extLst xmlns:a="http://schemas.openxmlformats.org/drawingml/2006/main">
               <a:ext uri="{FF2B5EF4-FFF2-40B4-BE49-F238E27FC236}">
-                <a16:creationId xmlns:a16="http://schemas.microsoft.com/office/drawing/2014/main" id="{46112C03-6A04-4646-8D1C-F2562C4B350D}"/>
+                <a16:creationId xmlns:a16="http://schemas.microsoft.com/office/drawing/2014/main" id="{B794B181-C231-49E0-8637-7EB95FF22B02}"/>
               </a:ext>
             </a:extLst>
           </p:cNvPr>
@@ -3698,7 +3730,7 @@
           <p:cNvPr id="5" name="">
             <a:extLst xmlns:a="http://schemas.openxmlformats.org/drawingml/2006/main">
               <a:ext uri="{FF2B5EF4-FFF2-40B4-BE49-F238E27FC236}">
-                <a16:creationId xmlns:a16="http://schemas.microsoft.com/office/drawing/2014/main" id="{C1991A82-5558-4117-8D41-A179CA490720}"/>
+                <a16:creationId xmlns:a16="http://schemas.microsoft.com/office/drawing/2014/main" id="{6B79F1CD-7A52-401F-91B4-5C89FDCB95B9}"/>
               </a:ext>
             </a:extLst>
           </p:cNvPr>
@@ -3755,7 +3787,7 @@
           <p:cNvPr id="6" name="">
             <a:extLst xmlns:a="http://schemas.openxmlformats.org/drawingml/2006/main">
               <a:ext uri="{FF2B5EF4-FFF2-40B4-BE49-F238E27FC236}">
-                <a16:creationId xmlns:a16="http://schemas.microsoft.com/office/drawing/2014/main" id="{01C93169-EA48-4420-BCF2-B7ACEA1A0C8D}"/>
+                <a16:creationId xmlns:a16="http://schemas.microsoft.com/office/drawing/2014/main" id="{F3E7A5F1-A39F-429A-AE73-3E91D0299862}"/>
               </a:ext>
             </a:extLst>
           </p:cNvPr>
@@ -3784,14 +3816,14 @@
       </p:sp>
       <p:pic>
         <p:nvPicPr>
-          <p:cNvPr id="27" name=""/>
+          <p:cNvPr id="28" name=""/>
           <p:cNvPicPr>
             <a:picLocks xmlns:a="http://schemas.openxmlformats.org/drawingml/2006/main" noChangeAspect="1"/>
           </p:cNvPicPr>
           <p:nvPr/>
         </p:nvPicPr>
         <p:blipFill>
-          <a:blip xmlns:r="http://schemas.openxmlformats.org/officeDocument/2006/relationships" xmlns:a="http://schemas.openxmlformats.org/drawingml/2006/main" r:embed="Rb8751909bb3140af"/>
+          <a:blip xmlns:r="http://schemas.openxmlformats.org/officeDocument/2006/relationships" xmlns:a="http://schemas.openxmlformats.org/drawingml/2006/main" r:embed="R9b3cc673ffba40fc"/>
           <a:stretch xmlns:a="http://schemas.openxmlformats.org/drawingml/2006/main"/>
         </p:blipFill>
         <p:spPr>
@@ -3809,7 +3841,7 @@
           <p:cNvPr id="8" name="">
             <a:extLst xmlns:a="http://schemas.openxmlformats.org/drawingml/2006/main">
               <a:ext uri="{FF2B5EF4-FFF2-40B4-BE49-F238E27FC236}">
-                <a16:creationId xmlns:a16="http://schemas.microsoft.com/office/drawing/2014/main" id="{BDADDDF7-AC89-4AE1-BD90-59223770A731}"/>
+                <a16:creationId xmlns:a16="http://schemas.microsoft.com/office/drawing/2014/main" id="{92B25317-CB61-4336-B8DF-CCFB10F63DCE}"/>
               </a:ext>
             </a:extLst>
           </p:cNvPr>
@@ -3866,7 +3898,7 @@
           <p:cNvPr id="9" name="">
             <a:extLst xmlns:a="http://schemas.openxmlformats.org/drawingml/2006/main">
               <a:ext uri="{FF2B5EF4-FFF2-40B4-BE49-F238E27FC236}">
-                <a16:creationId xmlns:a16="http://schemas.microsoft.com/office/drawing/2014/main" id="{EACC80AB-EAF5-49E0-B994-771C352C38A3}"/>
+                <a16:creationId xmlns:a16="http://schemas.microsoft.com/office/drawing/2014/main" id="{84D7F663-2F02-456F-A8EC-E48B5750899F}"/>
               </a:ext>
             </a:extLst>
           </p:cNvPr>
@@ -3923,7 +3955,7 @@
           <p:cNvPr id="10" name="">
             <a:extLst xmlns:a="http://schemas.openxmlformats.org/drawingml/2006/main">
               <a:ext uri="{FF2B5EF4-FFF2-40B4-BE49-F238E27FC236}">
-                <a16:creationId xmlns:a16="http://schemas.microsoft.com/office/drawing/2014/main" id="{39E9B72C-19D0-45FE-AC78-87AED56E7D4E}"/>
+                <a16:creationId xmlns:a16="http://schemas.microsoft.com/office/drawing/2014/main" id="{9FFB8B35-060F-42BC-AE45-7C650A49ED98}"/>
               </a:ext>
             </a:extLst>
           </p:cNvPr>
@@ -3955,7 +3987,7 @@
           <p:cNvPr id="11" name="">
             <a:extLst xmlns:a="http://schemas.openxmlformats.org/drawingml/2006/main">
               <a:ext uri="{FF2B5EF4-FFF2-40B4-BE49-F238E27FC236}">
-                <a16:creationId xmlns:a16="http://schemas.microsoft.com/office/drawing/2014/main" id="{7CC59697-D521-43B0-96A7-EE43FDC8A2A6}"/>
+                <a16:creationId xmlns:a16="http://schemas.microsoft.com/office/drawing/2014/main" id="{AFCA2187-9184-4E20-8310-DF721EB3A7DA}"/>
               </a:ext>
             </a:extLst>
           </p:cNvPr>
@@ -4012,7 +4044,7 @@
           <p:cNvPr id="12" name="">
             <a:extLst xmlns:a="http://schemas.openxmlformats.org/drawingml/2006/main">
               <a:ext uri="{FF2B5EF4-FFF2-40B4-BE49-F238E27FC236}">
-                <a16:creationId xmlns:a16="http://schemas.microsoft.com/office/drawing/2014/main" id="{143A522E-B7B3-43CD-A554-5F785FFD984E}"/>
+                <a16:creationId xmlns:a16="http://schemas.microsoft.com/office/drawing/2014/main" id="{9F9A1998-4300-427B-B29D-929FB9FF558F}"/>
               </a:ext>
             </a:extLst>
           </p:cNvPr>
@@ -4069,7 +4101,7 @@
           <p:cNvPr id="13" name="">
             <a:extLst xmlns:a="http://schemas.openxmlformats.org/drawingml/2006/main">
               <a:ext uri="{FF2B5EF4-FFF2-40B4-BE49-F238E27FC236}">
-                <a16:creationId xmlns:a16="http://schemas.microsoft.com/office/drawing/2014/main" id="{6BEB8CB9-6892-4FF2-8459-1C1B2D681978}"/>
+                <a16:creationId xmlns:a16="http://schemas.microsoft.com/office/drawing/2014/main" id="{F9A775F4-350A-4039-B9E6-F7CF9C2E9C34}"/>
               </a:ext>
             </a:extLst>
           </p:cNvPr>
@@ -4081,15 +4113,15 @@
         <p:spPr>
           <a:xfrm xmlns:a="http://schemas.openxmlformats.org/drawingml/2006/main">
             <a:off x="7143750" y="3048000"/>
-            <a:ext cx="4095750" cy="1219200"/>
+            <a:ext cx="4095750" cy="1466850"/>
           </a:xfrm>
           <a:prstGeom xmlns:a="http://schemas.openxmlformats.org/drawingml/2006/main" prst="roundRect">
             <a:avLst>
-              <a:gd name="adj" fmla="val 6250"/>
+              <a:gd name="adj" fmla="val 5195"/>
             </a:avLst>
           </a:prstGeom>
           <a:solidFill xmlns:a="http://schemas.openxmlformats.org/drawingml/2006/main">
-            <a:srgbClr val="EEF3F8"/>
+            <a:srgbClr val="17324D"/>
           </a:solidFill>
           <a:ln xmlns:a="http://schemas.openxmlformats.org/drawingml/2006/main" w="0">
             <a:noFill/>
@@ -4101,137 +4133,169 @@
           <p:cNvPr id="14" name="">
             <a:extLst xmlns:a="http://schemas.openxmlformats.org/drawingml/2006/main">
               <a:ext uri="{FF2B5EF4-FFF2-40B4-BE49-F238E27FC236}">
-                <a16:creationId xmlns:a16="http://schemas.microsoft.com/office/drawing/2014/main" id="{87468CEC-DFDD-48A8-AF4E-D3668CD8923E}"/>
-              </a:ext>
-            </a:extLst>
-          </p:cNvPr>
-          <p:cNvSpPr>
-            <a:spLocks xmlns:a="http://schemas.openxmlformats.org/drawingml/2006/main" noGrp="1"/>
-          </p:cNvSpPr>
-          <p:nvPr/>
-        </p:nvSpPr>
-        <p:spPr>
-          <a:xfrm xmlns:a="http://schemas.openxmlformats.org/drawingml/2006/main">
-            <a:off x="7315200" y="3162300"/>
-            <a:ext cx="3752850" cy="228600"/>
-          </a:xfrm>
-          <a:prstGeom xmlns:a="http://schemas.openxmlformats.org/drawingml/2006/main" prst="rect">
-            <a:avLst/>
-          </a:prstGeom>
-          <a:noFill xmlns:a="http://schemas.openxmlformats.org/drawingml/2006/main"/>
-          <a:ln xmlns:a="http://schemas.openxmlformats.org/drawingml/2006/main" w="0">
-            <a:noFill/>
-          </a:ln>
-        </p:spPr>
-        <p:txBody>
-          <a:bodyPr xmlns:a="http://schemas.openxmlformats.org/drawingml/2006/main" anchor="ctr">
-            <a:normAutofit fontScale="85714"/>
-          </a:bodyPr>
-          <a:lstStyle xmlns:a="http://schemas.openxmlformats.org/drawingml/2006/main"/>
-          <a:p xmlns:a="http://schemas.openxmlformats.org/drawingml/2006/main">
-            <a:pPr algn="l">
-              <a:defRPr sz="1050" b="1">
-                <a:solidFill>
-                  <a:srgbClr val="17324D"/>
-                </a:solidFill>
-                <a:latin typeface="Pretendard"/>
-                <a:ea typeface="Pretendard"/>
-                <a:cs typeface="Pretendard"/>
-              </a:defRPr>
-            </a:pPr>
-            <a:r>
-              <a:rPr sz="1050" b="1">
-                <a:solidFill>
-                  <a:srgbClr val="17324D"/>
-                </a:solidFill>
-                <a:latin typeface="Pretendard"/>
-                <a:ea typeface="Pretendard"/>
-                <a:cs typeface="Pretendard"/>
-              </a:rPr>
-              <a:t>ESS 시사점</a:t>
-            </a:r>
-          </a:p>
-        </p:txBody>
-      </p:sp>
-      <p:sp>
-        <p:nvSpPr>
-          <p:cNvPr id="15" name="">
-            <a:extLst xmlns:a="http://schemas.openxmlformats.org/drawingml/2006/main">
-              <a:ext uri="{FF2B5EF4-FFF2-40B4-BE49-F238E27FC236}">
-                <a16:creationId xmlns:a16="http://schemas.microsoft.com/office/drawing/2014/main" id="{50202ED6-E4B2-4681-AEB1-276103A31B6B}"/>
-              </a:ext>
-            </a:extLst>
-          </p:cNvPr>
-          <p:cNvSpPr>
-            <a:spLocks xmlns:a="http://schemas.openxmlformats.org/drawingml/2006/main" noGrp="1"/>
-          </p:cNvSpPr>
-          <p:nvPr/>
-        </p:nvSpPr>
-        <p:spPr>
-          <a:xfrm xmlns:a="http://schemas.openxmlformats.org/drawingml/2006/main">
-            <a:off x="7315200" y="3409950"/>
-            <a:ext cx="3752850" cy="762000"/>
-          </a:xfrm>
-          <a:prstGeom xmlns:a="http://schemas.openxmlformats.org/drawingml/2006/main" prst="rect">
-            <a:avLst/>
-          </a:prstGeom>
-          <a:noFill xmlns:a="http://schemas.openxmlformats.org/drawingml/2006/main"/>
-          <a:ln xmlns:a="http://schemas.openxmlformats.org/drawingml/2006/main" w="0">
-            <a:noFill/>
-          </a:ln>
-        </p:spPr>
-        <p:txBody>
-          <a:bodyPr xmlns:a="http://schemas.openxmlformats.org/drawingml/2006/main" anchor="ctr">
-            <a:normAutofit fontScale="100000"/>
-          </a:bodyPr>
-          <a:lstStyle xmlns:a="http://schemas.openxmlformats.org/drawingml/2006/main"/>
-          <a:p xmlns:a="http://schemas.openxmlformats.org/drawingml/2006/main">
-            <a:pPr algn="l">
-              <a:defRPr sz="1275" b="0">
-                <a:solidFill>
-                  <a:srgbClr val="1F2933"/>
-                </a:solidFill>
-                <a:latin typeface="Pretendard"/>
-                <a:ea typeface="Pretendard"/>
-                <a:cs typeface="Pretendard"/>
-              </a:defRPr>
-            </a:pPr>
-            <a:r>
-              <a:rPr sz="1275" b="0">
-                <a:solidFill>
-                  <a:srgbClr val="1F2933"/>
-                </a:solidFill>
-                <a:latin typeface="Pretendard"/>
-                <a:ea typeface="Pretendard"/>
-                <a:cs typeface="Pretendard"/>
-              </a:rPr>
-              <a:t>한 시점의 용량만으로 장기 수명을 판단하기보다 초기 운전 구간의 열화 변화 추세를 추적해야 한다.</a:t>
-            </a:r>
-          </a:p>
-        </p:txBody>
-      </p:sp>
-      <p:sp>
-        <p:nvSpPr>
-          <p:cNvPr id="16" name="">
-            <a:extLst xmlns:a="http://schemas.openxmlformats.org/drawingml/2006/main">
-              <a:ext uri="{FF2B5EF4-FFF2-40B4-BE49-F238E27FC236}">
-                <a16:creationId xmlns:a16="http://schemas.microsoft.com/office/drawing/2014/main" id="{2B1916E2-3583-43CA-AAE0-F3279F4EDA56}"/>
-              </a:ext>
-            </a:extLst>
-          </p:cNvPr>
-          <p:cNvSpPr>
-            <a:spLocks xmlns:a="http://schemas.openxmlformats.org/drawingml/2006/main" noGrp="1"/>
-          </p:cNvSpPr>
-          <p:nvPr/>
-        </p:nvSpPr>
-        <p:spPr>
-          <a:xfrm xmlns:a="http://schemas.openxmlformats.org/drawingml/2006/main">
-            <a:off x="7143750" y="4457700"/>
-            <a:ext cx="4095750" cy="1009650"/>
+                <a16:creationId xmlns:a16="http://schemas.microsoft.com/office/drawing/2014/main" id="{C8562502-FA8A-4007-A24C-0D9915940176}"/>
+              </a:ext>
+            </a:extLst>
+          </p:cNvPr>
+          <p:cNvSpPr>
+            <a:spLocks xmlns:a="http://schemas.openxmlformats.org/drawingml/2006/main" noGrp="1"/>
+          </p:cNvSpPr>
+          <p:nvPr/>
+        </p:nvSpPr>
+        <p:spPr>
+          <a:xfrm xmlns:a="http://schemas.openxmlformats.org/drawingml/2006/main">
+            <a:off x="7143750" y="3048000"/>
+            <a:ext cx="76200" cy="1466850"/>
           </a:xfrm>
           <a:prstGeom xmlns:a="http://schemas.openxmlformats.org/drawingml/2006/main" prst="roundRect">
             <a:avLst>
-              <a:gd name="adj" fmla="val 7547"/>
+              <a:gd name="adj" fmla="val 50000"/>
+            </a:avLst>
+          </a:prstGeom>
+          <a:solidFill xmlns:a="http://schemas.openxmlformats.org/drawingml/2006/main">
+            <a:srgbClr val="008C85"/>
+          </a:solidFill>
+          <a:ln xmlns:a="http://schemas.openxmlformats.org/drawingml/2006/main" w="0">
+            <a:noFill/>
+          </a:ln>
+        </p:spPr>
+      </p:sp>
+      <p:sp>
+        <p:nvSpPr>
+          <p:cNvPr id="15" name="">
+            <a:extLst xmlns:a="http://schemas.openxmlformats.org/drawingml/2006/main">
+              <a:ext uri="{FF2B5EF4-FFF2-40B4-BE49-F238E27FC236}">
+                <a16:creationId xmlns:a16="http://schemas.microsoft.com/office/drawing/2014/main" id="{711527B2-8F6D-49D0-AC91-D12A97DCC7EF}"/>
+              </a:ext>
+            </a:extLst>
+          </p:cNvPr>
+          <p:cNvSpPr>
+            <a:spLocks xmlns:a="http://schemas.openxmlformats.org/drawingml/2006/main" noGrp="1"/>
+          </p:cNvSpPr>
+          <p:nvPr/>
+        </p:nvSpPr>
+        <p:spPr>
+          <a:xfrm xmlns:a="http://schemas.openxmlformats.org/drawingml/2006/main">
+            <a:off x="7372350" y="3162300"/>
+            <a:ext cx="3638550" cy="342900"/>
+          </a:xfrm>
+          <a:prstGeom xmlns:a="http://schemas.openxmlformats.org/drawingml/2006/main" prst="rect">
+            <a:avLst/>
+          </a:prstGeom>
+          <a:noFill xmlns:a="http://schemas.openxmlformats.org/drawingml/2006/main"/>
+          <a:ln xmlns:a="http://schemas.openxmlformats.org/drawingml/2006/main" w="0">
+            <a:noFill/>
+          </a:ln>
+        </p:spPr>
+        <p:txBody>
+          <a:bodyPr xmlns:a="http://schemas.openxmlformats.org/drawingml/2006/main" anchor="ctr">
+            <a:normAutofit fontScale="94055"/>
+          </a:bodyPr>
+          <a:lstStyle xmlns:a="http://schemas.openxmlformats.org/drawingml/2006/main"/>
+          <a:p xmlns:a="http://schemas.openxmlformats.org/drawingml/2006/main">
+            <a:pPr algn="l">
+              <a:defRPr sz="1575" b="1">
+                <a:solidFill>
+                  <a:srgbClr val="58D1C8"/>
+                </a:solidFill>
+                <a:latin typeface="Pretendard"/>
+                <a:ea typeface="Pretendard"/>
+                <a:cs typeface="Pretendard"/>
+              </a:defRPr>
+            </a:pPr>
+            <a:r>
+              <a:rPr sz="1575" b="1">
+                <a:solidFill>
+                  <a:srgbClr val="58D1C8"/>
+                </a:solidFill>
+                <a:latin typeface="Pretendard"/>
+                <a:ea typeface="Pretendard"/>
+                <a:cs typeface="Pretendard"/>
+              </a:rPr>
+              <a:t>현재 용량이 비슷해도 남은 수명은 다를 수 있다</a:t>
+            </a:r>
+          </a:p>
+        </p:txBody>
+      </p:sp>
+      <p:sp>
+        <p:nvSpPr>
+          <p:cNvPr id="16" name="">
+            <a:extLst xmlns:a="http://schemas.openxmlformats.org/drawingml/2006/main">
+              <a:ext uri="{FF2B5EF4-FFF2-40B4-BE49-F238E27FC236}">
+                <a16:creationId xmlns:a16="http://schemas.microsoft.com/office/drawing/2014/main" id="{A2B8D804-1E39-4BB1-A22C-CBCD36B39F36}"/>
+              </a:ext>
+            </a:extLst>
+          </p:cNvPr>
+          <p:cNvSpPr>
+            <a:spLocks xmlns:a="http://schemas.openxmlformats.org/drawingml/2006/main" noGrp="1"/>
+          </p:cNvSpPr>
+          <p:nvPr/>
+        </p:nvSpPr>
+        <p:spPr>
+          <a:xfrm xmlns:a="http://schemas.openxmlformats.org/drawingml/2006/main">
+            <a:off x="7372350" y="3524250"/>
+            <a:ext cx="3638550" cy="876300"/>
+          </a:xfrm>
+          <a:prstGeom xmlns:a="http://schemas.openxmlformats.org/drawingml/2006/main" prst="rect">
+            <a:avLst/>
+          </a:prstGeom>
+          <a:noFill xmlns:a="http://schemas.openxmlformats.org/drawingml/2006/main"/>
+          <a:ln xmlns:a="http://schemas.openxmlformats.org/drawingml/2006/main" w="0">
+            <a:noFill/>
+          </a:ln>
+        </p:spPr>
+        <p:txBody>
+          <a:bodyPr xmlns:a="http://schemas.openxmlformats.org/drawingml/2006/main" anchor="ctr">
+            <a:normAutofit fontScale="100000"/>
+          </a:bodyPr>
+          <a:lstStyle xmlns:a="http://schemas.openxmlformats.org/drawingml/2006/main"/>
+          <a:p xmlns:a="http://schemas.openxmlformats.org/drawingml/2006/main">
+            <a:pPr algn="l">
+              <a:defRPr sz="1200" b="0">
+                <a:solidFill>
+                  <a:srgbClr val="FFFFFF"/>
+                </a:solidFill>
+                <a:latin typeface="Pretendard"/>
+                <a:ea typeface="Pretendard"/>
+                <a:cs typeface="Pretendard"/>
+              </a:defRPr>
+            </a:pPr>
+            <a:r>
+              <a:rPr sz="1200" b="0">
+                <a:solidFill>
+                  <a:srgbClr val="FFFFFF"/>
+                </a:solidFill>
+                <a:latin typeface="Pretendard"/>
+                <a:ea typeface="Pretendard"/>
+                <a:cs typeface="Pretendard"/>
+              </a:rPr>
+              <a:t>조기 위험 Cell을 구분하려면 단일 용량값보다 초기 열화 변화 속도와 곡선 변화를 추적해야 한다.</a:t>
+            </a:r>
+          </a:p>
+        </p:txBody>
+      </p:sp>
+      <p:sp>
+        <p:nvSpPr>
+          <p:cNvPr id="17" name="">
+            <a:extLst xmlns:a="http://schemas.openxmlformats.org/drawingml/2006/main">
+              <a:ext uri="{FF2B5EF4-FFF2-40B4-BE49-F238E27FC236}">
+                <a16:creationId xmlns:a16="http://schemas.microsoft.com/office/drawing/2014/main" id="{B82FFE7F-3431-458B-B72B-3153ACCCE2E1}"/>
+              </a:ext>
+            </a:extLst>
+          </p:cNvPr>
+          <p:cNvSpPr>
+            <a:spLocks xmlns:a="http://schemas.openxmlformats.org/drawingml/2006/main" noGrp="1"/>
+          </p:cNvSpPr>
+          <p:nvPr/>
+        </p:nvSpPr>
+        <p:spPr>
+          <a:xfrm xmlns:a="http://schemas.openxmlformats.org/drawingml/2006/main">
+            <a:off x="7143750" y="4705350"/>
+            <a:ext cx="4095750" cy="762000"/>
+          </a:xfrm>
+          <a:prstGeom xmlns:a="http://schemas.openxmlformats.org/drawingml/2006/main" prst="roundRect">
+            <a:avLst>
+              <a:gd name="adj" fmla="val 10000"/>
             </a:avLst>
           </a:prstGeom>
           <a:solidFill xmlns:a="http://schemas.openxmlformats.org/drawingml/2006/main">
@@ -4244,21 +4308,21 @@
       </p:sp>
       <p:sp>
         <p:nvSpPr>
-          <p:cNvPr id="17" name="">
-            <a:extLst xmlns:a="http://schemas.openxmlformats.org/drawingml/2006/main">
-              <a:ext uri="{FF2B5EF4-FFF2-40B4-BE49-F238E27FC236}">
-                <a16:creationId xmlns:a16="http://schemas.microsoft.com/office/drawing/2014/main" id="{28D878AA-948E-4343-81EF-46357BE142D4}"/>
-              </a:ext>
-            </a:extLst>
-          </p:cNvPr>
-          <p:cNvSpPr>
-            <a:spLocks xmlns:a="http://schemas.openxmlformats.org/drawingml/2006/main" noGrp="1"/>
-          </p:cNvSpPr>
-          <p:nvPr/>
-        </p:nvSpPr>
-        <p:spPr>
-          <a:xfrm xmlns:a="http://schemas.openxmlformats.org/drawingml/2006/main">
-            <a:off x="7315200" y="4572000"/>
+          <p:cNvPr id="18" name="">
+            <a:extLst xmlns:a="http://schemas.openxmlformats.org/drawingml/2006/main">
+              <a:ext uri="{FF2B5EF4-FFF2-40B4-BE49-F238E27FC236}">
+                <a16:creationId xmlns:a16="http://schemas.microsoft.com/office/drawing/2014/main" id="{5C9C4BA8-473C-48AF-8B5D-D831A3401299}"/>
+              </a:ext>
+            </a:extLst>
+          </p:cNvPr>
+          <p:cNvSpPr>
+            <a:spLocks xmlns:a="http://schemas.openxmlformats.org/drawingml/2006/main" noGrp="1"/>
+          </p:cNvSpPr>
+          <p:nvPr/>
+        </p:nvSpPr>
+        <p:spPr>
+          <a:xfrm xmlns:a="http://schemas.openxmlformats.org/drawingml/2006/main">
+            <a:off x="7315200" y="4819650"/>
             <a:ext cx="3752850" cy="228600"/>
           </a:xfrm>
           <a:prstGeom xmlns:a="http://schemas.openxmlformats.org/drawingml/2006/main" prst="rect">
@@ -4301,34 +4365,34 @@
       </p:sp>
       <p:sp>
         <p:nvSpPr>
-          <p:cNvPr id="18" name="">
-            <a:extLst xmlns:a="http://schemas.openxmlformats.org/drawingml/2006/main">
-              <a:ext uri="{FF2B5EF4-FFF2-40B4-BE49-F238E27FC236}">
-                <a16:creationId xmlns:a16="http://schemas.microsoft.com/office/drawing/2014/main" id="{E1E394E8-D8B6-4197-89FC-ACFE5A482C12}"/>
-              </a:ext>
-            </a:extLst>
-          </p:cNvPr>
-          <p:cNvSpPr>
-            <a:spLocks xmlns:a="http://schemas.openxmlformats.org/drawingml/2006/main" noGrp="1"/>
-          </p:cNvSpPr>
-          <p:nvPr/>
-        </p:nvSpPr>
-        <p:spPr>
-          <a:xfrm xmlns:a="http://schemas.openxmlformats.org/drawingml/2006/main">
-            <a:off x="7315200" y="4819650"/>
-            <a:ext cx="3752850" cy="552450"/>
-          </a:xfrm>
-          <a:prstGeom xmlns:a="http://schemas.openxmlformats.org/drawingml/2006/main" prst="rect">
-            <a:avLst/>
-          </a:prstGeom>
-          <a:noFill xmlns:a="http://schemas.openxmlformats.org/drawingml/2006/main"/>
-          <a:ln xmlns:a="http://schemas.openxmlformats.org/drawingml/2006/main" w="0">
-            <a:noFill/>
-          </a:ln>
-        </p:spPr>
-        <p:txBody>
-          <a:bodyPr xmlns:a="http://schemas.openxmlformats.org/drawingml/2006/main" anchor="ctr">
-            <a:normAutofit fontScale="100000"/>
+          <p:cNvPr id="19" name="">
+            <a:extLst xmlns:a="http://schemas.openxmlformats.org/drawingml/2006/main">
+              <a:ext uri="{FF2B5EF4-FFF2-40B4-BE49-F238E27FC236}">
+                <a16:creationId xmlns:a16="http://schemas.microsoft.com/office/drawing/2014/main" id="{B8DB8B43-77F6-4C94-B153-776DAEB5ECB3}"/>
+              </a:ext>
+            </a:extLst>
+          </p:cNvPr>
+          <p:cNvSpPr>
+            <a:spLocks xmlns:a="http://schemas.openxmlformats.org/drawingml/2006/main" noGrp="1"/>
+          </p:cNvSpPr>
+          <p:nvPr/>
+        </p:nvSpPr>
+        <p:spPr>
+          <a:xfrm xmlns:a="http://schemas.openxmlformats.org/drawingml/2006/main">
+            <a:off x="7315200" y="5067300"/>
+            <a:ext cx="3752850" cy="304800"/>
+          </a:xfrm>
+          <a:prstGeom xmlns:a="http://schemas.openxmlformats.org/drawingml/2006/main" prst="rect">
+            <a:avLst/>
+          </a:prstGeom>
+          <a:noFill xmlns:a="http://schemas.openxmlformats.org/drawingml/2006/main"/>
+          <a:ln xmlns:a="http://schemas.openxmlformats.org/drawingml/2006/main" w="0">
+            <a:noFill/>
+          </a:ln>
+        </p:spPr>
+        <p:txBody>
+          <a:bodyPr xmlns:a="http://schemas.openxmlformats.org/drawingml/2006/main" anchor="ctr">
+            <a:normAutofit fontScale="85068"/>
           </a:bodyPr>
           <a:lstStyle xmlns:a="http://schemas.openxmlformats.org/drawingml/2006/main"/>
           <a:p xmlns:a="http://schemas.openxmlformats.org/drawingml/2006/main">
@@ -4358,10 +4422,10 @@
       </p:sp>
       <p:sp>
         <p:nvSpPr>
-          <p:cNvPr id="19" name="">
-            <a:extLst xmlns:a="http://schemas.openxmlformats.org/drawingml/2006/main">
-              <a:ext uri="{FF2B5EF4-FFF2-40B4-BE49-F238E27FC236}">
-                <a16:creationId xmlns:a16="http://schemas.microsoft.com/office/drawing/2014/main" id="{90289205-1DAE-4295-AA19-14C877C4F17D}"/>
+          <p:cNvPr id="20" name="">
+            <a:extLst xmlns:a="http://schemas.openxmlformats.org/drawingml/2006/main">
+              <a:ext uri="{FF2B5EF4-FFF2-40B4-BE49-F238E27FC236}">
+                <a16:creationId xmlns:a16="http://schemas.microsoft.com/office/drawing/2014/main" id="{CB8F4D06-47BB-44F0-967A-0C4D787F6FF8}"/>
               </a:ext>
             </a:extLst>
           </p:cNvPr>
@@ -4415,10 +4479,10 @@
       </p:sp>
       <p:sp>
         <p:nvSpPr>
-          <p:cNvPr id="20" name="">
-            <a:extLst xmlns:a="http://schemas.openxmlformats.org/drawingml/2006/main">
-              <a:ext uri="{FF2B5EF4-FFF2-40B4-BE49-F238E27FC236}">
-                <a16:creationId xmlns:a16="http://schemas.microsoft.com/office/drawing/2014/main" id="{EC3EA720-84E5-4E7E-B962-D2F4F5E227F7}"/>
+          <p:cNvPr id="21" name="">
+            <a:extLst xmlns:a="http://schemas.openxmlformats.org/drawingml/2006/main">
+              <a:ext uri="{FF2B5EF4-FFF2-40B4-BE49-F238E27FC236}">
+                <a16:creationId xmlns:a16="http://schemas.microsoft.com/office/drawing/2014/main" id="{809897A1-A257-4215-9470-372322F1F3BA}"/>
               </a:ext>
             </a:extLst>
           </p:cNvPr>
@@ -4473,7 +4537,7 @@
     </p:spTree>
     <p:extLst>
       <p:ext uri="{BB962C8B-B14F-4D97-AF65-F5344CB8AC3E}">
-        <p14:creationId xmlns:p14="http://schemas.microsoft.com/office/powerpoint/2010/main" val="1580624981"/>
+        <p14:creationId xmlns:p14="http://schemas.microsoft.com/office/powerpoint/2010/main" val="499340750"/>
       </p:ext>
     </p:extLst>
   </p:cSld>
@@ -4501,10 +4565,10 @@
       </p:grpSpPr>
       <p:sp>
         <p:nvSpPr>
-          <p:cNvPr id="24" name="">
-            <a:extLst xmlns:a="http://schemas.openxmlformats.org/drawingml/2006/main">
-              <a:ext uri="{FF2B5EF4-FFF2-40B4-BE49-F238E27FC236}">
-                <a16:creationId xmlns:a16="http://schemas.microsoft.com/office/drawing/2014/main" id="{0635492F-A899-40D3-AE9F-36DDCA345C94}"/>
+          <p:cNvPr id="25" name="">
+            <a:extLst xmlns:a="http://schemas.openxmlformats.org/drawingml/2006/main">
+              <a:ext uri="{FF2B5EF4-FFF2-40B4-BE49-F238E27FC236}">
+                <a16:creationId xmlns:a16="http://schemas.microsoft.com/office/drawing/2014/main" id="{4635EA20-0DAF-4137-90C0-82A2A18D0AAD}"/>
               </a:ext>
             </a:extLst>
           </p:cNvPr>
@@ -4561,7 +4625,7 @@
           <p:cNvPr id="2" name="">
             <a:extLst xmlns:a="http://schemas.openxmlformats.org/drawingml/2006/main">
               <a:ext uri="{FF2B5EF4-FFF2-40B4-BE49-F238E27FC236}">
-                <a16:creationId xmlns:a16="http://schemas.microsoft.com/office/drawing/2014/main" id="{EACC0EEB-6D7D-4C96-878B-45CD3D72FD2F}"/>
+                <a16:creationId xmlns:a16="http://schemas.microsoft.com/office/drawing/2014/main" id="{AFA21607-00A6-42FB-91F0-5988469A882B}"/>
               </a:ext>
             </a:extLst>
           </p:cNvPr>
@@ -4618,7 +4682,7 @@
           <p:cNvPr id="3" name="">
             <a:extLst xmlns:a="http://schemas.openxmlformats.org/drawingml/2006/main">
               <a:ext uri="{FF2B5EF4-FFF2-40B4-BE49-F238E27FC236}">
-                <a16:creationId xmlns:a16="http://schemas.microsoft.com/office/drawing/2014/main" id="{B3783C34-4266-48B1-ACB2-898C9018D9D2}"/>
+                <a16:creationId xmlns:a16="http://schemas.microsoft.com/office/drawing/2014/main" id="{625906FD-96F8-4670-B197-4899D532FD0F}"/>
               </a:ext>
             </a:extLst>
           </p:cNvPr>
@@ -4650,7 +4714,7 @@
           <p:cNvPr id="4" name="">
             <a:extLst xmlns:a="http://schemas.openxmlformats.org/drawingml/2006/main">
               <a:ext uri="{FF2B5EF4-FFF2-40B4-BE49-F238E27FC236}">
-                <a16:creationId xmlns:a16="http://schemas.microsoft.com/office/drawing/2014/main" id="{C6DB79E0-CD10-4D6A-9578-0EDBA1C828BC}"/>
+                <a16:creationId xmlns:a16="http://schemas.microsoft.com/office/drawing/2014/main" id="{F6C938B3-7F93-4C4B-B133-AF821538A373}"/>
               </a:ext>
             </a:extLst>
           </p:cNvPr>
@@ -4707,7 +4771,7 @@
           <p:cNvPr id="5" name="">
             <a:extLst xmlns:a="http://schemas.openxmlformats.org/drawingml/2006/main">
               <a:ext uri="{FF2B5EF4-FFF2-40B4-BE49-F238E27FC236}">
-                <a16:creationId xmlns:a16="http://schemas.microsoft.com/office/drawing/2014/main" id="{DA147962-D43C-489F-B7C6-4BC8F22F947B}"/>
+                <a16:creationId xmlns:a16="http://schemas.microsoft.com/office/drawing/2014/main" id="{6E057645-37DC-4930-AE07-504E92662401}"/>
               </a:ext>
             </a:extLst>
           </p:cNvPr>
@@ -4764,7 +4828,7 @@
           <p:cNvPr id="6" name="">
             <a:extLst xmlns:a="http://schemas.openxmlformats.org/drawingml/2006/main">
               <a:ext uri="{FF2B5EF4-FFF2-40B4-BE49-F238E27FC236}">
-                <a16:creationId xmlns:a16="http://schemas.microsoft.com/office/drawing/2014/main" id="{630C080F-7B4D-47F5-9F06-5A76CB9261F1}"/>
+                <a16:creationId xmlns:a16="http://schemas.microsoft.com/office/drawing/2014/main" id="{2250A3E6-B901-402F-BDF7-23E62F2CA4D5}"/>
               </a:ext>
             </a:extLst>
           </p:cNvPr>
@@ -4796,7 +4860,7 @@
           <p:cNvPr id="7" name="">
             <a:extLst xmlns:a="http://schemas.openxmlformats.org/drawingml/2006/main">
               <a:ext uri="{FF2B5EF4-FFF2-40B4-BE49-F238E27FC236}">
-                <a16:creationId xmlns:a16="http://schemas.microsoft.com/office/drawing/2014/main" id="{9B514562-BBF9-4ACF-B75F-C0F45B71269A}"/>
+                <a16:creationId xmlns:a16="http://schemas.microsoft.com/office/drawing/2014/main" id="{5FA15114-14A4-48C9-872F-AD4F89C908A9}"/>
               </a:ext>
             </a:extLst>
           </p:cNvPr>
@@ -4853,7 +4917,7 @@
           <p:cNvPr id="8" name="">
             <a:extLst xmlns:a="http://schemas.openxmlformats.org/drawingml/2006/main">
               <a:ext uri="{FF2B5EF4-FFF2-40B4-BE49-F238E27FC236}">
-                <a16:creationId xmlns:a16="http://schemas.microsoft.com/office/drawing/2014/main" id="{0D6AE0FE-0889-4DCA-8938-F6C7BA0414E9}"/>
+                <a16:creationId xmlns:a16="http://schemas.microsoft.com/office/drawing/2014/main" id="{2EF76A25-38AD-4608-B951-90FE4FF31823}"/>
               </a:ext>
             </a:extLst>
           </p:cNvPr>
@@ -4910,7 +4974,7 @@
           <p:cNvPr id="9" name="">
             <a:extLst xmlns:a="http://schemas.openxmlformats.org/drawingml/2006/main">
               <a:ext uri="{FF2B5EF4-FFF2-40B4-BE49-F238E27FC236}">
-                <a16:creationId xmlns:a16="http://schemas.microsoft.com/office/drawing/2014/main" id="{B7AB4151-A30E-485B-A849-F50BF19650B4}"/>
+                <a16:creationId xmlns:a16="http://schemas.microsoft.com/office/drawing/2014/main" id="{04BDA6D2-F932-4AD4-9FA4-9A3C5ACC8072}"/>
               </a:ext>
             </a:extLst>
           </p:cNvPr>
@@ -4939,14 +5003,14 @@
       </p:sp>
       <p:pic>
         <p:nvPicPr>
-          <p:cNvPr id="33" name=""/>
+          <p:cNvPr id="34" name=""/>
           <p:cNvPicPr>
             <a:picLocks xmlns:a="http://schemas.openxmlformats.org/drawingml/2006/main" noChangeAspect="1"/>
           </p:cNvPicPr>
           <p:nvPr/>
         </p:nvPicPr>
         <p:blipFill>
-          <a:blip xmlns:r="http://schemas.openxmlformats.org/officeDocument/2006/relationships" xmlns:a="http://schemas.openxmlformats.org/drawingml/2006/main" r:embed="R154691854c2e4a92"/>
+          <a:blip xmlns:r="http://schemas.openxmlformats.org/officeDocument/2006/relationships" xmlns:a="http://schemas.openxmlformats.org/drawingml/2006/main" r:embed="R8eb43dc2c9924384"/>
           <a:stretch xmlns:a="http://schemas.openxmlformats.org/drawingml/2006/main"/>
         </p:blipFill>
         <p:spPr>
@@ -4964,7 +5028,7 @@
           <p:cNvPr id="11" name="">
             <a:extLst xmlns:a="http://schemas.openxmlformats.org/drawingml/2006/main">
               <a:ext uri="{FF2B5EF4-FFF2-40B4-BE49-F238E27FC236}">
-                <a16:creationId xmlns:a16="http://schemas.microsoft.com/office/drawing/2014/main" id="{35B4E81D-2C70-4A75-8AE6-CBA4BA7A3C7F}"/>
+                <a16:creationId xmlns:a16="http://schemas.microsoft.com/office/drawing/2014/main" id="{BD91ED16-6703-4B60-AE3E-0CBB42A932B4}"/>
               </a:ext>
             </a:extLst>
           </p:cNvPr>
@@ -4993,14 +5057,14 @@
       </p:sp>
       <p:pic>
         <p:nvPicPr>
-          <p:cNvPr id="35" name=""/>
+          <p:cNvPr id="36" name=""/>
           <p:cNvPicPr>
             <a:picLocks xmlns:a="http://schemas.openxmlformats.org/drawingml/2006/main" noChangeAspect="1"/>
           </p:cNvPicPr>
           <p:nvPr/>
         </p:nvPicPr>
         <p:blipFill>
-          <a:blip xmlns:r="http://schemas.openxmlformats.org/officeDocument/2006/relationships" xmlns:a="http://schemas.openxmlformats.org/drawingml/2006/main" r:embed="R816439dc19da41a6"/>
+          <a:blip xmlns:r="http://schemas.openxmlformats.org/officeDocument/2006/relationships" xmlns:a="http://schemas.openxmlformats.org/drawingml/2006/main" r:embed="R1e8d4b562c9344d2"/>
           <a:stretch xmlns:a="http://schemas.openxmlformats.org/drawingml/2006/main"/>
         </p:blipFill>
         <p:spPr>
@@ -5018,7 +5082,7 @@
           <p:cNvPr id="13" name="">
             <a:extLst xmlns:a="http://schemas.openxmlformats.org/drawingml/2006/main">
               <a:ext uri="{FF2B5EF4-FFF2-40B4-BE49-F238E27FC236}">
-                <a16:creationId xmlns:a16="http://schemas.microsoft.com/office/drawing/2014/main" id="{57B82C45-2EDC-4EAA-9D04-4793A0138E64}"/>
+                <a16:creationId xmlns:a16="http://schemas.microsoft.com/office/drawing/2014/main" id="{68DE2EF4-A7E5-49E7-AE13-5286712D35F8}"/>
               </a:ext>
             </a:extLst>
           </p:cNvPr>
@@ -5050,7 +5114,7 @@
           <p:cNvPr id="14" name="">
             <a:extLst xmlns:a="http://schemas.openxmlformats.org/drawingml/2006/main">
               <a:ext uri="{FF2B5EF4-FFF2-40B4-BE49-F238E27FC236}">
-                <a16:creationId xmlns:a16="http://schemas.microsoft.com/office/drawing/2014/main" id="{E14D10F3-8789-42A7-82BA-7211AA1D6ABD}"/>
+                <a16:creationId xmlns:a16="http://schemas.microsoft.com/office/drawing/2014/main" id="{7AED90E3-84BE-4AD6-8898-726B33C72762}"/>
               </a:ext>
             </a:extLst>
           </p:cNvPr>
@@ -5107,7 +5171,7 @@
           <p:cNvPr id="15" name="">
             <a:extLst xmlns:a="http://schemas.openxmlformats.org/drawingml/2006/main">
               <a:ext uri="{FF2B5EF4-FFF2-40B4-BE49-F238E27FC236}">
-                <a16:creationId xmlns:a16="http://schemas.microsoft.com/office/drawing/2014/main" id="{FA7920C9-6C9A-4D03-A595-496B04834B30}"/>
+                <a16:creationId xmlns:a16="http://schemas.microsoft.com/office/drawing/2014/main" id="{2834163C-A100-430A-8543-FE63793AD463}"/>
               </a:ext>
             </a:extLst>
           </p:cNvPr>
@@ -5164,7 +5228,7 @@
           <p:cNvPr id="16" name="">
             <a:extLst xmlns:a="http://schemas.openxmlformats.org/drawingml/2006/main">
               <a:ext uri="{FF2B5EF4-FFF2-40B4-BE49-F238E27FC236}">
-                <a16:creationId xmlns:a16="http://schemas.microsoft.com/office/drawing/2014/main" id="{5787048F-9F5B-4B22-952C-33E43CEF8FAF}"/>
+                <a16:creationId xmlns:a16="http://schemas.microsoft.com/office/drawing/2014/main" id="{A0051F38-24A9-4568-B791-959677C6BAE5}"/>
               </a:ext>
             </a:extLst>
           </p:cNvPr>
@@ -5221,7 +5285,7 @@
           <p:cNvPr id="17" name="">
             <a:extLst xmlns:a="http://schemas.openxmlformats.org/drawingml/2006/main">
               <a:ext uri="{FF2B5EF4-FFF2-40B4-BE49-F238E27FC236}">
-                <a16:creationId xmlns:a16="http://schemas.microsoft.com/office/drawing/2014/main" id="{8B7C5869-1B38-42D1-A266-B19630DECC61}"/>
+                <a16:creationId xmlns:a16="http://schemas.microsoft.com/office/drawing/2014/main" id="{15D30E0F-3A9D-48FA-9F5C-A7903EE017B6}"/>
               </a:ext>
             </a:extLst>
           </p:cNvPr>
@@ -5278,27 +5342,27 @@
           <p:cNvPr id="18" name="">
             <a:extLst xmlns:a="http://schemas.openxmlformats.org/drawingml/2006/main">
               <a:ext uri="{FF2B5EF4-FFF2-40B4-BE49-F238E27FC236}">
-                <a16:creationId xmlns:a16="http://schemas.microsoft.com/office/drawing/2014/main" id="{47BCE2DE-2830-4B3D-B9D4-2D3D276BF50B}"/>
-              </a:ext>
-            </a:extLst>
-          </p:cNvPr>
-          <p:cNvSpPr>
-            <a:spLocks xmlns:a="http://schemas.openxmlformats.org/drawingml/2006/main" noGrp="1"/>
-          </p:cNvSpPr>
-          <p:nvPr/>
-        </p:nvSpPr>
-        <p:spPr>
-          <a:xfrm xmlns:a="http://schemas.openxmlformats.org/drawingml/2006/main">
-            <a:off x="609600" y="5219700"/>
-            <a:ext cx="6858000" cy="838200"/>
+                <a16:creationId xmlns:a16="http://schemas.microsoft.com/office/drawing/2014/main" id="{51C39A1B-D033-4368-8160-9E53DD39C7E0}"/>
+              </a:ext>
+            </a:extLst>
+          </p:cNvPr>
+          <p:cNvSpPr>
+            <a:spLocks xmlns:a="http://schemas.openxmlformats.org/drawingml/2006/main" noGrp="1"/>
+          </p:cNvSpPr>
+          <p:nvPr/>
+        </p:nvSpPr>
+        <p:spPr>
+          <a:xfrm xmlns:a="http://schemas.openxmlformats.org/drawingml/2006/main">
+            <a:off x="609600" y="5162550"/>
+            <a:ext cx="7543800" cy="933450"/>
           </a:xfrm>
           <a:prstGeom xmlns:a="http://schemas.openxmlformats.org/drawingml/2006/main" prst="roundRect">
             <a:avLst>
-              <a:gd name="adj" fmla="val 9091"/>
+              <a:gd name="adj" fmla="val 8163"/>
             </a:avLst>
           </a:prstGeom>
           <a:solidFill xmlns:a="http://schemas.openxmlformats.org/drawingml/2006/main">
-            <a:srgbClr val="EEF3F8"/>
+            <a:srgbClr val="17324D"/>
           </a:solidFill>
           <a:ln xmlns:a="http://schemas.openxmlformats.org/drawingml/2006/main" w="0">
             <a:noFill/>
@@ -5310,137 +5374,169 @@
           <p:cNvPr id="19" name="">
             <a:extLst xmlns:a="http://schemas.openxmlformats.org/drawingml/2006/main">
               <a:ext uri="{FF2B5EF4-FFF2-40B4-BE49-F238E27FC236}">
-                <a16:creationId xmlns:a16="http://schemas.microsoft.com/office/drawing/2014/main" id="{625F1EC6-7D9D-4169-8477-3E3BAD518DFF}"/>
-              </a:ext>
-            </a:extLst>
-          </p:cNvPr>
-          <p:cNvSpPr>
-            <a:spLocks xmlns:a="http://schemas.openxmlformats.org/drawingml/2006/main" noGrp="1"/>
-          </p:cNvSpPr>
-          <p:nvPr/>
-        </p:nvSpPr>
-        <p:spPr>
-          <a:xfrm xmlns:a="http://schemas.openxmlformats.org/drawingml/2006/main">
-            <a:off x="781050" y="5334000"/>
-            <a:ext cx="6515100" cy="228600"/>
-          </a:xfrm>
-          <a:prstGeom xmlns:a="http://schemas.openxmlformats.org/drawingml/2006/main" prst="rect">
-            <a:avLst/>
-          </a:prstGeom>
-          <a:noFill xmlns:a="http://schemas.openxmlformats.org/drawingml/2006/main"/>
-          <a:ln xmlns:a="http://schemas.openxmlformats.org/drawingml/2006/main" w="0">
-            <a:noFill/>
-          </a:ln>
-        </p:spPr>
-        <p:txBody>
-          <a:bodyPr xmlns:a="http://schemas.openxmlformats.org/drawingml/2006/main" anchor="ctr">
-            <a:normAutofit fontScale="85714"/>
-          </a:bodyPr>
-          <a:lstStyle xmlns:a="http://schemas.openxmlformats.org/drawingml/2006/main"/>
-          <a:p xmlns:a="http://schemas.openxmlformats.org/drawingml/2006/main">
-            <a:pPr algn="l">
-              <a:defRPr sz="1050" b="1">
-                <a:solidFill>
-                  <a:srgbClr val="17324D"/>
-                </a:solidFill>
-                <a:latin typeface="Pretendard"/>
-                <a:ea typeface="Pretendard"/>
-                <a:cs typeface="Pretendard"/>
-              </a:defRPr>
-            </a:pPr>
-            <a:r>
-              <a:rPr sz="1050" b="1">
-                <a:solidFill>
-                  <a:srgbClr val="17324D"/>
-                </a:solidFill>
-                <a:latin typeface="Pretendard"/>
-                <a:ea typeface="Pretendard"/>
-                <a:cs typeface="Pretendard"/>
-              </a:rPr>
-              <a:t>ESS 시사점</a:t>
-            </a:r>
-          </a:p>
-        </p:txBody>
-      </p:sp>
-      <p:sp>
-        <p:nvSpPr>
-          <p:cNvPr id="20" name="">
-            <a:extLst xmlns:a="http://schemas.openxmlformats.org/drawingml/2006/main">
-              <a:ext uri="{FF2B5EF4-FFF2-40B4-BE49-F238E27FC236}">
-                <a16:creationId xmlns:a16="http://schemas.microsoft.com/office/drawing/2014/main" id="{9357C5A9-7849-478B-A13A-A95B6A00FB8B}"/>
-              </a:ext>
-            </a:extLst>
-          </p:cNvPr>
-          <p:cNvSpPr>
-            <a:spLocks xmlns:a="http://schemas.openxmlformats.org/drawingml/2006/main" noGrp="1"/>
-          </p:cNvSpPr>
-          <p:nvPr/>
-        </p:nvSpPr>
-        <p:spPr>
-          <a:xfrm xmlns:a="http://schemas.openxmlformats.org/drawingml/2006/main">
-            <a:off x="781050" y="5581650"/>
-            <a:ext cx="6515100" cy="381000"/>
-          </a:xfrm>
-          <a:prstGeom xmlns:a="http://schemas.openxmlformats.org/drawingml/2006/main" prst="rect">
-            <a:avLst/>
-          </a:prstGeom>
-          <a:noFill xmlns:a="http://schemas.openxmlformats.org/drawingml/2006/main"/>
-          <a:ln xmlns:a="http://schemas.openxmlformats.org/drawingml/2006/main" w="0">
-            <a:noFill/>
-          </a:ln>
-        </p:spPr>
-        <p:txBody>
-          <a:bodyPr xmlns:a="http://schemas.openxmlformats.org/drawingml/2006/main" anchor="ctr">
-            <a:normAutofit fontScale="85568"/>
-          </a:bodyPr>
-          <a:lstStyle xmlns:a="http://schemas.openxmlformats.org/drawingml/2006/main"/>
-          <a:p xmlns:a="http://schemas.openxmlformats.org/drawingml/2006/main">
-            <a:pPr algn="l">
-              <a:defRPr sz="1275" b="0">
-                <a:solidFill>
-                  <a:srgbClr val="1F2933"/>
-                </a:solidFill>
-                <a:latin typeface="Pretendard"/>
-                <a:ea typeface="Pretendard"/>
-                <a:cs typeface="Pretendard"/>
-              </a:defRPr>
-            </a:pPr>
-            <a:r>
-              <a:rPr sz="1275" b="0">
-                <a:solidFill>
-                  <a:srgbClr val="1F2933"/>
-                </a:solidFill>
-                <a:latin typeface="Pretendard"/>
-                <a:ea typeface="Pretendard"/>
-                <a:cs typeface="Pretendard"/>
-              </a:rPr>
-              <a:t>배터리 수명 종료까지 기다리지 않고 초기 수명 데이터만으로 장기 열화 위험 Cell을 조기에 선별할 가능성을 보여준다.</a:t>
-            </a:r>
-          </a:p>
-        </p:txBody>
-      </p:sp>
-      <p:sp>
-        <p:nvSpPr>
-          <p:cNvPr id="21" name="">
-            <a:extLst xmlns:a="http://schemas.openxmlformats.org/drawingml/2006/main">
-              <a:ext uri="{FF2B5EF4-FFF2-40B4-BE49-F238E27FC236}">
-                <a16:creationId xmlns:a16="http://schemas.microsoft.com/office/drawing/2014/main" id="{53695D37-E353-4489-8C6F-C3A5360270F8}"/>
-              </a:ext>
-            </a:extLst>
-          </p:cNvPr>
-          <p:cNvSpPr>
-            <a:spLocks xmlns:a="http://schemas.openxmlformats.org/drawingml/2006/main" noGrp="1"/>
-          </p:cNvSpPr>
-          <p:nvPr/>
-        </p:nvSpPr>
-        <p:spPr>
-          <a:xfrm xmlns:a="http://schemas.openxmlformats.org/drawingml/2006/main">
-            <a:off x="7677150" y="5219700"/>
-            <a:ext cx="3562350" cy="838200"/>
+                <a16:creationId xmlns:a16="http://schemas.microsoft.com/office/drawing/2014/main" id="{89717A55-B1B7-40B1-8F01-A456F67014A3}"/>
+              </a:ext>
+            </a:extLst>
+          </p:cNvPr>
+          <p:cNvSpPr>
+            <a:spLocks xmlns:a="http://schemas.openxmlformats.org/drawingml/2006/main" noGrp="1"/>
+          </p:cNvSpPr>
+          <p:nvPr/>
+        </p:nvSpPr>
+        <p:spPr>
+          <a:xfrm xmlns:a="http://schemas.openxmlformats.org/drawingml/2006/main">
+            <a:off x="609600" y="5162550"/>
+            <a:ext cx="76200" cy="933450"/>
           </a:xfrm>
           <a:prstGeom xmlns:a="http://schemas.openxmlformats.org/drawingml/2006/main" prst="roundRect">
             <a:avLst>
-              <a:gd name="adj" fmla="val 9091"/>
+              <a:gd name="adj" fmla="val 50000"/>
+            </a:avLst>
+          </a:prstGeom>
+          <a:solidFill xmlns:a="http://schemas.openxmlformats.org/drawingml/2006/main">
+            <a:srgbClr val="008C85"/>
+          </a:solidFill>
+          <a:ln xmlns:a="http://schemas.openxmlformats.org/drawingml/2006/main" w="0">
+            <a:noFill/>
+          </a:ln>
+        </p:spPr>
+      </p:sp>
+      <p:sp>
+        <p:nvSpPr>
+          <p:cNvPr id="20" name="">
+            <a:extLst xmlns:a="http://schemas.openxmlformats.org/drawingml/2006/main">
+              <a:ext uri="{FF2B5EF4-FFF2-40B4-BE49-F238E27FC236}">
+                <a16:creationId xmlns:a16="http://schemas.microsoft.com/office/drawing/2014/main" id="{CF008A9E-BA07-4C69-9370-D552D95C6A78}"/>
+              </a:ext>
+            </a:extLst>
+          </p:cNvPr>
+          <p:cNvSpPr>
+            <a:spLocks xmlns:a="http://schemas.openxmlformats.org/drawingml/2006/main" noGrp="1"/>
+          </p:cNvSpPr>
+          <p:nvPr/>
+        </p:nvSpPr>
+        <p:spPr>
+          <a:xfrm xmlns:a="http://schemas.openxmlformats.org/drawingml/2006/main">
+            <a:off x="838200" y="5276850"/>
+            <a:ext cx="7086600" cy="342900"/>
+          </a:xfrm>
+          <a:prstGeom xmlns:a="http://schemas.openxmlformats.org/drawingml/2006/main" prst="rect">
+            <a:avLst/>
+          </a:prstGeom>
+          <a:noFill xmlns:a="http://schemas.openxmlformats.org/drawingml/2006/main"/>
+          <a:ln xmlns:a="http://schemas.openxmlformats.org/drawingml/2006/main" w="0">
+            <a:noFill/>
+          </a:ln>
+        </p:spPr>
+        <p:txBody>
+          <a:bodyPr xmlns:a="http://schemas.openxmlformats.org/drawingml/2006/main" anchor="ctr">
+            <a:normAutofit fontScale="100000"/>
+          </a:bodyPr>
+          <a:lstStyle xmlns:a="http://schemas.openxmlformats.org/drawingml/2006/main"/>
+          <a:p xmlns:a="http://schemas.openxmlformats.org/drawingml/2006/main">
+            <a:pPr algn="l">
+              <a:defRPr sz="1575" b="1">
+                <a:solidFill>
+                  <a:srgbClr val="58D1C8"/>
+                </a:solidFill>
+                <a:latin typeface="Pretendard"/>
+                <a:ea typeface="Pretendard"/>
+                <a:cs typeface="Pretendard"/>
+              </a:defRPr>
+            </a:pPr>
+            <a:r>
+              <a:rPr sz="1575" b="1">
+                <a:solidFill>
+                  <a:srgbClr val="58D1C8"/>
+                </a:solidFill>
+                <a:latin typeface="Pretendard"/>
+                <a:ea typeface="Pretendard"/>
+                <a:cs typeface="Pretendard"/>
+              </a:rPr>
+              <a:t>초기 100 Cycle만으로 장기 열화 위험을 선별할 가능성이 있다</a:t>
+            </a:r>
+          </a:p>
+        </p:txBody>
+      </p:sp>
+      <p:sp>
+        <p:nvSpPr>
+          <p:cNvPr id="21" name="">
+            <a:extLst xmlns:a="http://schemas.openxmlformats.org/drawingml/2006/main">
+              <a:ext uri="{FF2B5EF4-FFF2-40B4-BE49-F238E27FC236}">
+                <a16:creationId xmlns:a16="http://schemas.microsoft.com/office/drawing/2014/main" id="{5C9303C4-A082-4EC1-902B-16779FD29B84}"/>
+              </a:ext>
+            </a:extLst>
+          </p:cNvPr>
+          <p:cNvSpPr>
+            <a:spLocks xmlns:a="http://schemas.openxmlformats.org/drawingml/2006/main" noGrp="1"/>
+          </p:cNvSpPr>
+          <p:nvPr/>
+        </p:nvSpPr>
+        <p:spPr>
+          <a:xfrm xmlns:a="http://schemas.openxmlformats.org/drawingml/2006/main">
+            <a:off x="838200" y="5638800"/>
+            <a:ext cx="7086600" cy="342900"/>
+          </a:xfrm>
+          <a:prstGeom xmlns:a="http://schemas.openxmlformats.org/drawingml/2006/main" prst="rect">
+            <a:avLst/>
+          </a:prstGeom>
+          <a:noFill xmlns:a="http://schemas.openxmlformats.org/drawingml/2006/main"/>
+          <a:ln xmlns:a="http://schemas.openxmlformats.org/drawingml/2006/main" w="0">
+            <a:noFill/>
+          </a:ln>
+        </p:spPr>
+        <p:txBody>
+          <a:bodyPr xmlns:a="http://schemas.openxmlformats.org/drawingml/2006/main" anchor="ctr">
+            <a:normAutofit fontScale="100000"/>
+          </a:bodyPr>
+          <a:lstStyle xmlns:a="http://schemas.openxmlformats.org/drawingml/2006/main"/>
+          <a:p xmlns:a="http://schemas.openxmlformats.org/drawingml/2006/main">
+            <a:pPr algn="l">
+              <a:defRPr sz="1200" b="0">
+                <a:solidFill>
+                  <a:srgbClr val="FFFFFF"/>
+                </a:solidFill>
+                <a:latin typeface="Pretendard"/>
+                <a:ea typeface="Pretendard"/>
+                <a:cs typeface="Pretendard"/>
+              </a:defRPr>
+            </a:pPr>
+            <a:r>
+              <a:rPr sz="1200" b="0">
+                <a:solidFill>
+                  <a:srgbClr val="FFFFFF"/>
+                </a:solidFill>
+                <a:latin typeface="Pretendard"/>
+                <a:ea typeface="Pretendard"/>
+                <a:cs typeface="Pretendard"/>
+              </a:rPr>
+              <a:t>ΔQ(V) 변화가 큰 Cell일수록 수명이 짧아지는 경향이 강하다.</a:t>
+            </a:r>
+          </a:p>
+        </p:txBody>
+      </p:sp>
+      <p:sp>
+        <p:nvSpPr>
+          <p:cNvPr id="22" name="">
+            <a:extLst xmlns:a="http://schemas.openxmlformats.org/drawingml/2006/main">
+              <a:ext uri="{FF2B5EF4-FFF2-40B4-BE49-F238E27FC236}">
+                <a16:creationId xmlns:a16="http://schemas.microsoft.com/office/drawing/2014/main" id="{70D171EA-532D-49CF-A460-96EB487DBAE2}"/>
+              </a:ext>
+            </a:extLst>
+          </p:cNvPr>
+          <p:cNvSpPr>
+            <a:spLocks xmlns:a="http://schemas.openxmlformats.org/drawingml/2006/main" noGrp="1"/>
+          </p:cNvSpPr>
+          <p:nvPr/>
+        </p:nvSpPr>
+        <p:spPr>
+          <a:xfrm xmlns:a="http://schemas.openxmlformats.org/drawingml/2006/main">
+            <a:off x="8362950" y="5162550"/>
+            <a:ext cx="2876550" cy="933450"/>
+          </a:xfrm>
+          <a:prstGeom xmlns:a="http://schemas.openxmlformats.org/drawingml/2006/main" prst="roundRect">
+            <a:avLst>
+              <a:gd name="adj" fmla="val 8163"/>
             </a:avLst>
           </a:prstGeom>
           <a:solidFill xmlns:a="http://schemas.openxmlformats.org/drawingml/2006/main">
@@ -5453,22 +5549,22 @@
       </p:sp>
       <p:sp>
         <p:nvSpPr>
-          <p:cNvPr id="22" name="">
-            <a:extLst xmlns:a="http://schemas.openxmlformats.org/drawingml/2006/main">
-              <a:ext uri="{FF2B5EF4-FFF2-40B4-BE49-F238E27FC236}">
-                <a16:creationId xmlns:a16="http://schemas.microsoft.com/office/drawing/2014/main" id="{8080B613-AD0A-4380-8856-9658AB0BC4D6}"/>
-              </a:ext>
-            </a:extLst>
-          </p:cNvPr>
-          <p:cNvSpPr>
-            <a:spLocks xmlns:a="http://schemas.openxmlformats.org/drawingml/2006/main" noGrp="1"/>
-          </p:cNvSpPr>
-          <p:nvPr/>
-        </p:nvSpPr>
-        <p:spPr>
-          <a:xfrm xmlns:a="http://schemas.openxmlformats.org/drawingml/2006/main">
-            <a:off x="7848600" y="5334000"/>
-            <a:ext cx="3219450" cy="228600"/>
+          <p:cNvPr id="23" name="">
+            <a:extLst xmlns:a="http://schemas.openxmlformats.org/drawingml/2006/main">
+              <a:ext uri="{FF2B5EF4-FFF2-40B4-BE49-F238E27FC236}">
+                <a16:creationId xmlns:a16="http://schemas.microsoft.com/office/drawing/2014/main" id="{47ACB682-794E-490E-A3CB-EF8ED89CEE0D}"/>
+              </a:ext>
+            </a:extLst>
+          </p:cNvPr>
+          <p:cNvSpPr>
+            <a:spLocks xmlns:a="http://schemas.openxmlformats.org/drawingml/2006/main" noGrp="1"/>
+          </p:cNvSpPr>
+          <p:nvPr/>
+        </p:nvSpPr>
+        <p:spPr>
+          <a:xfrm xmlns:a="http://schemas.openxmlformats.org/drawingml/2006/main">
+            <a:off x="8534400" y="5276850"/>
+            <a:ext cx="2533650" cy="228600"/>
           </a:xfrm>
           <a:prstGeom xmlns:a="http://schemas.openxmlformats.org/drawingml/2006/main" prst="rect">
             <a:avLst/>
@@ -5510,34 +5606,34 @@
       </p:sp>
       <p:sp>
         <p:nvSpPr>
-          <p:cNvPr id="23" name="">
-            <a:extLst xmlns:a="http://schemas.openxmlformats.org/drawingml/2006/main">
-              <a:ext uri="{FF2B5EF4-FFF2-40B4-BE49-F238E27FC236}">
-                <a16:creationId xmlns:a16="http://schemas.microsoft.com/office/drawing/2014/main" id="{0C16C4BA-D0B5-4B56-ADBA-72455FBA446D}"/>
-              </a:ext>
-            </a:extLst>
-          </p:cNvPr>
-          <p:cNvSpPr>
-            <a:spLocks xmlns:a="http://schemas.openxmlformats.org/drawingml/2006/main" noGrp="1"/>
-          </p:cNvSpPr>
-          <p:nvPr/>
-        </p:nvSpPr>
-        <p:spPr>
-          <a:xfrm xmlns:a="http://schemas.openxmlformats.org/drawingml/2006/main">
-            <a:off x="7848600" y="5581650"/>
-            <a:ext cx="3219450" cy="381000"/>
-          </a:xfrm>
-          <a:prstGeom xmlns:a="http://schemas.openxmlformats.org/drawingml/2006/main" prst="rect">
-            <a:avLst/>
-          </a:prstGeom>
-          <a:noFill xmlns:a="http://schemas.openxmlformats.org/drawingml/2006/main"/>
-          <a:ln xmlns:a="http://schemas.openxmlformats.org/drawingml/2006/main" w="0">
-            <a:noFill/>
-          </a:ln>
-        </p:spPr>
-        <p:txBody>
-          <a:bodyPr xmlns:a="http://schemas.openxmlformats.org/drawingml/2006/main" anchor="ctr">
-            <a:normAutofit fontScale="100000"/>
+          <p:cNvPr id="24" name="">
+            <a:extLst xmlns:a="http://schemas.openxmlformats.org/drawingml/2006/main">
+              <a:ext uri="{FF2B5EF4-FFF2-40B4-BE49-F238E27FC236}">
+                <a16:creationId xmlns:a16="http://schemas.microsoft.com/office/drawing/2014/main" id="{9F16F014-0A4B-4470-B264-86F6F3D64439}"/>
+              </a:ext>
+            </a:extLst>
+          </p:cNvPr>
+          <p:cNvSpPr>
+            <a:spLocks xmlns:a="http://schemas.openxmlformats.org/drawingml/2006/main" noGrp="1"/>
+          </p:cNvSpPr>
+          <p:nvPr/>
+        </p:nvSpPr>
+        <p:spPr>
+          <a:xfrm xmlns:a="http://schemas.openxmlformats.org/drawingml/2006/main">
+            <a:off x="8534400" y="5524500"/>
+            <a:ext cx="2533650" cy="476250"/>
+          </a:xfrm>
+          <a:prstGeom xmlns:a="http://schemas.openxmlformats.org/drawingml/2006/main" prst="rect">
+            <a:avLst/>
+          </a:prstGeom>
+          <a:noFill xmlns:a="http://schemas.openxmlformats.org/drawingml/2006/main"/>
+          <a:ln xmlns:a="http://schemas.openxmlformats.org/drawingml/2006/main" w="0">
+            <a:noFill/>
+          </a:ln>
+        </p:spPr>
+        <p:txBody>
+          <a:bodyPr xmlns:a="http://schemas.openxmlformats.org/drawingml/2006/main" anchor="ctr">
+            <a:normAutofit fontScale="99020"/>
           </a:bodyPr>
           <a:lstStyle xmlns:a="http://schemas.openxmlformats.org/drawingml/2006/main"/>
           <a:p xmlns:a="http://schemas.openxmlformats.org/drawingml/2006/main">
@@ -5568,7 +5664,7 @@
     </p:spTree>
     <p:extLst>
       <p:ext uri="{BB962C8B-B14F-4D97-AF65-F5344CB8AC3E}">
-        <p14:creationId xmlns:p14="http://schemas.microsoft.com/office/powerpoint/2010/main" val="387822791"/>
+        <p14:creationId xmlns:p14="http://schemas.microsoft.com/office/powerpoint/2010/main" val="785693973"/>
       </p:ext>
     </p:extLst>
   </p:cSld>
@@ -5596,10 +5692,10 @@
       </p:grpSpPr>
       <p:sp>
         <p:nvSpPr>
-          <p:cNvPr id="19" name="">
-            <a:extLst xmlns:a="http://schemas.openxmlformats.org/drawingml/2006/main">
-              <a:ext uri="{FF2B5EF4-FFF2-40B4-BE49-F238E27FC236}">
-                <a16:creationId xmlns:a16="http://schemas.microsoft.com/office/drawing/2014/main" id="{57669D12-DB25-400A-879B-74DB55D1DB93}"/>
+          <p:cNvPr id="20" name="">
+            <a:extLst xmlns:a="http://schemas.openxmlformats.org/drawingml/2006/main">
+              <a:ext uri="{FF2B5EF4-FFF2-40B4-BE49-F238E27FC236}">
+                <a16:creationId xmlns:a16="http://schemas.microsoft.com/office/drawing/2014/main" id="{795B4BE7-55A1-40A9-9D18-5A085962C147}"/>
               </a:ext>
             </a:extLst>
           </p:cNvPr>
@@ -5656,7 +5752,7 @@
           <p:cNvPr id="2" name="">
             <a:extLst xmlns:a="http://schemas.openxmlformats.org/drawingml/2006/main">
               <a:ext uri="{FF2B5EF4-FFF2-40B4-BE49-F238E27FC236}">
-                <a16:creationId xmlns:a16="http://schemas.microsoft.com/office/drawing/2014/main" id="{32227E41-77EA-48FC-8685-E10EE62595B2}"/>
+                <a16:creationId xmlns:a16="http://schemas.microsoft.com/office/drawing/2014/main" id="{42B4C204-854E-49F6-8CAD-27DB7BBF48B6}"/>
               </a:ext>
             </a:extLst>
           </p:cNvPr>
@@ -5713,7 +5809,7 @@
           <p:cNvPr id="3" name="">
             <a:extLst xmlns:a="http://schemas.openxmlformats.org/drawingml/2006/main">
               <a:ext uri="{FF2B5EF4-FFF2-40B4-BE49-F238E27FC236}">
-                <a16:creationId xmlns:a16="http://schemas.microsoft.com/office/drawing/2014/main" id="{2F975D52-B101-4B18-85AE-56C3D5B59E28}"/>
+                <a16:creationId xmlns:a16="http://schemas.microsoft.com/office/drawing/2014/main" id="{1BD8256E-3AB6-4B42-B860-5BD97DC8FDB3}"/>
               </a:ext>
             </a:extLst>
           </p:cNvPr>
@@ -5745,7 +5841,7 @@
           <p:cNvPr id="4" name="">
             <a:extLst xmlns:a="http://schemas.openxmlformats.org/drawingml/2006/main">
               <a:ext uri="{FF2B5EF4-FFF2-40B4-BE49-F238E27FC236}">
-                <a16:creationId xmlns:a16="http://schemas.microsoft.com/office/drawing/2014/main" id="{08ECA865-5E01-4593-965E-18F2A4E16C9F}"/>
+                <a16:creationId xmlns:a16="http://schemas.microsoft.com/office/drawing/2014/main" id="{2DF7861F-89DA-433B-969C-8C3F89851F81}"/>
               </a:ext>
             </a:extLst>
           </p:cNvPr>
@@ -5802,7 +5898,7 @@
           <p:cNvPr id="5" name="">
             <a:extLst xmlns:a="http://schemas.openxmlformats.org/drawingml/2006/main">
               <a:ext uri="{FF2B5EF4-FFF2-40B4-BE49-F238E27FC236}">
-                <a16:creationId xmlns:a16="http://schemas.microsoft.com/office/drawing/2014/main" id="{A6C871FD-CCCA-4AC0-B9EE-A1D7B4B8ADC8}"/>
+                <a16:creationId xmlns:a16="http://schemas.microsoft.com/office/drawing/2014/main" id="{035CBDA8-3CFF-4D88-882F-4465516A78B4}"/>
               </a:ext>
             </a:extLst>
           </p:cNvPr>
@@ -5859,7 +5955,7 @@
           <p:cNvPr id="6" name="">
             <a:extLst xmlns:a="http://schemas.openxmlformats.org/drawingml/2006/main">
               <a:ext uri="{FF2B5EF4-FFF2-40B4-BE49-F238E27FC236}">
-                <a16:creationId xmlns:a16="http://schemas.microsoft.com/office/drawing/2014/main" id="{34AF2C2F-CF39-4023-8B59-273D9D757AD7}"/>
+                <a16:creationId xmlns:a16="http://schemas.microsoft.com/office/drawing/2014/main" id="{33BC0C65-36AC-4412-BB83-306E65018AA6}"/>
               </a:ext>
             </a:extLst>
           </p:cNvPr>
@@ -5888,14 +5984,14 @@
       </p:sp>
       <p:pic>
         <p:nvPicPr>
-          <p:cNvPr id="25" name=""/>
+          <p:cNvPr id="26" name=""/>
           <p:cNvPicPr>
             <a:picLocks xmlns:a="http://schemas.openxmlformats.org/drawingml/2006/main" noChangeAspect="1"/>
           </p:cNvPicPr>
           <p:nvPr/>
         </p:nvPicPr>
         <p:blipFill>
-          <a:blip xmlns:r="http://schemas.openxmlformats.org/officeDocument/2006/relationships" xmlns:a="http://schemas.openxmlformats.org/drawingml/2006/main" r:embed="R2a4ba174925a4c40"/>
+          <a:blip xmlns:r="http://schemas.openxmlformats.org/officeDocument/2006/relationships" xmlns:a="http://schemas.openxmlformats.org/drawingml/2006/main" r:embed="R39a4284b4c084fe2"/>
           <a:stretch xmlns:a="http://schemas.openxmlformats.org/drawingml/2006/main"/>
         </p:blipFill>
         <p:spPr>
@@ -5913,7 +6009,7 @@
           <p:cNvPr id="8" name="">
             <a:extLst xmlns:a="http://schemas.openxmlformats.org/drawingml/2006/main">
               <a:ext uri="{FF2B5EF4-FFF2-40B4-BE49-F238E27FC236}">
-                <a16:creationId xmlns:a16="http://schemas.microsoft.com/office/drawing/2014/main" id="{B481BA16-ABDD-4D73-A84F-CB681EDDC1AC}"/>
+                <a16:creationId xmlns:a16="http://schemas.microsoft.com/office/drawing/2014/main" id="{5002592E-C3F6-4517-B8C9-59DAF5211DF3}"/>
               </a:ext>
             </a:extLst>
           </p:cNvPr>
@@ -5970,7 +6066,7 @@
           <p:cNvPr id="9" name="">
             <a:extLst xmlns:a="http://schemas.openxmlformats.org/drawingml/2006/main">
               <a:ext uri="{FF2B5EF4-FFF2-40B4-BE49-F238E27FC236}">
-                <a16:creationId xmlns:a16="http://schemas.microsoft.com/office/drawing/2014/main" id="{9C158D9F-1DF4-4165-B220-929AF9040A93}"/>
+                <a16:creationId xmlns:a16="http://schemas.microsoft.com/office/drawing/2014/main" id="{8CF4B1B7-6375-4760-87AF-3317CC0973CA}"/>
               </a:ext>
             </a:extLst>
           </p:cNvPr>
@@ -6027,7 +6123,7 @@
           <p:cNvPr id="10" name="">
             <a:extLst xmlns:a="http://schemas.openxmlformats.org/drawingml/2006/main">
               <a:ext uri="{FF2B5EF4-FFF2-40B4-BE49-F238E27FC236}">
-                <a16:creationId xmlns:a16="http://schemas.microsoft.com/office/drawing/2014/main" id="{824A838B-BE26-456C-8562-8723B0D2BC30}"/>
+                <a16:creationId xmlns:a16="http://schemas.microsoft.com/office/drawing/2014/main" id="{6875E45E-1A0B-475E-887D-83AC34EF0B50}"/>
               </a:ext>
             </a:extLst>
           </p:cNvPr>
@@ -6059,7 +6155,7 @@
           <p:cNvPr id="11" name="">
             <a:extLst xmlns:a="http://schemas.openxmlformats.org/drawingml/2006/main">
               <a:ext uri="{FF2B5EF4-FFF2-40B4-BE49-F238E27FC236}">
-                <a16:creationId xmlns:a16="http://schemas.microsoft.com/office/drawing/2014/main" id="{07EE477E-7214-4B30-9894-2754938662A6}"/>
+                <a16:creationId xmlns:a16="http://schemas.microsoft.com/office/drawing/2014/main" id="{6E789AC0-040A-4E8F-99B0-D6310325B3A7}"/>
               </a:ext>
             </a:extLst>
           </p:cNvPr>
@@ -6116,7 +6212,7 @@
           <p:cNvPr id="12" name="">
             <a:extLst xmlns:a="http://schemas.openxmlformats.org/drawingml/2006/main">
               <a:ext uri="{FF2B5EF4-FFF2-40B4-BE49-F238E27FC236}">
-                <a16:creationId xmlns:a16="http://schemas.microsoft.com/office/drawing/2014/main" id="{B46D3BA9-A91C-4A21-9C2A-CB5F39F1CD5B}"/>
+                <a16:creationId xmlns:a16="http://schemas.microsoft.com/office/drawing/2014/main" id="{272707BC-DDE0-4290-9572-17B5705D3CC6}"/>
               </a:ext>
             </a:extLst>
           </p:cNvPr>
@@ -6173,7 +6269,7 @@
           <p:cNvPr id="13" name="">
             <a:extLst xmlns:a="http://schemas.openxmlformats.org/drawingml/2006/main">
               <a:ext uri="{FF2B5EF4-FFF2-40B4-BE49-F238E27FC236}">
-                <a16:creationId xmlns:a16="http://schemas.microsoft.com/office/drawing/2014/main" id="{E6579C75-65D3-461E-91EF-4571753059A8}"/>
+                <a16:creationId xmlns:a16="http://schemas.microsoft.com/office/drawing/2014/main" id="{EC248489-62B7-4427-86B1-BA28D203AE8B}"/>
               </a:ext>
             </a:extLst>
           </p:cNvPr>
@@ -6185,15 +6281,15 @@
         <p:spPr>
           <a:xfrm xmlns:a="http://schemas.openxmlformats.org/drawingml/2006/main">
             <a:off x="7334250" y="2952750"/>
-            <a:ext cx="3905250" cy="1371600"/>
+            <a:ext cx="3905250" cy="1581150"/>
           </a:xfrm>
           <a:prstGeom xmlns:a="http://schemas.openxmlformats.org/drawingml/2006/main" prst="roundRect">
             <a:avLst>
-              <a:gd name="adj" fmla="val 5556"/>
+              <a:gd name="adj" fmla="val 4819"/>
             </a:avLst>
           </a:prstGeom>
           <a:solidFill xmlns:a="http://schemas.openxmlformats.org/drawingml/2006/main">
-            <a:srgbClr val="EEF3F8"/>
+            <a:srgbClr val="17324D"/>
           </a:solidFill>
           <a:ln xmlns:a="http://schemas.openxmlformats.org/drawingml/2006/main" w="0">
             <a:noFill/>
@@ -6205,137 +6301,169 @@
           <p:cNvPr id="14" name="">
             <a:extLst xmlns:a="http://schemas.openxmlformats.org/drawingml/2006/main">
               <a:ext uri="{FF2B5EF4-FFF2-40B4-BE49-F238E27FC236}">
-                <a16:creationId xmlns:a16="http://schemas.microsoft.com/office/drawing/2014/main" id="{8E1423DA-0292-4633-9054-E037B7CF4BAD}"/>
-              </a:ext>
-            </a:extLst>
-          </p:cNvPr>
-          <p:cNvSpPr>
-            <a:spLocks xmlns:a="http://schemas.openxmlformats.org/drawingml/2006/main" noGrp="1"/>
-          </p:cNvSpPr>
-          <p:nvPr/>
-        </p:nvSpPr>
-        <p:spPr>
-          <a:xfrm xmlns:a="http://schemas.openxmlformats.org/drawingml/2006/main">
-            <a:off x="7505700" y="3067050"/>
-            <a:ext cx="3562350" cy="228600"/>
-          </a:xfrm>
-          <a:prstGeom xmlns:a="http://schemas.openxmlformats.org/drawingml/2006/main" prst="rect">
-            <a:avLst/>
-          </a:prstGeom>
-          <a:noFill xmlns:a="http://schemas.openxmlformats.org/drawingml/2006/main"/>
-          <a:ln xmlns:a="http://schemas.openxmlformats.org/drawingml/2006/main" w="0">
-            <a:noFill/>
-          </a:ln>
-        </p:spPr>
-        <p:txBody>
-          <a:bodyPr xmlns:a="http://schemas.openxmlformats.org/drawingml/2006/main" anchor="ctr">
-            <a:normAutofit fontScale="85714"/>
-          </a:bodyPr>
-          <a:lstStyle xmlns:a="http://schemas.openxmlformats.org/drawingml/2006/main"/>
-          <a:p xmlns:a="http://schemas.openxmlformats.org/drawingml/2006/main">
-            <a:pPr algn="l">
-              <a:defRPr sz="1050" b="1">
-                <a:solidFill>
-                  <a:srgbClr val="17324D"/>
-                </a:solidFill>
-                <a:latin typeface="Pretendard"/>
-                <a:ea typeface="Pretendard"/>
-                <a:cs typeface="Pretendard"/>
-              </a:defRPr>
-            </a:pPr>
-            <a:r>
-              <a:rPr sz="1050" b="1">
-                <a:solidFill>
-                  <a:srgbClr val="17324D"/>
-                </a:solidFill>
-                <a:latin typeface="Pretendard"/>
-                <a:ea typeface="Pretendard"/>
-                <a:cs typeface="Pretendard"/>
-              </a:rPr>
-              <a:t>ESS 시사점</a:t>
-            </a:r>
-          </a:p>
-        </p:txBody>
-      </p:sp>
-      <p:sp>
-        <p:nvSpPr>
-          <p:cNvPr id="15" name="">
-            <a:extLst xmlns:a="http://schemas.openxmlformats.org/drawingml/2006/main">
-              <a:ext uri="{FF2B5EF4-FFF2-40B4-BE49-F238E27FC236}">
-                <a16:creationId xmlns:a16="http://schemas.microsoft.com/office/drawing/2014/main" id="{EEF666C6-9EB7-4DEC-9DD8-039034572C2C}"/>
-              </a:ext>
-            </a:extLst>
-          </p:cNvPr>
-          <p:cNvSpPr>
-            <a:spLocks xmlns:a="http://schemas.openxmlformats.org/drawingml/2006/main" noGrp="1"/>
-          </p:cNvSpPr>
-          <p:nvPr/>
-        </p:nvSpPr>
-        <p:spPr>
-          <a:xfrm xmlns:a="http://schemas.openxmlformats.org/drawingml/2006/main">
-            <a:off x="7505700" y="3314700"/>
-            <a:ext cx="3562350" cy="914400"/>
-          </a:xfrm>
-          <a:prstGeom xmlns:a="http://schemas.openxmlformats.org/drawingml/2006/main" prst="rect">
-            <a:avLst/>
-          </a:prstGeom>
-          <a:noFill xmlns:a="http://schemas.openxmlformats.org/drawingml/2006/main"/>
-          <a:ln xmlns:a="http://schemas.openxmlformats.org/drawingml/2006/main" w="0">
-            <a:noFill/>
-          </a:ln>
-        </p:spPr>
-        <p:txBody>
-          <a:bodyPr xmlns:a="http://schemas.openxmlformats.org/drawingml/2006/main" anchor="ctr">
-            <a:normAutofit fontScale="100000"/>
-          </a:bodyPr>
-          <a:lstStyle xmlns:a="http://schemas.openxmlformats.org/drawingml/2006/main"/>
-          <a:p xmlns:a="http://schemas.openxmlformats.org/drawingml/2006/main">
-            <a:pPr algn="l">
-              <a:defRPr sz="1275" b="0">
-                <a:solidFill>
-                  <a:srgbClr val="1F2933"/>
-                </a:solidFill>
-                <a:latin typeface="Pretendard"/>
-                <a:ea typeface="Pretendard"/>
-                <a:cs typeface="Pretendard"/>
-              </a:defRPr>
-            </a:pPr>
-            <a:r>
-              <a:rPr sz="1275" b="0">
-                <a:solidFill>
-                  <a:srgbClr val="1F2933"/>
-                </a:solidFill>
-                <a:latin typeface="Pretendard"/>
-                <a:ea typeface="Pretendard"/>
-                <a:cs typeface="Pretendard"/>
-              </a:rPr>
-              <a:t>실제 ESS 수명 예측은 열화 상태뿐 아니라 충전 운전조건도 함께 고려해야 한다. 상관관계를 인과관계로 확대 해석하지 않는다.</a:t>
-            </a:r>
-          </a:p>
-        </p:txBody>
-      </p:sp>
-      <p:sp>
-        <p:nvSpPr>
-          <p:cNvPr id="16" name="">
-            <a:extLst xmlns:a="http://schemas.openxmlformats.org/drawingml/2006/main">
-              <a:ext uri="{FF2B5EF4-FFF2-40B4-BE49-F238E27FC236}">
-                <a16:creationId xmlns:a16="http://schemas.microsoft.com/office/drawing/2014/main" id="{692F1C32-AF0E-41F4-A79C-C2050363DEC0}"/>
-              </a:ext>
-            </a:extLst>
-          </p:cNvPr>
-          <p:cNvSpPr>
-            <a:spLocks xmlns:a="http://schemas.openxmlformats.org/drawingml/2006/main" noGrp="1"/>
-          </p:cNvSpPr>
-          <p:nvPr/>
-        </p:nvSpPr>
-        <p:spPr>
-          <a:xfrm xmlns:a="http://schemas.openxmlformats.org/drawingml/2006/main">
-            <a:off x="7334250" y="4514850"/>
-            <a:ext cx="3905250" cy="1066800"/>
+                <a16:creationId xmlns:a16="http://schemas.microsoft.com/office/drawing/2014/main" id="{E1A52C55-E19B-4AF5-9BB3-553250F6386B}"/>
+              </a:ext>
+            </a:extLst>
+          </p:cNvPr>
+          <p:cNvSpPr>
+            <a:spLocks xmlns:a="http://schemas.openxmlformats.org/drawingml/2006/main" noGrp="1"/>
+          </p:cNvSpPr>
+          <p:nvPr/>
+        </p:nvSpPr>
+        <p:spPr>
+          <a:xfrm xmlns:a="http://schemas.openxmlformats.org/drawingml/2006/main">
+            <a:off x="7334250" y="2952750"/>
+            <a:ext cx="76200" cy="1581150"/>
           </a:xfrm>
           <a:prstGeom xmlns:a="http://schemas.openxmlformats.org/drawingml/2006/main" prst="roundRect">
             <a:avLst>
-              <a:gd name="adj" fmla="val 7143"/>
+              <a:gd name="adj" fmla="val 50000"/>
+            </a:avLst>
+          </a:prstGeom>
+          <a:solidFill xmlns:a="http://schemas.openxmlformats.org/drawingml/2006/main">
+            <a:srgbClr val="008C85"/>
+          </a:solidFill>
+          <a:ln xmlns:a="http://schemas.openxmlformats.org/drawingml/2006/main" w="0">
+            <a:noFill/>
+          </a:ln>
+        </p:spPr>
+      </p:sp>
+      <p:sp>
+        <p:nvSpPr>
+          <p:cNvPr id="15" name="">
+            <a:extLst xmlns:a="http://schemas.openxmlformats.org/drawingml/2006/main">
+              <a:ext uri="{FF2B5EF4-FFF2-40B4-BE49-F238E27FC236}">
+                <a16:creationId xmlns:a16="http://schemas.microsoft.com/office/drawing/2014/main" id="{A8B5B1C2-4904-44E1-AD01-4AFE66BE30AA}"/>
+              </a:ext>
+            </a:extLst>
+          </p:cNvPr>
+          <p:cNvSpPr>
+            <a:spLocks xmlns:a="http://schemas.openxmlformats.org/drawingml/2006/main" noGrp="1"/>
+          </p:cNvSpPr>
+          <p:nvPr/>
+        </p:nvSpPr>
+        <p:spPr>
+          <a:xfrm xmlns:a="http://schemas.openxmlformats.org/drawingml/2006/main">
+            <a:off x="7562850" y="3067050"/>
+            <a:ext cx="3448050" cy="342900"/>
+          </a:xfrm>
+          <a:prstGeom xmlns:a="http://schemas.openxmlformats.org/drawingml/2006/main" prst="rect">
+            <a:avLst/>
+          </a:prstGeom>
+          <a:noFill xmlns:a="http://schemas.openxmlformats.org/drawingml/2006/main"/>
+          <a:ln xmlns:a="http://schemas.openxmlformats.org/drawingml/2006/main" w="0">
+            <a:noFill/>
+          </a:ln>
+        </p:spPr>
+        <p:txBody>
+          <a:bodyPr xmlns:a="http://schemas.openxmlformats.org/drawingml/2006/main" anchor="ctr">
+            <a:normAutofit fontScale="63764"/>
+          </a:bodyPr>
+          <a:lstStyle xmlns:a="http://schemas.openxmlformats.org/drawingml/2006/main"/>
+          <a:p xmlns:a="http://schemas.openxmlformats.org/drawingml/2006/main">
+            <a:pPr algn="l">
+              <a:defRPr sz="1575" b="1">
+                <a:solidFill>
+                  <a:srgbClr val="58D1C8"/>
+                </a:solidFill>
+                <a:latin typeface="Pretendard"/>
+                <a:ea typeface="Pretendard"/>
+                <a:cs typeface="Pretendard"/>
+              </a:defRPr>
+            </a:pPr>
+            <a:r>
+              <a:rPr sz="1575" b="1">
+                <a:solidFill>
+                  <a:srgbClr val="58D1C8"/>
+                </a:solidFill>
+                <a:latin typeface="Pretendard"/>
+                <a:ea typeface="Pretendard"/>
+                <a:cs typeface="Pretendard"/>
+              </a:rPr>
+              <a:t>Cell 상태가 같아도 운전조건이 다르면 기대수명은 달라질 수 있다</a:t>
+            </a:r>
+          </a:p>
+        </p:txBody>
+      </p:sp>
+      <p:sp>
+        <p:nvSpPr>
+          <p:cNvPr id="16" name="">
+            <a:extLst xmlns:a="http://schemas.openxmlformats.org/drawingml/2006/main">
+              <a:ext uri="{FF2B5EF4-FFF2-40B4-BE49-F238E27FC236}">
+                <a16:creationId xmlns:a16="http://schemas.microsoft.com/office/drawing/2014/main" id="{DD7D396F-F34D-4FBA-97E4-4E7D18105E8E}"/>
+              </a:ext>
+            </a:extLst>
+          </p:cNvPr>
+          <p:cNvSpPr>
+            <a:spLocks xmlns:a="http://schemas.openxmlformats.org/drawingml/2006/main" noGrp="1"/>
+          </p:cNvSpPr>
+          <p:nvPr/>
+        </p:nvSpPr>
+        <p:spPr>
+          <a:xfrm xmlns:a="http://schemas.openxmlformats.org/drawingml/2006/main">
+            <a:off x="7562850" y="3429000"/>
+            <a:ext cx="3448050" cy="990600"/>
+          </a:xfrm>
+          <a:prstGeom xmlns:a="http://schemas.openxmlformats.org/drawingml/2006/main" prst="rect">
+            <a:avLst/>
+          </a:prstGeom>
+          <a:noFill xmlns:a="http://schemas.openxmlformats.org/drawingml/2006/main"/>
+          <a:ln xmlns:a="http://schemas.openxmlformats.org/drawingml/2006/main" w="0">
+            <a:noFill/>
+          </a:ln>
+        </p:spPr>
+        <p:txBody>
+          <a:bodyPr xmlns:a="http://schemas.openxmlformats.org/drawingml/2006/main" anchor="ctr">
+            <a:normAutofit fontScale="100000"/>
+          </a:bodyPr>
+          <a:lstStyle xmlns:a="http://schemas.openxmlformats.org/drawingml/2006/main"/>
+          <a:p xmlns:a="http://schemas.openxmlformats.org/drawingml/2006/main">
+            <a:pPr algn="l">
+              <a:defRPr sz="1200" b="0">
+                <a:solidFill>
+                  <a:srgbClr val="FFFFFF"/>
+                </a:solidFill>
+                <a:latin typeface="Pretendard"/>
+                <a:ea typeface="Pretendard"/>
+                <a:cs typeface="Pretendard"/>
+              </a:defRPr>
+            </a:pPr>
+            <a:r>
+              <a:rPr sz="1200" b="0">
+                <a:solidFill>
+                  <a:srgbClr val="FFFFFF"/>
+                </a:solidFill>
+                <a:latin typeface="Pretendard"/>
+                <a:ea typeface="Pretendard"/>
+                <a:cs typeface="Pretendard"/>
+              </a:rPr>
+              <a:t>C-rate를 예측 변수와 검증 그룹에 포함하되, 관찰된 연관성을 인과관계로 단정하지 않는다.</a:t>
+            </a:r>
+          </a:p>
+        </p:txBody>
+      </p:sp>
+      <p:sp>
+        <p:nvSpPr>
+          <p:cNvPr id="17" name="">
+            <a:extLst xmlns:a="http://schemas.openxmlformats.org/drawingml/2006/main">
+              <a:ext uri="{FF2B5EF4-FFF2-40B4-BE49-F238E27FC236}">
+                <a16:creationId xmlns:a16="http://schemas.microsoft.com/office/drawing/2014/main" id="{BAAF29A7-6906-412E-94A4-1C1A40DBE143}"/>
+              </a:ext>
+            </a:extLst>
+          </p:cNvPr>
+          <p:cNvSpPr>
+            <a:spLocks xmlns:a="http://schemas.openxmlformats.org/drawingml/2006/main" noGrp="1"/>
+          </p:cNvSpPr>
+          <p:nvPr/>
+        </p:nvSpPr>
+        <p:spPr>
+          <a:xfrm xmlns:a="http://schemas.openxmlformats.org/drawingml/2006/main">
+            <a:off x="7334250" y="4724400"/>
+            <a:ext cx="3905250" cy="857250"/>
+          </a:xfrm>
+          <a:prstGeom xmlns:a="http://schemas.openxmlformats.org/drawingml/2006/main" prst="roundRect">
+            <a:avLst>
+              <a:gd name="adj" fmla="val 8889"/>
             </a:avLst>
           </a:prstGeom>
           <a:solidFill xmlns:a="http://schemas.openxmlformats.org/drawingml/2006/main">
@@ -6348,21 +6476,21 @@
       </p:sp>
       <p:sp>
         <p:nvSpPr>
-          <p:cNvPr id="17" name="">
-            <a:extLst xmlns:a="http://schemas.openxmlformats.org/drawingml/2006/main">
-              <a:ext uri="{FF2B5EF4-FFF2-40B4-BE49-F238E27FC236}">
-                <a16:creationId xmlns:a16="http://schemas.microsoft.com/office/drawing/2014/main" id="{0A1A565F-3450-4083-9AE1-6AE77C91C015}"/>
-              </a:ext>
-            </a:extLst>
-          </p:cNvPr>
-          <p:cNvSpPr>
-            <a:spLocks xmlns:a="http://schemas.openxmlformats.org/drawingml/2006/main" noGrp="1"/>
-          </p:cNvSpPr>
-          <p:nvPr/>
-        </p:nvSpPr>
-        <p:spPr>
-          <a:xfrm xmlns:a="http://schemas.openxmlformats.org/drawingml/2006/main">
-            <a:off x="7505700" y="4629150"/>
+          <p:cNvPr id="18" name="">
+            <a:extLst xmlns:a="http://schemas.openxmlformats.org/drawingml/2006/main">
+              <a:ext uri="{FF2B5EF4-FFF2-40B4-BE49-F238E27FC236}">
+                <a16:creationId xmlns:a16="http://schemas.microsoft.com/office/drawing/2014/main" id="{4B8F4089-9F81-45EA-B182-1794F103DFAA}"/>
+              </a:ext>
+            </a:extLst>
+          </p:cNvPr>
+          <p:cNvSpPr>
+            <a:spLocks xmlns:a="http://schemas.openxmlformats.org/drawingml/2006/main" noGrp="1"/>
+          </p:cNvSpPr>
+          <p:nvPr/>
+        </p:nvSpPr>
+        <p:spPr>
+          <a:xfrm xmlns:a="http://schemas.openxmlformats.org/drawingml/2006/main">
+            <a:off x="7505700" y="4838700"/>
             <a:ext cx="3562350" cy="228600"/>
           </a:xfrm>
           <a:prstGeom xmlns:a="http://schemas.openxmlformats.org/drawingml/2006/main" prst="rect">
@@ -6405,34 +6533,34 @@
       </p:sp>
       <p:sp>
         <p:nvSpPr>
-          <p:cNvPr id="18" name="">
-            <a:extLst xmlns:a="http://schemas.openxmlformats.org/drawingml/2006/main">
-              <a:ext uri="{FF2B5EF4-FFF2-40B4-BE49-F238E27FC236}">
-                <a16:creationId xmlns:a16="http://schemas.microsoft.com/office/drawing/2014/main" id="{4272D78D-57F3-4852-BEA4-962F53746F34}"/>
-              </a:ext>
-            </a:extLst>
-          </p:cNvPr>
-          <p:cNvSpPr>
-            <a:spLocks xmlns:a="http://schemas.openxmlformats.org/drawingml/2006/main" noGrp="1"/>
-          </p:cNvSpPr>
-          <p:nvPr/>
-        </p:nvSpPr>
-        <p:spPr>
-          <a:xfrm xmlns:a="http://schemas.openxmlformats.org/drawingml/2006/main">
-            <a:off x="7505700" y="4876800"/>
-            <a:ext cx="3562350" cy="609600"/>
-          </a:xfrm>
-          <a:prstGeom xmlns:a="http://schemas.openxmlformats.org/drawingml/2006/main" prst="rect">
-            <a:avLst/>
-          </a:prstGeom>
-          <a:noFill xmlns:a="http://schemas.openxmlformats.org/drawingml/2006/main"/>
-          <a:ln xmlns:a="http://schemas.openxmlformats.org/drawingml/2006/main" w="0">
-            <a:noFill/>
-          </a:ln>
-        </p:spPr>
-        <p:txBody>
-          <a:bodyPr xmlns:a="http://schemas.openxmlformats.org/drawingml/2006/main" anchor="ctr">
-            <a:normAutofit fontScale="100000"/>
+          <p:cNvPr id="19" name="">
+            <a:extLst xmlns:a="http://schemas.openxmlformats.org/drawingml/2006/main">
+              <a:ext uri="{FF2B5EF4-FFF2-40B4-BE49-F238E27FC236}">
+                <a16:creationId xmlns:a16="http://schemas.microsoft.com/office/drawing/2014/main" id="{42F86F56-A559-41E2-B13F-1B6BC8E2A47E}"/>
+              </a:ext>
+            </a:extLst>
+          </p:cNvPr>
+          <p:cNvSpPr>
+            <a:spLocks xmlns:a="http://schemas.openxmlformats.org/drawingml/2006/main" noGrp="1"/>
+          </p:cNvSpPr>
+          <p:nvPr/>
+        </p:nvSpPr>
+        <p:spPr>
+          <a:xfrm xmlns:a="http://schemas.openxmlformats.org/drawingml/2006/main">
+            <a:off x="7505700" y="5086350"/>
+            <a:ext cx="3562350" cy="400050"/>
+          </a:xfrm>
+          <a:prstGeom xmlns:a="http://schemas.openxmlformats.org/drawingml/2006/main" prst="rect">
+            <a:avLst/>
+          </a:prstGeom>
+          <a:noFill xmlns:a="http://schemas.openxmlformats.org/drawingml/2006/main"/>
+          <a:ln xmlns:a="http://schemas.openxmlformats.org/drawingml/2006/main" w="0">
+            <a:noFill/>
+          </a:ln>
+        </p:spPr>
+        <p:txBody>
+          <a:bodyPr xmlns:a="http://schemas.openxmlformats.org/drawingml/2006/main" anchor="ctr">
+            <a:normAutofit fontScale="79412"/>
           </a:bodyPr>
           <a:lstStyle xmlns:a="http://schemas.openxmlformats.org/drawingml/2006/main"/>
           <a:p xmlns:a="http://schemas.openxmlformats.org/drawingml/2006/main">
@@ -6463,7 +6591,7 @@
     </p:spTree>
     <p:extLst>
       <p:ext uri="{BB962C8B-B14F-4D97-AF65-F5344CB8AC3E}">
-        <p14:creationId xmlns:p14="http://schemas.microsoft.com/office/powerpoint/2010/main" val="59292821"/>
+        <p14:creationId xmlns:p14="http://schemas.microsoft.com/office/powerpoint/2010/main" val="1469720008"/>
       </p:ext>
     </p:extLst>
   </p:cSld>
@@ -6491,10 +6619,10 @@
       </p:grpSpPr>
       <p:sp>
         <p:nvSpPr>
-          <p:cNvPr id="21" name="">
-            <a:extLst xmlns:a="http://schemas.openxmlformats.org/drawingml/2006/main">
-              <a:ext uri="{FF2B5EF4-FFF2-40B4-BE49-F238E27FC236}">
-                <a16:creationId xmlns:a16="http://schemas.microsoft.com/office/drawing/2014/main" id="{2A982447-D90B-48F2-894A-38F8D80CF389}"/>
+          <p:cNvPr id="22" name="">
+            <a:extLst xmlns:a="http://schemas.openxmlformats.org/drawingml/2006/main">
+              <a:ext uri="{FF2B5EF4-FFF2-40B4-BE49-F238E27FC236}">
+                <a16:creationId xmlns:a16="http://schemas.microsoft.com/office/drawing/2014/main" id="{BD20B64A-649F-4615-95D4-E26FE0647D91}"/>
               </a:ext>
             </a:extLst>
           </p:cNvPr>
@@ -6551,7 +6679,7 @@
           <p:cNvPr id="2" name="">
             <a:extLst xmlns:a="http://schemas.openxmlformats.org/drawingml/2006/main">
               <a:ext uri="{FF2B5EF4-FFF2-40B4-BE49-F238E27FC236}">
-                <a16:creationId xmlns:a16="http://schemas.microsoft.com/office/drawing/2014/main" id="{1093B850-4D03-4138-A506-16F7BB2CF49C}"/>
+                <a16:creationId xmlns:a16="http://schemas.microsoft.com/office/drawing/2014/main" id="{148E6B0E-1AB6-4403-AEB7-309B7E08152D}"/>
               </a:ext>
             </a:extLst>
           </p:cNvPr>
@@ -6608,7 +6736,7 @@
           <p:cNvPr id="3" name="">
             <a:extLst xmlns:a="http://schemas.openxmlformats.org/drawingml/2006/main">
               <a:ext uri="{FF2B5EF4-FFF2-40B4-BE49-F238E27FC236}">
-                <a16:creationId xmlns:a16="http://schemas.microsoft.com/office/drawing/2014/main" id="{25AA1E7E-E9B1-4987-86D0-FC8DDB8F067C}"/>
+                <a16:creationId xmlns:a16="http://schemas.microsoft.com/office/drawing/2014/main" id="{E59772D2-54FC-4B68-B184-F64BF2BEF9BB}"/>
               </a:ext>
             </a:extLst>
           </p:cNvPr>
@@ -6640,7 +6768,7 @@
           <p:cNvPr id="4" name="">
             <a:extLst xmlns:a="http://schemas.openxmlformats.org/drawingml/2006/main">
               <a:ext uri="{FF2B5EF4-FFF2-40B4-BE49-F238E27FC236}">
-                <a16:creationId xmlns:a16="http://schemas.microsoft.com/office/drawing/2014/main" id="{0BB8F2D3-B473-422B-9768-686EAA98A631}"/>
+                <a16:creationId xmlns:a16="http://schemas.microsoft.com/office/drawing/2014/main" id="{1D390F95-048E-4727-AF80-812D688CA29B}"/>
               </a:ext>
             </a:extLst>
           </p:cNvPr>
@@ -6697,7 +6825,7 @@
           <p:cNvPr id="5" name="">
             <a:extLst xmlns:a="http://schemas.openxmlformats.org/drawingml/2006/main">
               <a:ext uri="{FF2B5EF4-FFF2-40B4-BE49-F238E27FC236}">
-                <a16:creationId xmlns:a16="http://schemas.microsoft.com/office/drawing/2014/main" id="{843676F3-847A-4590-8E6E-8711C7AC4174}"/>
+                <a16:creationId xmlns:a16="http://schemas.microsoft.com/office/drawing/2014/main" id="{B606F5AD-8237-4087-8787-D7870D4E6313}"/>
               </a:ext>
             </a:extLst>
           </p:cNvPr>
@@ -6754,7 +6882,7 @@
           <p:cNvPr id="6" name="">
             <a:extLst xmlns:a="http://schemas.openxmlformats.org/drawingml/2006/main">
               <a:ext uri="{FF2B5EF4-FFF2-40B4-BE49-F238E27FC236}">
-                <a16:creationId xmlns:a16="http://schemas.microsoft.com/office/drawing/2014/main" id="{EC351725-B345-4A86-9F01-7F0C48A01B9D}"/>
+                <a16:creationId xmlns:a16="http://schemas.microsoft.com/office/drawing/2014/main" id="{406B4031-B000-4F90-ADF8-67AF29C01EBC}"/>
               </a:ext>
             </a:extLst>
           </p:cNvPr>
@@ -6783,14 +6911,14 @@
       </p:sp>
       <p:pic>
         <p:nvPicPr>
-          <p:cNvPr id="27" name=""/>
+          <p:cNvPr id="28" name=""/>
           <p:cNvPicPr>
             <a:picLocks xmlns:a="http://schemas.openxmlformats.org/drawingml/2006/main" noChangeAspect="1"/>
           </p:cNvPicPr>
           <p:nvPr/>
         </p:nvPicPr>
         <p:blipFill>
-          <a:blip xmlns:r="http://schemas.openxmlformats.org/officeDocument/2006/relationships" xmlns:a="http://schemas.openxmlformats.org/drawingml/2006/main" r:embed="Rd4b5e24845394e6b"/>
+          <a:blip xmlns:r="http://schemas.openxmlformats.org/officeDocument/2006/relationships" xmlns:a="http://schemas.openxmlformats.org/drawingml/2006/main" r:embed="Rcfd7db81d5c84d97"/>
           <a:stretch xmlns:a="http://schemas.openxmlformats.org/drawingml/2006/main"/>
         </p:blipFill>
         <p:spPr>
@@ -6808,7 +6936,7 @@
           <p:cNvPr id="8" name="">
             <a:extLst xmlns:a="http://schemas.openxmlformats.org/drawingml/2006/main">
               <a:ext uri="{FF2B5EF4-FFF2-40B4-BE49-F238E27FC236}">
-                <a16:creationId xmlns:a16="http://schemas.microsoft.com/office/drawing/2014/main" id="{80B5CB69-8910-424B-8E5F-7B8FE30F7605}"/>
+                <a16:creationId xmlns:a16="http://schemas.microsoft.com/office/drawing/2014/main" id="{2983F5EE-D783-4D38-BB08-EEF8953B8EC5}"/>
               </a:ext>
             </a:extLst>
           </p:cNvPr>
@@ -6837,14 +6965,14 @@
       </p:sp>
       <p:pic>
         <p:nvPicPr>
-          <p:cNvPr id="29" name=""/>
+          <p:cNvPr id="30" name=""/>
           <p:cNvPicPr>
             <a:picLocks xmlns:a="http://schemas.openxmlformats.org/drawingml/2006/main" noChangeAspect="1"/>
           </p:cNvPicPr>
           <p:nvPr/>
         </p:nvPicPr>
         <p:blipFill>
-          <a:blip xmlns:r="http://schemas.openxmlformats.org/officeDocument/2006/relationships" xmlns:a="http://schemas.openxmlformats.org/drawingml/2006/main" r:embed="Rd8446b2de904426b"/>
+          <a:blip xmlns:r="http://schemas.openxmlformats.org/officeDocument/2006/relationships" xmlns:a="http://schemas.openxmlformats.org/drawingml/2006/main" r:embed="Rb7798e5c9e5b4f8d"/>
           <a:stretch xmlns:a="http://schemas.openxmlformats.org/drawingml/2006/main"/>
         </p:blipFill>
         <p:spPr>
@@ -6862,7 +6990,7 @@
           <p:cNvPr id="10" name="">
             <a:extLst xmlns:a="http://schemas.openxmlformats.org/drawingml/2006/main">
               <a:ext uri="{FF2B5EF4-FFF2-40B4-BE49-F238E27FC236}">
-                <a16:creationId xmlns:a16="http://schemas.microsoft.com/office/drawing/2014/main" id="{0C2F22C3-47AC-4A48-BF15-C8F7812281BC}"/>
+                <a16:creationId xmlns:a16="http://schemas.microsoft.com/office/drawing/2014/main" id="{637BA86D-B376-4CCE-89D0-834DDBFD10D9}"/>
               </a:ext>
             </a:extLst>
           </p:cNvPr>
@@ -6894,7 +7022,7 @@
           <p:cNvPr id="11" name="">
             <a:extLst xmlns:a="http://schemas.openxmlformats.org/drawingml/2006/main">
               <a:ext uri="{FF2B5EF4-FFF2-40B4-BE49-F238E27FC236}">
-                <a16:creationId xmlns:a16="http://schemas.microsoft.com/office/drawing/2014/main" id="{1FF0F004-C438-4EAE-8642-7306AD0E06D3}"/>
+                <a16:creationId xmlns:a16="http://schemas.microsoft.com/office/drawing/2014/main" id="{DED8027E-B51D-489B-8C78-47957705A1DC}"/>
               </a:ext>
             </a:extLst>
           </p:cNvPr>
@@ -6951,7 +7079,7 @@
           <p:cNvPr id="12" name="">
             <a:extLst xmlns:a="http://schemas.openxmlformats.org/drawingml/2006/main">
               <a:ext uri="{FF2B5EF4-FFF2-40B4-BE49-F238E27FC236}">
-                <a16:creationId xmlns:a16="http://schemas.microsoft.com/office/drawing/2014/main" id="{DC7C1122-37FE-4C55-9181-C8B4AB6965AA}"/>
+                <a16:creationId xmlns:a16="http://schemas.microsoft.com/office/drawing/2014/main" id="{4E1A6F6B-B315-41DD-8BA9-CE6CC36B26BB}"/>
               </a:ext>
             </a:extLst>
           </p:cNvPr>
@@ -6983,7 +7111,7 @@
           <p:cNvPr id="13" name="">
             <a:extLst xmlns:a="http://schemas.openxmlformats.org/drawingml/2006/main">
               <a:ext uri="{FF2B5EF4-FFF2-40B4-BE49-F238E27FC236}">
-                <a16:creationId xmlns:a16="http://schemas.microsoft.com/office/drawing/2014/main" id="{989551DC-69A1-4245-AE47-67CAC6D9C8ED}"/>
+                <a16:creationId xmlns:a16="http://schemas.microsoft.com/office/drawing/2014/main" id="{790F5ED3-4EDB-4183-B9AD-AECDAE5773F3}"/>
               </a:ext>
             </a:extLst>
           </p:cNvPr>
@@ -7040,7 +7168,7 @@
           <p:cNvPr id="14" name="">
             <a:extLst xmlns:a="http://schemas.openxmlformats.org/drawingml/2006/main">
               <a:ext uri="{FF2B5EF4-FFF2-40B4-BE49-F238E27FC236}">
-                <a16:creationId xmlns:a16="http://schemas.microsoft.com/office/drawing/2014/main" id="{DB4A64F6-9863-400E-BE4E-11606F5FD7CD}"/>
+                <a16:creationId xmlns:a16="http://schemas.microsoft.com/office/drawing/2014/main" id="{60F666E7-4FB6-480B-B9FE-7C95F918417D}"/>
               </a:ext>
             </a:extLst>
           </p:cNvPr>
@@ -7097,27 +7225,27 @@
           <p:cNvPr id="15" name="">
             <a:extLst xmlns:a="http://schemas.openxmlformats.org/drawingml/2006/main">
               <a:ext uri="{FF2B5EF4-FFF2-40B4-BE49-F238E27FC236}">
-                <a16:creationId xmlns:a16="http://schemas.microsoft.com/office/drawing/2014/main" id="{14E3F76E-988D-4C37-94D4-838EB8FB1940}"/>
-              </a:ext>
-            </a:extLst>
-          </p:cNvPr>
-          <p:cNvSpPr>
-            <a:spLocks xmlns:a="http://schemas.openxmlformats.org/drawingml/2006/main" noGrp="1"/>
-          </p:cNvSpPr>
-          <p:nvPr/>
-        </p:nvSpPr>
-        <p:spPr>
-          <a:xfrm xmlns:a="http://schemas.openxmlformats.org/drawingml/2006/main">
-            <a:off x="8858250" y="3028950"/>
-            <a:ext cx="2381250" cy="1371600"/>
+                <a16:creationId xmlns:a16="http://schemas.microsoft.com/office/drawing/2014/main" id="{358039B0-3754-4EE7-9875-927DB3622374}"/>
+              </a:ext>
+            </a:extLst>
+          </p:cNvPr>
+          <p:cNvSpPr>
+            <a:spLocks xmlns:a="http://schemas.openxmlformats.org/drawingml/2006/main" noGrp="1"/>
+          </p:cNvSpPr>
+          <p:nvPr/>
+        </p:nvSpPr>
+        <p:spPr>
+          <a:xfrm xmlns:a="http://schemas.openxmlformats.org/drawingml/2006/main">
+            <a:off x="8763000" y="2933700"/>
+            <a:ext cx="2571750" cy="1752600"/>
           </a:xfrm>
           <a:prstGeom xmlns:a="http://schemas.openxmlformats.org/drawingml/2006/main" prst="roundRect">
             <a:avLst>
-              <a:gd name="adj" fmla="val 5556"/>
+              <a:gd name="adj" fmla="val 4348"/>
             </a:avLst>
           </a:prstGeom>
           <a:solidFill xmlns:a="http://schemas.openxmlformats.org/drawingml/2006/main">
-            <a:srgbClr val="EEF3F8"/>
+            <a:srgbClr val="17324D"/>
           </a:solidFill>
           <a:ln xmlns:a="http://schemas.openxmlformats.org/drawingml/2006/main" w="0">
             <a:noFill/>
@@ -7129,137 +7257,169 @@
           <p:cNvPr id="16" name="">
             <a:extLst xmlns:a="http://schemas.openxmlformats.org/drawingml/2006/main">
               <a:ext uri="{FF2B5EF4-FFF2-40B4-BE49-F238E27FC236}">
-                <a16:creationId xmlns:a16="http://schemas.microsoft.com/office/drawing/2014/main" id="{A1C50D5F-D692-4655-8745-1ECE08045D6F}"/>
-              </a:ext>
-            </a:extLst>
-          </p:cNvPr>
-          <p:cNvSpPr>
-            <a:spLocks xmlns:a="http://schemas.openxmlformats.org/drawingml/2006/main" noGrp="1"/>
-          </p:cNvSpPr>
-          <p:nvPr/>
-        </p:nvSpPr>
-        <p:spPr>
-          <a:xfrm xmlns:a="http://schemas.openxmlformats.org/drawingml/2006/main">
-            <a:off x="9029700" y="3143250"/>
-            <a:ext cx="2038350" cy="228600"/>
-          </a:xfrm>
-          <a:prstGeom xmlns:a="http://schemas.openxmlformats.org/drawingml/2006/main" prst="rect">
-            <a:avLst/>
-          </a:prstGeom>
-          <a:noFill xmlns:a="http://schemas.openxmlformats.org/drawingml/2006/main"/>
-          <a:ln xmlns:a="http://schemas.openxmlformats.org/drawingml/2006/main" w="0">
-            <a:noFill/>
-          </a:ln>
-        </p:spPr>
-        <p:txBody>
-          <a:bodyPr xmlns:a="http://schemas.openxmlformats.org/drawingml/2006/main" anchor="ctr">
-            <a:normAutofit fontScale="85714"/>
-          </a:bodyPr>
-          <a:lstStyle xmlns:a="http://schemas.openxmlformats.org/drawingml/2006/main"/>
-          <a:p xmlns:a="http://schemas.openxmlformats.org/drawingml/2006/main">
-            <a:pPr algn="l">
-              <a:defRPr sz="1050" b="1">
-                <a:solidFill>
-                  <a:srgbClr val="17324D"/>
-                </a:solidFill>
-                <a:latin typeface="Pretendard"/>
-                <a:ea typeface="Pretendard"/>
-                <a:cs typeface="Pretendard"/>
-              </a:defRPr>
-            </a:pPr>
-            <a:r>
-              <a:rPr sz="1050" b="1">
-                <a:solidFill>
-                  <a:srgbClr val="17324D"/>
-                </a:solidFill>
-                <a:latin typeface="Pretendard"/>
-                <a:ea typeface="Pretendard"/>
-                <a:cs typeface="Pretendard"/>
-              </a:rPr>
-              <a:t>ESS 시사점</a:t>
-            </a:r>
-          </a:p>
-        </p:txBody>
-      </p:sp>
-      <p:sp>
-        <p:nvSpPr>
-          <p:cNvPr id="17" name="">
-            <a:extLst xmlns:a="http://schemas.openxmlformats.org/drawingml/2006/main">
-              <a:ext uri="{FF2B5EF4-FFF2-40B4-BE49-F238E27FC236}">
-                <a16:creationId xmlns:a16="http://schemas.microsoft.com/office/drawing/2014/main" id="{2DAF0422-CF3F-4669-BC08-E23320904741}"/>
-              </a:ext>
-            </a:extLst>
-          </p:cNvPr>
-          <p:cNvSpPr>
-            <a:spLocks xmlns:a="http://schemas.openxmlformats.org/drawingml/2006/main" noGrp="1"/>
-          </p:cNvSpPr>
-          <p:nvPr/>
-        </p:nvSpPr>
-        <p:spPr>
-          <a:xfrm xmlns:a="http://schemas.openxmlformats.org/drawingml/2006/main">
-            <a:off x="9029700" y="3390900"/>
-            <a:ext cx="2038350" cy="914400"/>
-          </a:xfrm>
-          <a:prstGeom xmlns:a="http://schemas.openxmlformats.org/drawingml/2006/main" prst="rect">
-            <a:avLst/>
-          </a:prstGeom>
-          <a:noFill xmlns:a="http://schemas.openxmlformats.org/drawingml/2006/main"/>
-          <a:ln xmlns:a="http://schemas.openxmlformats.org/drawingml/2006/main" w="0">
-            <a:noFill/>
-          </a:ln>
-        </p:spPr>
-        <p:txBody>
-          <a:bodyPr xmlns:a="http://schemas.openxmlformats.org/drawingml/2006/main" anchor="ctr">
-            <a:normAutofit fontScale="100000"/>
-          </a:bodyPr>
-          <a:lstStyle xmlns:a="http://schemas.openxmlformats.org/drawingml/2006/main"/>
-          <a:p xmlns:a="http://schemas.openxmlformats.org/drawingml/2006/main">
-            <a:pPr algn="l">
-              <a:defRPr sz="1275" b="0">
-                <a:solidFill>
-                  <a:srgbClr val="1F2933"/>
-                </a:solidFill>
-                <a:latin typeface="Pretendard"/>
-                <a:ea typeface="Pretendard"/>
-                <a:cs typeface="Pretendard"/>
-              </a:defRPr>
-            </a:pPr>
-            <a:r>
-              <a:rPr sz="1275" b="0">
-                <a:solidFill>
-                  <a:srgbClr val="1F2933"/>
-                </a:solidFill>
-                <a:latin typeface="Pretendard"/>
-                <a:ea typeface="Pretendard"/>
-                <a:cs typeface="Pretendard"/>
-              </a:rPr>
-              <a:t>유사한 열화 신호를 무작정 늘리기보다 대표 지표를 선택해 안정적인 예측 모델을 구성해야 한다.</a:t>
-            </a:r>
-          </a:p>
-        </p:txBody>
-      </p:sp>
-      <p:sp>
-        <p:nvSpPr>
-          <p:cNvPr id="18" name="">
-            <a:extLst xmlns:a="http://schemas.openxmlformats.org/drawingml/2006/main">
-              <a:ext uri="{FF2B5EF4-FFF2-40B4-BE49-F238E27FC236}">
-                <a16:creationId xmlns:a16="http://schemas.microsoft.com/office/drawing/2014/main" id="{791104D2-0268-4F22-804A-54EC038E81C2}"/>
-              </a:ext>
-            </a:extLst>
-          </p:cNvPr>
-          <p:cNvSpPr>
-            <a:spLocks xmlns:a="http://schemas.openxmlformats.org/drawingml/2006/main" noGrp="1"/>
-          </p:cNvSpPr>
-          <p:nvPr/>
-        </p:nvSpPr>
-        <p:spPr>
-          <a:xfrm xmlns:a="http://schemas.openxmlformats.org/drawingml/2006/main">
-            <a:off x="8858250" y="4591050"/>
-            <a:ext cx="2381250" cy="990600"/>
+                <a16:creationId xmlns:a16="http://schemas.microsoft.com/office/drawing/2014/main" id="{218B95E3-EB6A-43AD-BB8D-E1089122949B}"/>
+              </a:ext>
+            </a:extLst>
+          </p:cNvPr>
+          <p:cNvSpPr>
+            <a:spLocks xmlns:a="http://schemas.openxmlformats.org/drawingml/2006/main" noGrp="1"/>
+          </p:cNvSpPr>
+          <p:nvPr/>
+        </p:nvSpPr>
+        <p:spPr>
+          <a:xfrm xmlns:a="http://schemas.openxmlformats.org/drawingml/2006/main">
+            <a:off x="8763000" y="2933700"/>
+            <a:ext cx="76200" cy="1752600"/>
           </a:xfrm>
           <a:prstGeom xmlns:a="http://schemas.openxmlformats.org/drawingml/2006/main" prst="roundRect">
             <a:avLst>
-              <a:gd name="adj" fmla="val 7692"/>
+              <a:gd name="adj" fmla="val 50000"/>
+            </a:avLst>
+          </a:prstGeom>
+          <a:solidFill xmlns:a="http://schemas.openxmlformats.org/drawingml/2006/main">
+            <a:srgbClr val="008C85"/>
+          </a:solidFill>
+          <a:ln xmlns:a="http://schemas.openxmlformats.org/drawingml/2006/main" w="0">
+            <a:noFill/>
+          </a:ln>
+        </p:spPr>
+      </p:sp>
+      <p:sp>
+        <p:nvSpPr>
+          <p:cNvPr id="17" name="">
+            <a:extLst xmlns:a="http://schemas.openxmlformats.org/drawingml/2006/main">
+              <a:ext uri="{FF2B5EF4-FFF2-40B4-BE49-F238E27FC236}">
+                <a16:creationId xmlns:a16="http://schemas.microsoft.com/office/drawing/2014/main" id="{08C01475-93E9-4B9F-AE04-7EA117981863}"/>
+              </a:ext>
+            </a:extLst>
+          </p:cNvPr>
+          <p:cNvSpPr>
+            <a:spLocks xmlns:a="http://schemas.openxmlformats.org/drawingml/2006/main" noGrp="1"/>
+          </p:cNvSpPr>
+          <p:nvPr/>
+        </p:nvSpPr>
+        <p:spPr>
+          <a:xfrm xmlns:a="http://schemas.openxmlformats.org/drawingml/2006/main">
+            <a:off x="8991600" y="3048000"/>
+            <a:ext cx="2114550" cy="342900"/>
+          </a:xfrm>
+          <a:prstGeom xmlns:a="http://schemas.openxmlformats.org/drawingml/2006/main" prst="rect">
+            <a:avLst/>
+          </a:prstGeom>
+          <a:noFill xmlns:a="http://schemas.openxmlformats.org/drawingml/2006/main"/>
+          <a:ln xmlns:a="http://schemas.openxmlformats.org/drawingml/2006/main" w="0">
+            <a:noFill/>
+          </a:ln>
+        </p:spPr>
+        <p:txBody>
+          <a:bodyPr xmlns:a="http://schemas.openxmlformats.org/drawingml/2006/main" anchor="ctr">
+            <a:normAutofit fontScale="52381"/>
+          </a:bodyPr>
+          <a:lstStyle xmlns:a="http://schemas.openxmlformats.org/drawingml/2006/main"/>
+          <a:p xmlns:a="http://schemas.openxmlformats.org/drawingml/2006/main">
+            <a:pPr algn="l">
+              <a:defRPr sz="1575" b="1">
+                <a:solidFill>
+                  <a:srgbClr val="58D1C8"/>
+                </a:solidFill>
+                <a:latin typeface="Pretendard"/>
+                <a:ea typeface="Pretendard"/>
+                <a:cs typeface="Pretendard"/>
+              </a:defRPr>
+            </a:pPr>
+            <a:r>
+              <a:rPr sz="1575" b="1">
+                <a:solidFill>
+                  <a:srgbClr val="58D1C8"/>
+                </a:solidFill>
+                <a:latin typeface="Pretendard"/>
+                <a:ea typeface="Pretendard"/>
+                <a:cs typeface="Pretendard"/>
+              </a:rPr>
+              <a:t>강한 열화 신호를 많이 넣는 것보다 대표 지표를 잘 고르는 것이 중요하다</a:t>
+            </a:r>
+          </a:p>
+        </p:txBody>
+      </p:sp>
+      <p:sp>
+        <p:nvSpPr>
+          <p:cNvPr id="18" name="">
+            <a:extLst xmlns:a="http://schemas.openxmlformats.org/drawingml/2006/main">
+              <a:ext uri="{FF2B5EF4-FFF2-40B4-BE49-F238E27FC236}">
+                <a16:creationId xmlns:a16="http://schemas.microsoft.com/office/drawing/2014/main" id="{2A27EB28-A83B-48B3-8A81-62A81FBEC0B0}"/>
+              </a:ext>
+            </a:extLst>
+          </p:cNvPr>
+          <p:cNvSpPr>
+            <a:spLocks xmlns:a="http://schemas.openxmlformats.org/drawingml/2006/main" noGrp="1"/>
+          </p:cNvSpPr>
+          <p:nvPr/>
+        </p:nvSpPr>
+        <p:spPr>
+          <a:xfrm xmlns:a="http://schemas.openxmlformats.org/drawingml/2006/main">
+            <a:off x="8991600" y="3409950"/>
+            <a:ext cx="2114550" cy="1162050"/>
+          </a:xfrm>
+          <a:prstGeom xmlns:a="http://schemas.openxmlformats.org/drawingml/2006/main" prst="rect">
+            <a:avLst/>
+          </a:prstGeom>
+          <a:noFill xmlns:a="http://schemas.openxmlformats.org/drawingml/2006/main"/>
+          <a:ln xmlns:a="http://schemas.openxmlformats.org/drawingml/2006/main" w="0">
+            <a:noFill/>
+          </a:ln>
+        </p:spPr>
+        <p:txBody>
+          <a:bodyPr xmlns:a="http://schemas.openxmlformats.org/drawingml/2006/main" anchor="ctr">
+            <a:normAutofit fontScale="100000"/>
+          </a:bodyPr>
+          <a:lstStyle xmlns:a="http://schemas.openxmlformats.org/drawingml/2006/main"/>
+          <a:p xmlns:a="http://schemas.openxmlformats.org/drawingml/2006/main">
+            <a:pPr algn="l">
+              <a:defRPr sz="1200" b="0">
+                <a:solidFill>
+                  <a:srgbClr val="FFFFFF"/>
+                </a:solidFill>
+                <a:latin typeface="Pretendard"/>
+                <a:ea typeface="Pretendard"/>
+                <a:cs typeface="Pretendard"/>
+              </a:defRPr>
+            </a:pPr>
+            <a:r>
+              <a:rPr sz="1200" b="0">
+                <a:solidFill>
+                  <a:srgbClr val="FFFFFF"/>
+                </a:solidFill>
+                <a:latin typeface="Pretendard"/>
+                <a:ea typeface="Pretendard"/>
+                <a:cs typeface="Pretendard"/>
+              </a:rPr>
+              <a:t>서로 비슷한 ΔQ Feature를 줄이고 정규화해 새로운 운전환경에서도 안정적인 모델을 구성한다.</a:t>
+            </a:r>
+          </a:p>
+        </p:txBody>
+      </p:sp>
+      <p:sp>
+        <p:nvSpPr>
+          <p:cNvPr id="19" name="">
+            <a:extLst xmlns:a="http://schemas.openxmlformats.org/drawingml/2006/main">
+              <a:ext uri="{FF2B5EF4-FFF2-40B4-BE49-F238E27FC236}">
+                <a16:creationId xmlns:a16="http://schemas.microsoft.com/office/drawing/2014/main" id="{ADEBA36A-7F87-4B50-B2EB-CFB906754D16}"/>
+              </a:ext>
+            </a:extLst>
+          </p:cNvPr>
+          <p:cNvSpPr>
+            <a:spLocks xmlns:a="http://schemas.openxmlformats.org/drawingml/2006/main" noGrp="1"/>
+          </p:cNvSpPr>
+          <p:nvPr/>
+        </p:nvSpPr>
+        <p:spPr>
+          <a:xfrm xmlns:a="http://schemas.openxmlformats.org/drawingml/2006/main">
+            <a:off x="8763000" y="4876800"/>
+            <a:ext cx="2571750" cy="819150"/>
+          </a:xfrm>
+          <a:prstGeom xmlns:a="http://schemas.openxmlformats.org/drawingml/2006/main" prst="roundRect">
+            <a:avLst>
+              <a:gd name="adj" fmla="val 9302"/>
             </a:avLst>
           </a:prstGeom>
           <a:solidFill xmlns:a="http://schemas.openxmlformats.org/drawingml/2006/main">
@@ -7272,22 +7432,22 @@
       </p:sp>
       <p:sp>
         <p:nvSpPr>
-          <p:cNvPr id="19" name="">
-            <a:extLst xmlns:a="http://schemas.openxmlformats.org/drawingml/2006/main">
-              <a:ext uri="{FF2B5EF4-FFF2-40B4-BE49-F238E27FC236}">
-                <a16:creationId xmlns:a16="http://schemas.microsoft.com/office/drawing/2014/main" id="{C4C4F104-FE76-45C5-BF5A-AB30DA03BC79}"/>
-              </a:ext>
-            </a:extLst>
-          </p:cNvPr>
-          <p:cNvSpPr>
-            <a:spLocks xmlns:a="http://schemas.openxmlformats.org/drawingml/2006/main" noGrp="1"/>
-          </p:cNvSpPr>
-          <p:nvPr/>
-        </p:nvSpPr>
-        <p:spPr>
-          <a:xfrm xmlns:a="http://schemas.openxmlformats.org/drawingml/2006/main">
-            <a:off x="9029700" y="4705350"/>
-            <a:ext cx="2038350" cy="228600"/>
+          <p:cNvPr id="20" name="">
+            <a:extLst xmlns:a="http://schemas.openxmlformats.org/drawingml/2006/main">
+              <a:ext uri="{FF2B5EF4-FFF2-40B4-BE49-F238E27FC236}">
+                <a16:creationId xmlns:a16="http://schemas.microsoft.com/office/drawing/2014/main" id="{5065F778-3902-44B6-9F01-0913E5F5CE10}"/>
+              </a:ext>
+            </a:extLst>
+          </p:cNvPr>
+          <p:cNvSpPr>
+            <a:spLocks xmlns:a="http://schemas.openxmlformats.org/drawingml/2006/main" noGrp="1"/>
+          </p:cNvSpPr>
+          <p:nvPr/>
+        </p:nvSpPr>
+        <p:spPr>
+          <a:xfrm xmlns:a="http://schemas.openxmlformats.org/drawingml/2006/main">
+            <a:off x="8934450" y="4991100"/>
+            <a:ext cx="2228850" cy="228600"/>
           </a:xfrm>
           <a:prstGeom xmlns:a="http://schemas.openxmlformats.org/drawingml/2006/main" prst="rect">
             <a:avLst/>
@@ -7329,34 +7489,34 @@
       </p:sp>
       <p:sp>
         <p:nvSpPr>
-          <p:cNvPr id="20" name="">
-            <a:extLst xmlns:a="http://schemas.openxmlformats.org/drawingml/2006/main">
-              <a:ext uri="{FF2B5EF4-FFF2-40B4-BE49-F238E27FC236}">
-                <a16:creationId xmlns:a16="http://schemas.microsoft.com/office/drawing/2014/main" id="{BED2989B-47E2-4417-B5F6-C1D98EC48085}"/>
-              </a:ext>
-            </a:extLst>
-          </p:cNvPr>
-          <p:cNvSpPr>
-            <a:spLocks xmlns:a="http://schemas.openxmlformats.org/drawingml/2006/main" noGrp="1"/>
-          </p:cNvSpPr>
-          <p:nvPr/>
-        </p:nvSpPr>
-        <p:spPr>
-          <a:xfrm xmlns:a="http://schemas.openxmlformats.org/drawingml/2006/main">
-            <a:off x="9029700" y="4953000"/>
-            <a:ext cx="2038350" cy="533400"/>
-          </a:xfrm>
-          <a:prstGeom xmlns:a="http://schemas.openxmlformats.org/drawingml/2006/main" prst="rect">
-            <a:avLst/>
-          </a:prstGeom>
-          <a:noFill xmlns:a="http://schemas.openxmlformats.org/drawingml/2006/main"/>
-          <a:ln xmlns:a="http://schemas.openxmlformats.org/drawingml/2006/main" w="0">
-            <a:noFill/>
-          </a:ln>
-        </p:spPr>
-        <p:txBody>
-          <a:bodyPr xmlns:a="http://schemas.openxmlformats.org/drawingml/2006/main" anchor="ctr">
-            <a:normAutofit fontScale="100000"/>
+          <p:cNvPr id="21" name="">
+            <a:extLst xmlns:a="http://schemas.openxmlformats.org/drawingml/2006/main">
+              <a:ext uri="{FF2B5EF4-FFF2-40B4-BE49-F238E27FC236}">
+                <a16:creationId xmlns:a16="http://schemas.microsoft.com/office/drawing/2014/main" id="{6A418244-61FD-4F47-8C5D-B28D9F739F43}"/>
+              </a:ext>
+            </a:extLst>
+          </p:cNvPr>
+          <p:cNvSpPr>
+            <a:spLocks xmlns:a="http://schemas.openxmlformats.org/drawingml/2006/main" noGrp="1"/>
+          </p:cNvSpPr>
+          <p:nvPr/>
+        </p:nvSpPr>
+        <p:spPr>
+          <a:xfrm xmlns:a="http://schemas.openxmlformats.org/drawingml/2006/main">
+            <a:off x="8934450" y="5238750"/>
+            <a:ext cx="2228850" cy="361950"/>
+          </a:xfrm>
+          <a:prstGeom xmlns:a="http://schemas.openxmlformats.org/drawingml/2006/main" prst="rect">
+            <a:avLst/>
+          </a:prstGeom>
+          <a:noFill xmlns:a="http://schemas.openxmlformats.org/drawingml/2006/main"/>
+          <a:ln xmlns:a="http://schemas.openxmlformats.org/drawingml/2006/main" w="0">
+            <a:noFill/>
+          </a:ln>
+        </p:spPr>
+        <p:txBody>
+          <a:bodyPr xmlns:a="http://schemas.openxmlformats.org/drawingml/2006/main" anchor="ctr">
+            <a:normAutofit fontScale="69608"/>
           </a:bodyPr>
           <a:lstStyle xmlns:a="http://schemas.openxmlformats.org/drawingml/2006/main"/>
           <a:p xmlns:a="http://schemas.openxmlformats.org/drawingml/2006/main">
@@ -7387,7 +7547,7 @@
     </p:spTree>
     <p:extLst>
       <p:ext uri="{BB962C8B-B14F-4D97-AF65-F5344CB8AC3E}">
-        <p14:creationId xmlns:p14="http://schemas.microsoft.com/office/powerpoint/2010/main" val="535824918"/>
+        <p14:creationId xmlns:p14="http://schemas.microsoft.com/office/powerpoint/2010/main" val="1651338549"/>
       </p:ext>
     </p:extLst>
   </p:cSld>
@@ -7418,7 +7578,7 @@
           <p:cNvPr id="33" name="">
             <a:extLst xmlns:a="http://schemas.openxmlformats.org/drawingml/2006/main">
               <a:ext uri="{FF2B5EF4-FFF2-40B4-BE49-F238E27FC236}">
-                <a16:creationId xmlns:a16="http://schemas.microsoft.com/office/drawing/2014/main" id="{A1EB48DB-3388-45B9-8183-454A5B9D21E5}"/>
+                <a16:creationId xmlns:a16="http://schemas.microsoft.com/office/drawing/2014/main" id="{D32EA812-04C7-400F-8DD9-712FEA4FF5E2}"/>
               </a:ext>
             </a:extLst>
           </p:cNvPr>
@@ -7475,7 +7635,7 @@
           <p:cNvPr id="2" name="">
             <a:extLst xmlns:a="http://schemas.openxmlformats.org/drawingml/2006/main">
               <a:ext uri="{FF2B5EF4-FFF2-40B4-BE49-F238E27FC236}">
-                <a16:creationId xmlns:a16="http://schemas.microsoft.com/office/drawing/2014/main" id="{03C0CBF8-9B1C-4B5D-A2EE-FF017D4A28A2}"/>
+                <a16:creationId xmlns:a16="http://schemas.microsoft.com/office/drawing/2014/main" id="{0E09FE9E-43F3-4089-9EED-FACA2935B64B}"/>
               </a:ext>
             </a:extLst>
           </p:cNvPr>
@@ -7532,7 +7692,7 @@
           <p:cNvPr id="3" name="">
             <a:extLst xmlns:a="http://schemas.openxmlformats.org/drawingml/2006/main">
               <a:ext uri="{FF2B5EF4-FFF2-40B4-BE49-F238E27FC236}">
-                <a16:creationId xmlns:a16="http://schemas.microsoft.com/office/drawing/2014/main" id="{777FBD6A-F915-41BC-BDBD-0B9F2BDCE4E5}"/>
+                <a16:creationId xmlns:a16="http://schemas.microsoft.com/office/drawing/2014/main" id="{E91E5706-8721-4B22-A42E-D7F1DC2BCC9A}"/>
               </a:ext>
             </a:extLst>
           </p:cNvPr>
@@ -7564,7 +7724,7 @@
           <p:cNvPr id="4" name="">
             <a:extLst xmlns:a="http://schemas.openxmlformats.org/drawingml/2006/main">
               <a:ext uri="{FF2B5EF4-FFF2-40B4-BE49-F238E27FC236}">
-                <a16:creationId xmlns:a16="http://schemas.microsoft.com/office/drawing/2014/main" id="{B87F737E-7AA3-4EB5-82B9-AB3828C96F33}"/>
+                <a16:creationId xmlns:a16="http://schemas.microsoft.com/office/drawing/2014/main" id="{FD7A8015-72D6-4DAD-A90A-C4DD6D85E3B4}"/>
               </a:ext>
             </a:extLst>
           </p:cNvPr>
@@ -7621,7 +7781,7 @@
           <p:cNvPr id="5" name="">
             <a:extLst xmlns:a="http://schemas.openxmlformats.org/drawingml/2006/main">
               <a:ext uri="{FF2B5EF4-FFF2-40B4-BE49-F238E27FC236}">
-                <a16:creationId xmlns:a16="http://schemas.microsoft.com/office/drawing/2014/main" id="{08C0B05C-9969-4E89-BC09-77E3409D7CA2}"/>
+                <a16:creationId xmlns:a16="http://schemas.microsoft.com/office/drawing/2014/main" id="{A7F1ED9E-0327-4832-AA7C-EEE896AFA51E}"/>
               </a:ext>
             </a:extLst>
           </p:cNvPr>
@@ -7678,7 +7838,7 @@
           <p:cNvPr id="6" name="">
             <a:extLst xmlns:a="http://schemas.openxmlformats.org/drawingml/2006/main">
               <a:ext uri="{FF2B5EF4-FFF2-40B4-BE49-F238E27FC236}">
-                <a16:creationId xmlns:a16="http://schemas.microsoft.com/office/drawing/2014/main" id="{74F90FBC-04E2-481E-98D2-2F743458ED76}"/>
+                <a16:creationId xmlns:a16="http://schemas.microsoft.com/office/drawing/2014/main" id="{CD164C1F-20E4-48C4-B36C-ECE1E2D050D8}"/>
               </a:ext>
             </a:extLst>
           </p:cNvPr>
@@ -7708,7 +7868,7 @@
           <p:cNvPr id="7" name="">
             <a:extLst xmlns:a="http://schemas.openxmlformats.org/drawingml/2006/main">
               <a:ext uri="{FF2B5EF4-FFF2-40B4-BE49-F238E27FC236}">
-                <a16:creationId xmlns:a16="http://schemas.microsoft.com/office/drawing/2014/main" id="{DD4661CB-64BE-4277-9185-0AA1A2B309B9}"/>
+                <a16:creationId xmlns:a16="http://schemas.microsoft.com/office/drawing/2014/main" id="{53425F6D-E33B-4E38-9801-2057C99757E3}"/>
               </a:ext>
             </a:extLst>
           </p:cNvPr>
@@ -7765,7 +7925,7 @@
           <p:cNvPr id="8" name="">
             <a:extLst xmlns:a="http://schemas.openxmlformats.org/drawingml/2006/main">
               <a:ext uri="{FF2B5EF4-FFF2-40B4-BE49-F238E27FC236}">
-                <a16:creationId xmlns:a16="http://schemas.microsoft.com/office/drawing/2014/main" id="{10ED1709-0C93-41C3-AD9E-FC54A688DBE6}"/>
+                <a16:creationId xmlns:a16="http://schemas.microsoft.com/office/drawing/2014/main" id="{D477276F-53D2-4A22-AF57-9DF4D0E3505D}"/>
               </a:ext>
             </a:extLst>
           </p:cNvPr>
@@ -7822,7 +7982,7 @@
           <p:cNvPr id="9" name="">
             <a:extLst xmlns:a="http://schemas.openxmlformats.org/drawingml/2006/main">
               <a:ext uri="{FF2B5EF4-FFF2-40B4-BE49-F238E27FC236}">
-                <a16:creationId xmlns:a16="http://schemas.microsoft.com/office/drawing/2014/main" id="{281F9B8A-BF45-4193-9D97-5E49C24724A0}"/>
+                <a16:creationId xmlns:a16="http://schemas.microsoft.com/office/drawing/2014/main" id="{64565C44-47F0-4BB2-AAEB-73B4C2B469FA}"/>
               </a:ext>
             </a:extLst>
           </p:cNvPr>
@@ -7879,7 +8039,7 @@
           <p:cNvPr id="10" name="">
             <a:extLst xmlns:a="http://schemas.openxmlformats.org/drawingml/2006/main">
               <a:ext uri="{FF2B5EF4-FFF2-40B4-BE49-F238E27FC236}">
-                <a16:creationId xmlns:a16="http://schemas.microsoft.com/office/drawing/2014/main" id="{4B4BB52D-F2FD-4C5A-9DF9-68D9365565E9}"/>
+                <a16:creationId xmlns:a16="http://schemas.microsoft.com/office/drawing/2014/main" id="{9CEDB21C-4B33-4D3B-B53C-B691549FAD35}"/>
               </a:ext>
             </a:extLst>
           </p:cNvPr>
@@ -7911,7 +8071,7 @@
           <p:cNvPr id="11" name="">
             <a:extLst xmlns:a="http://schemas.openxmlformats.org/drawingml/2006/main">
               <a:ext uri="{FF2B5EF4-FFF2-40B4-BE49-F238E27FC236}">
-                <a16:creationId xmlns:a16="http://schemas.microsoft.com/office/drawing/2014/main" id="{050B9B0C-B6BA-410D-971B-883F4D510300}"/>
+                <a16:creationId xmlns:a16="http://schemas.microsoft.com/office/drawing/2014/main" id="{4FDD8B26-5FA5-4421-81FC-B36A14F23F32}"/>
               </a:ext>
             </a:extLst>
           </p:cNvPr>
@@ -7968,7 +8128,7 @@
           <p:cNvPr id="12" name="">
             <a:extLst xmlns:a="http://schemas.openxmlformats.org/drawingml/2006/main">
               <a:ext uri="{FF2B5EF4-FFF2-40B4-BE49-F238E27FC236}">
-                <a16:creationId xmlns:a16="http://schemas.microsoft.com/office/drawing/2014/main" id="{A0EFF7BF-C16E-41A8-A96A-A2B7F4E544C8}"/>
+                <a16:creationId xmlns:a16="http://schemas.microsoft.com/office/drawing/2014/main" id="{6C407FA3-8154-48F9-AFD5-DFAF1E9A08BB}"/>
               </a:ext>
             </a:extLst>
           </p:cNvPr>
@@ -8025,7 +8185,7 @@
           <p:cNvPr id="13" name="">
             <a:extLst xmlns:a="http://schemas.openxmlformats.org/drawingml/2006/main">
               <a:ext uri="{FF2B5EF4-FFF2-40B4-BE49-F238E27FC236}">
-                <a16:creationId xmlns:a16="http://schemas.microsoft.com/office/drawing/2014/main" id="{4BC0E8B5-B2DF-4E74-B062-D43775F6C294}"/>
+                <a16:creationId xmlns:a16="http://schemas.microsoft.com/office/drawing/2014/main" id="{8E12E69A-585E-4392-BA02-40ABB7374D20}"/>
               </a:ext>
             </a:extLst>
           </p:cNvPr>
@@ -8082,7 +8242,7 @@
           <p:cNvPr id="14" name="">
             <a:extLst xmlns:a="http://schemas.openxmlformats.org/drawingml/2006/main">
               <a:ext uri="{FF2B5EF4-FFF2-40B4-BE49-F238E27FC236}">
-                <a16:creationId xmlns:a16="http://schemas.microsoft.com/office/drawing/2014/main" id="{546A44E3-F56C-432D-8983-F595391C051A}"/>
+                <a16:creationId xmlns:a16="http://schemas.microsoft.com/office/drawing/2014/main" id="{C3EC3745-E112-44EB-81B0-ECBC01C61A34}"/>
               </a:ext>
             </a:extLst>
           </p:cNvPr>
@@ -8114,7 +8274,7 @@
           <p:cNvPr id="15" name="">
             <a:extLst xmlns:a="http://schemas.openxmlformats.org/drawingml/2006/main">
               <a:ext uri="{FF2B5EF4-FFF2-40B4-BE49-F238E27FC236}">
-                <a16:creationId xmlns:a16="http://schemas.microsoft.com/office/drawing/2014/main" id="{57B50BFE-BA85-423B-A82C-EF04C9626330}"/>
+                <a16:creationId xmlns:a16="http://schemas.microsoft.com/office/drawing/2014/main" id="{BFF6DC7D-38B1-400F-8A77-B863A7C95955}"/>
               </a:ext>
             </a:extLst>
           </p:cNvPr>
@@ -8171,7 +8331,7 @@
           <p:cNvPr id="16" name="">
             <a:extLst xmlns:a="http://schemas.openxmlformats.org/drawingml/2006/main">
               <a:ext uri="{FF2B5EF4-FFF2-40B4-BE49-F238E27FC236}">
-                <a16:creationId xmlns:a16="http://schemas.microsoft.com/office/drawing/2014/main" id="{9B970EEF-D20E-432A-ABFA-6CE222C7159A}"/>
+                <a16:creationId xmlns:a16="http://schemas.microsoft.com/office/drawing/2014/main" id="{7C747E66-2F8A-4B3B-B862-03D2AF51AB43}"/>
               </a:ext>
             </a:extLst>
           </p:cNvPr>
@@ -8228,7 +8388,7 @@
           <p:cNvPr id="17" name="">
             <a:extLst xmlns:a="http://schemas.openxmlformats.org/drawingml/2006/main">
               <a:ext uri="{FF2B5EF4-FFF2-40B4-BE49-F238E27FC236}">
-                <a16:creationId xmlns:a16="http://schemas.microsoft.com/office/drawing/2014/main" id="{9682D061-E954-4239-8EC1-8EFEA3420738}"/>
+                <a16:creationId xmlns:a16="http://schemas.microsoft.com/office/drawing/2014/main" id="{086E15FA-D8AF-44B7-A8E5-1E96B13D578F}"/>
               </a:ext>
             </a:extLst>
           </p:cNvPr>
@@ -8285,7 +8445,7 @@
           <p:cNvPr id="18" name="">
             <a:extLst xmlns:a="http://schemas.openxmlformats.org/drawingml/2006/main">
               <a:ext uri="{FF2B5EF4-FFF2-40B4-BE49-F238E27FC236}">
-                <a16:creationId xmlns:a16="http://schemas.microsoft.com/office/drawing/2014/main" id="{AB57DA79-B139-48C7-A1F8-EF4F1635E62A}"/>
+                <a16:creationId xmlns:a16="http://schemas.microsoft.com/office/drawing/2014/main" id="{4ED94945-DF1B-47D9-AE56-39E45052AE59}"/>
               </a:ext>
             </a:extLst>
           </p:cNvPr>
@@ -8317,7 +8477,7 @@
           <p:cNvPr id="19" name="">
             <a:extLst xmlns:a="http://schemas.openxmlformats.org/drawingml/2006/main">
               <a:ext uri="{FF2B5EF4-FFF2-40B4-BE49-F238E27FC236}">
-                <a16:creationId xmlns:a16="http://schemas.microsoft.com/office/drawing/2014/main" id="{2D942D47-1A74-4B81-BF5E-D29BA37027F8}"/>
+                <a16:creationId xmlns:a16="http://schemas.microsoft.com/office/drawing/2014/main" id="{ED2ACB1B-7905-4C0C-83AC-0B247C2F41F7}"/>
               </a:ext>
             </a:extLst>
           </p:cNvPr>
@@ -8374,7 +8534,7 @@
           <p:cNvPr id="20" name="">
             <a:extLst xmlns:a="http://schemas.openxmlformats.org/drawingml/2006/main">
               <a:ext uri="{FF2B5EF4-FFF2-40B4-BE49-F238E27FC236}">
-                <a16:creationId xmlns:a16="http://schemas.microsoft.com/office/drawing/2014/main" id="{6B9EE283-8400-4CC1-A04C-9FAA1256CEB1}"/>
+                <a16:creationId xmlns:a16="http://schemas.microsoft.com/office/drawing/2014/main" id="{F78C9FB9-81DD-4555-AB7F-D295CED5FA36}"/>
               </a:ext>
             </a:extLst>
           </p:cNvPr>
@@ -8431,7 +8591,7 @@
           <p:cNvPr id="21" name="">
             <a:extLst xmlns:a="http://schemas.openxmlformats.org/drawingml/2006/main">
               <a:ext uri="{FF2B5EF4-FFF2-40B4-BE49-F238E27FC236}">
-                <a16:creationId xmlns:a16="http://schemas.microsoft.com/office/drawing/2014/main" id="{2CA1EBA6-D680-4506-831E-6DAA6D9D23F0}"/>
+                <a16:creationId xmlns:a16="http://schemas.microsoft.com/office/drawing/2014/main" id="{C8D60B1F-54FD-42B8-BD15-2872EBFCF6F0}"/>
               </a:ext>
             </a:extLst>
           </p:cNvPr>
@@ -8488,7 +8648,7 @@
           <p:cNvPr id="22" name="">
             <a:extLst xmlns:a="http://schemas.openxmlformats.org/drawingml/2006/main">
               <a:ext uri="{FF2B5EF4-FFF2-40B4-BE49-F238E27FC236}">
-                <a16:creationId xmlns:a16="http://schemas.microsoft.com/office/drawing/2014/main" id="{CD6649E1-6964-4F3F-82C7-F8C031DDBAC7}"/>
+                <a16:creationId xmlns:a16="http://schemas.microsoft.com/office/drawing/2014/main" id="{F4F32718-B12E-49DA-B597-9AD7C72922AB}"/>
               </a:ext>
             </a:extLst>
           </p:cNvPr>
@@ -8520,7 +8680,7 @@
           <p:cNvPr id="23" name="">
             <a:extLst xmlns:a="http://schemas.openxmlformats.org/drawingml/2006/main">
               <a:ext uri="{FF2B5EF4-FFF2-40B4-BE49-F238E27FC236}">
-                <a16:creationId xmlns:a16="http://schemas.microsoft.com/office/drawing/2014/main" id="{CC329938-97A3-4FA7-9D54-F6090E9D6E09}"/>
+                <a16:creationId xmlns:a16="http://schemas.microsoft.com/office/drawing/2014/main" id="{EE19FF02-9BE2-4000-A349-4FBE5B366FF8}"/>
               </a:ext>
             </a:extLst>
           </p:cNvPr>
@@ -8577,7 +8737,7 @@
           <p:cNvPr id="24" name="">
             <a:extLst xmlns:a="http://schemas.openxmlformats.org/drawingml/2006/main">
               <a:ext uri="{FF2B5EF4-FFF2-40B4-BE49-F238E27FC236}">
-                <a16:creationId xmlns:a16="http://schemas.microsoft.com/office/drawing/2014/main" id="{D0409589-1D26-45D5-81A8-00C7F9DFE053}"/>
+                <a16:creationId xmlns:a16="http://schemas.microsoft.com/office/drawing/2014/main" id="{FB14A66A-34B0-4784-9890-021511813434}"/>
               </a:ext>
             </a:extLst>
           </p:cNvPr>
@@ -8634,7 +8794,7 @@
           <p:cNvPr id="25" name="">
             <a:extLst xmlns:a="http://schemas.openxmlformats.org/drawingml/2006/main">
               <a:ext uri="{FF2B5EF4-FFF2-40B4-BE49-F238E27FC236}">
-                <a16:creationId xmlns:a16="http://schemas.microsoft.com/office/drawing/2014/main" id="{BCB137C6-47E9-4AA1-BCC3-99DF85A5AF15}"/>
+                <a16:creationId xmlns:a16="http://schemas.microsoft.com/office/drawing/2014/main" id="{2A0A420C-9E6F-4CBB-93BE-268403F35328}"/>
               </a:ext>
             </a:extLst>
           </p:cNvPr>
@@ -8691,7 +8851,7 @@
           <p:cNvPr id="26" name="">
             <a:extLst xmlns:a="http://schemas.openxmlformats.org/drawingml/2006/main">
               <a:ext uri="{FF2B5EF4-FFF2-40B4-BE49-F238E27FC236}">
-                <a16:creationId xmlns:a16="http://schemas.microsoft.com/office/drawing/2014/main" id="{D97EEEA2-F4EE-484D-92AA-C57DE5F43AB3}"/>
+                <a16:creationId xmlns:a16="http://schemas.microsoft.com/office/drawing/2014/main" id="{02DB96F4-4928-4948-9490-D9458918C542}"/>
               </a:ext>
             </a:extLst>
           </p:cNvPr>
@@ -8723,7 +8883,7 @@
           <p:cNvPr id="27" name="">
             <a:extLst xmlns:a="http://schemas.openxmlformats.org/drawingml/2006/main">
               <a:ext uri="{FF2B5EF4-FFF2-40B4-BE49-F238E27FC236}">
-                <a16:creationId xmlns:a16="http://schemas.microsoft.com/office/drawing/2014/main" id="{F455AF67-41E4-4411-84E8-D4A00738D378}"/>
+                <a16:creationId xmlns:a16="http://schemas.microsoft.com/office/drawing/2014/main" id="{0D539203-4E65-4812-8E07-EEF0C6BF0B4D}"/>
               </a:ext>
             </a:extLst>
           </p:cNvPr>
@@ -8780,7 +8940,7 @@
           <p:cNvPr id="28" name="">
             <a:extLst xmlns:a="http://schemas.openxmlformats.org/drawingml/2006/main">
               <a:ext uri="{FF2B5EF4-FFF2-40B4-BE49-F238E27FC236}">
-                <a16:creationId xmlns:a16="http://schemas.microsoft.com/office/drawing/2014/main" id="{F781E07C-FDAF-4E3F-9C8E-3CA7F4E9C79C}"/>
+                <a16:creationId xmlns:a16="http://schemas.microsoft.com/office/drawing/2014/main" id="{4E018255-ADEC-47D5-9F58-C0F943C6B57B}"/>
               </a:ext>
             </a:extLst>
           </p:cNvPr>
@@ -8837,7 +8997,7 @@
           <p:cNvPr id="29" name="">
             <a:extLst xmlns:a="http://schemas.openxmlformats.org/drawingml/2006/main">
               <a:ext uri="{FF2B5EF4-FFF2-40B4-BE49-F238E27FC236}">
-                <a16:creationId xmlns:a16="http://schemas.microsoft.com/office/drawing/2014/main" id="{87EF0974-C5DF-460A-BBC7-C926ED7E879B}"/>
+                <a16:creationId xmlns:a16="http://schemas.microsoft.com/office/drawing/2014/main" id="{2C5D1F43-52F2-47C9-A307-DF36C3E3271E}"/>
               </a:ext>
             </a:extLst>
           </p:cNvPr>
@@ -8894,7 +9054,7 @@
           <p:cNvPr id="30" name="">
             <a:extLst xmlns:a="http://schemas.openxmlformats.org/drawingml/2006/main">
               <a:ext uri="{FF2B5EF4-FFF2-40B4-BE49-F238E27FC236}">
-                <a16:creationId xmlns:a16="http://schemas.microsoft.com/office/drawing/2014/main" id="{3A11F4AC-77D5-43F0-A76F-D0F1F0B9E1C2}"/>
+                <a16:creationId xmlns:a16="http://schemas.microsoft.com/office/drawing/2014/main" id="{40DF9B92-D62E-426D-A3CB-EBCE6E2B0DC0}"/>
               </a:ext>
             </a:extLst>
           </p:cNvPr>
@@ -8926,7 +9086,7 @@
           <p:cNvPr id="31" name="">
             <a:extLst xmlns:a="http://schemas.openxmlformats.org/drawingml/2006/main">
               <a:ext uri="{FF2B5EF4-FFF2-40B4-BE49-F238E27FC236}">
-                <a16:creationId xmlns:a16="http://schemas.microsoft.com/office/drawing/2014/main" id="{B9F1B47D-3999-491D-A94F-AB6F3D7E8783}"/>
+                <a16:creationId xmlns:a16="http://schemas.microsoft.com/office/drawing/2014/main" id="{EC21FCBF-79BF-4084-9269-60519834B35B}"/>
               </a:ext>
             </a:extLst>
           </p:cNvPr>
@@ -8983,7 +9143,7 @@
           <p:cNvPr id="32" name="">
             <a:extLst xmlns:a="http://schemas.openxmlformats.org/drawingml/2006/main">
               <a:ext uri="{FF2B5EF4-FFF2-40B4-BE49-F238E27FC236}">
-                <a16:creationId xmlns:a16="http://schemas.microsoft.com/office/drawing/2014/main" id="{8ABF138B-F331-4325-968D-A9D5CF2EEB7F}"/>
+                <a16:creationId xmlns:a16="http://schemas.microsoft.com/office/drawing/2014/main" id="{1775877E-7850-4D8F-BFBF-3D1E01097738}"/>
               </a:ext>
             </a:extLst>
           </p:cNvPr>
@@ -9038,7 +9198,7 @@
     </p:spTree>
     <p:extLst>
       <p:ext uri="{BB962C8B-B14F-4D97-AF65-F5344CB8AC3E}">
-        <p14:creationId xmlns:p14="http://schemas.microsoft.com/office/powerpoint/2010/main" val="696876907"/>
+        <p14:creationId xmlns:p14="http://schemas.microsoft.com/office/powerpoint/2010/main" val="2647403"/>
       </p:ext>
     </p:extLst>
   </p:cSld>
@@ -9069,7 +9229,7 @@
           <p:cNvPr id="40" name="">
             <a:extLst xmlns:a="http://schemas.openxmlformats.org/drawingml/2006/main">
               <a:ext uri="{FF2B5EF4-FFF2-40B4-BE49-F238E27FC236}">
-                <a16:creationId xmlns:a16="http://schemas.microsoft.com/office/drawing/2014/main" id="{7E230306-F933-40BF-BAE1-FE9EB53B166E}"/>
+                <a16:creationId xmlns:a16="http://schemas.microsoft.com/office/drawing/2014/main" id="{6C955919-341E-49C0-BFC7-98D3A7BFC4FF}"/>
               </a:ext>
             </a:extLst>
           </p:cNvPr>
@@ -9126,7 +9286,7 @@
           <p:cNvPr id="2" name="">
             <a:extLst xmlns:a="http://schemas.openxmlformats.org/drawingml/2006/main">
               <a:ext uri="{FF2B5EF4-FFF2-40B4-BE49-F238E27FC236}">
-                <a16:creationId xmlns:a16="http://schemas.microsoft.com/office/drawing/2014/main" id="{A291CAFE-7513-4718-9BD6-8F3E9A266CFD}"/>
+                <a16:creationId xmlns:a16="http://schemas.microsoft.com/office/drawing/2014/main" id="{A1A65EDB-B6DD-49BA-8F0D-8F1B7E8F0D19}"/>
               </a:ext>
             </a:extLst>
           </p:cNvPr>
@@ -9183,7 +9343,7 @@
           <p:cNvPr id="3" name="">
             <a:extLst xmlns:a="http://schemas.openxmlformats.org/drawingml/2006/main">
               <a:ext uri="{FF2B5EF4-FFF2-40B4-BE49-F238E27FC236}">
-                <a16:creationId xmlns:a16="http://schemas.microsoft.com/office/drawing/2014/main" id="{73C60BEB-ADD1-4C12-9214-C480FDC6E080}"/>
+                <a16:creationId xmlns:a16="http://schemas.microsoft.com/office/drawing/2014/main" id="{F3EACB5C-9195-454D-91A2-B0D61CFDCEEC}"/>
               </a:ext>
             </a:extLst>
           </p:cNvPr>
@@ -9215,7 +9375,7 @@
           <p:cNvPr id="4" name="">
             <a:extLst xmlns:a="http://schemas.openxmlformats.org/drawingml/2006/main">
               <a:ext uri="{FF2B5EF4-FFF2-40B4-BE49-F238E27FC236}">
-                <a16:creationId xmlns:a16="http://schemas.microsoft.com/office/drawing/2014/main" id="{54DEFF79-60E2-4F3D-87FE-A9B17D0F3C0B}"/>
+                <a16:creationId xmlns:a16="http://schemas.microsoft.com/office/drawing/2014/main" id="{41C913E5-3275-44F6-8350-ED1BFCB8FE89}"/>
               </a:ext>
             </a:extLst>
           </p:cNvPr>
@@ -9272,7 +9432,7 @@
           <p:cNvPr id="5" name="">
             <a:extLst xmlns:a="http://schemas.openxmlformats.org/drawingml/2006/main">
               <a:ext uri="{FF2B5EF4-FFF2-40B4-BE49-F238E27FC236}">
-                <a16:creationId xmlns:a16="http://schemas.microsoft.com/office/drawing/2014/main" id="{EE0D8CAA-703C-4BA9-8721-26534E43C878}"/>
+                <a16:creationId xmlns:a16="http://schemas.microsoft.com/office/drawing/2014/main" id="{3DC731AF-34EC-40D8-A411-CEAA4F98DF05}"/>
               </a:ext>
             </a:extLst>
           </p:cNvPr>
@@ -9329,7 +9489,7 @@
           <p:cNvPr id="6" name="">
             <a:extLst xmlns:a="http://schemas.openxmlformats.org/drawingml/2006/main">
               <a:ext uri="{FF2B5EF4-FFF2-40B4-BE49-F238E27FC236}">
-                <a16:creationId xmlns:a16="http://schemas.microsoft.com/office/drawing/2014/main" id="{93655BCE-6629-4113-B513-8ECBD08B6A29}"/>
+                <a16:creationId xmlns:a16="http://schemas.microsoft.com/office/drawing/2014/main" id="{25898391-4388-4A39-BAB7-45C9C355A493}"/>
               </a:ext>
             </a:extLst>
           </p:cNvPr>
@@ -9386,7 +9546,7 @@
           <p:cNvPr id="7" name="">
             <a:extLst xmlns:a="http://schemas.openxmlformats.org/drawingml/2006/main">
               <a:ext uri="{FF2B5EF4-FFF2-40B4-BE49-F238E27FC236}">
-                <a16:creationId xmlns:a16="http://schemas.microsoft.com/office/drawing/2014/main" id="{D943AA40-1FFF-417E-9C73-2F91887E8B31}"/>
+                <a16:creationId xmlns:a16="http://schemas.microsoft.com/office/drawing/2014/main" id="{319ADE3B-D144-43C5-82E6-C87DA5966DA6}"/>
               </a:ext>
             </a:extLst>
           </p:cNvPr>
@@ -9420,7 +9580,7 @@
           <p:cNvPr id="8" name="">
             <a:extLst xmlns:a="http://schemas.openxmlformats.org/drawingml/2006/main">
               <a:ext uri="{FF2B5EF4-FFF2-40B4-BE49-F238E27FC236}">
-                <a16:creationId xmlns:a16="http://schemas.microsoft.com/office/drawing/2014/main" id="{743B31DE-2C4A-428D-9920-58EC27555E4F}"/>
+                <a16:creationId xmlns:a16="http://schemas.microsoft.com/office/drawing/2014/main" id="{5EED9653-348D-41F9-8BFB-BCE26A22A03C}"/>
               </a:ext>
             </a:extLst>
           </p:cNvPr>
@@ -9477,7 +9637,7 @@
           <p:cNvPr id="9" name="">
             <a:extLst xmlns:a="http://schemas.openxmlformats.org/drawingml/2006/main">
               <a:ext uri="{FF2B5EF4-FFF2-40B4-BE49-F238E27FC236}">
-                <a16:creationId xmlns:a16="http://schemas.microsoft.com/office/drawing/2014/main" id="{51C186DA-0557-4C09-93ED-2C0FE0799380}"/>
+                <a16:creationId xmlns:a16="http://schemas.microsoft.com/office/drawing/2014/main" id="{4E428447-0BC5-4FC0-BD11-BC39DBA8501C}"/>
               </a:ext>
             </a:extLst>
           </p:cNvPr>
@@ -9534,7 +9694,7 @@
           <p:cNvPr id="10" name="">
             <a:extLst xmlns:a="http://schemas.openxmlformats.org/drawingml/2006/main">
               <a:ext uri="{FF2B5EF4-FFF2-40B4-BE49-F238E27FC236}">
-                <a16:creationId xmlns:a16="http://schemas.microsoft.com/office/drawing/2014/main" id="{F45F55A3-FD07-49D2-B8E0-F55D68C72FE8}"/>
+                <a16:creationId xmlns:a16="http://schemas.microsoft.com/office/drawing/2014/main" id="{A045F3D4-CF6D-4E46-BDA6-9DCD1393EFBB}"/>
               </a:ext>
             </a:extLst>
           </p:cNvPr>
@@ -9591,7 +9751,7 @@
           <p:cNvPr id="11" name="">
             <a:extLst xmlns:a="http://schemas.openxmlformats.org/drawingml/2006/main">
               <a:ext uri="{FF2B5EF4-FFF2-40B4-BE49-F238E27FC236}">
-                <a16:creationId xmlns:a16="http://schemas.microsoft.com/office/drawing/2014/main" id="{890FD26B-1A6A-4C6D-8712-3EDA9BA7E218}"/>
+                <a16:creationId xmlns:a16="http://schemas.microsoft.com/office/drawing/2014/main" id="{3F7009B8-8CA0-498C-B487-3A38AF2E48C6}"/>
               </a:ext>
             </a:extLst>
           </p:cNvPr>
@@ -9625,7 +9785,7 @@
           <p:cNvPr id="12" name="">
             <a:extLst xmlns:a="http://schemas.openxmlformats.org/drawingml/2006/main">
               <a:ext uri="{FF2B5EF4-FFF2-40B4-BE49-F238E27FC236}">
-                <a16:creationId xmlns:a16="http://schemas.microsoft.com/office/drawing/2014/main" id="{1199F717-01C6-4869-82FF-637A08213A36}"/>
+                <a16:creationId xmlns:a16="http://schemas.microsoft.com/office/drawing/2014/main" id="{ABBA31BC-EAF5-429B-AC90-52052E96B915}"/>
               </a:ext>
             </a:extLst>
           </p:cNvPr>
@@ -9682,7 +9842,7 @@
           <p:cNvPr id="13" name="">
             <a:extLst xmlns:a="http://schemas.openxmlformats.org/drawingml/2006/main">
               <a:ext uri="{FF2B5EF4-FFF2-40B4-BE49-F238E27FC236}">
-                <a16:creationId xmlns:a16="http://schemas.microsoft.com/office/drawing/2014/main" id="{8BEEBDDF-7A48-4FE0-83DD-A9BF2D067998}"/>
+                <a16:creationId xmlns:a16="http://schemas.microsoft.com/office/drawing/2014/main" id="{08979037-5E4E-47D7-8A01-23ED61959A95}"/>
               </a:ext>
             </a:extLst>
           </p:cNvPr>
@@ -9739,7 +9899,7 @@
           <p:cNvPr id="14" name="">
             <a:extLst xmlns:a="http://schemas.openxmlformats.org/drawingml/2006/main">
               <a:ext uri="{FF2B5EF4-FFF2-40B4-BE49-F238E27FC236}">
-                <a16:creationId xmlns:a16="http://schemas.microsoft.com/office/drawing/2014/main" id="{126BE85B-A846-4492-AF2E-86907E587701}"/>
+                <a16:creationId xmlns:a16="http://schemas.microsoft.com/office/drawing/2014/main" id="{5E7FCA7B-4C43-40A3-BA04-2F2FFD0821ED}"/>
               </a:ext>
             </a:extLst>
           </p:cNvPr>
@@ -9796,7 +9956,7 @@
           <p:cNvPr id="15" name="">
             <a:extLst xmlns:a="http://schemas.openxmlformats.org/drawingml/2006/main">
               <a:ext uri="{FF2B5EF4-FFF2-40B4-BE49-F238E27FC236}">
-                <a16:creationId xmlns:a16="http://schemas.microsoft.com/office/drawing/2014/main" id="{26ECE7F4-35D0-4509-A2FA-9143AE13284A}"/>
+                <a16:creationId xmlns:a16="http://schemas.microsoft.com/office/drawing/2014/main" id="{42368FB4-F593-4CD2-841D-4FD1D458D14B}"/>
               </a:ext>
             </a:extLst>
           </p:cNvPr>
@@ -9830,7 +9990,7 @@
           <p:cNvPr id="16" name="">
             <a:extLst xmlns:a="http://schemas.openxmlformats.org/drawingml/2006/main">
               <a:ext uri="{FF2B5EF4-FFF2-40B4-BE49-F238E27FC236}">
-                <a16:creationId xmlns:a16="http://schemas.microsoft.com/office/drawing/2014/main" id="{ED412F67-92E6-47F0-AB1F-4DF41FFAEDB6}"/>
+                <a16:creationId xmlns:a16="http://schemas.microsoft.com/office/drawing/2014/main" id="{C6A20836-0766-47C8-A70A-9A2C7915EC02}"/>
               </a:ext>
             </a:extLst>
           </p:cNvPr>
@@ -9887,7 +10047,7 @@
           <p:cNvPr id="17" name="">
             <a:extLst xmlns:a="http://schemas.openxmlformats.org/drawingml/2006/main">
               <a:ext uri="{FF2B5EF4-FFF2-40B4-BE49-F238E27FC236}">
-                <a16:creationId xmlns:a16="http://schemas.microsoft.com/office/drawing/2014/main" id="{0429D3DF-BB4E-45BA-863B-86EA7703470E}"/>
+                <a16:creationId xmlns:a16="http://schemas.microsoft.com/office/drawing/2014/main" id="{1FDAD25F-855A-4032-A8F1-DBDF139DCE5E}"/>
               </a:ext>
             </a:extLst>
           </p:cNvPr>
@@ -9944,7 +10104,7 @@
           <p:cNvPr id="18" name="">
             <a:extLst xmlns:a="http://schemas.openxmlformats.org/drawingml/2006/main">
               <a:ext uri="{FF2B5EF4-FFF2-40B4-BE49-F238E27FC236}">
-                <a16:creationId xmlns:a16="http://schemas.microsoft.com/office/drawing/2014/main" id="{E9B992CF-EBB9-44E3-8516-B8E70EA7BE84}"/>
+                <a16:creationId xmlns:a16="http://schemas.microsoft.com/office/drawing/2014/main" id="{6F3AA43C-C657-4557-AE91-9C01E39F7442}"/>
               </a:ext>
             </a:extLst>
           </p:cNvPr>
@@ -10001,7 +10161,7 @@
           <p:cNvPr id="19" name="">
             <a:extLst xmlns:a="http://schemas.openxmlformats.org/drawingml/2006/main">
               <a:ext uri="{FF2B5EF4-FFF2-40B4-BE49-F238E27FC236}">
-                <a16:creationId xmlns:a16="http://schemas.microsoft.com/office/drawing/2014/main" id="{D33BD598-6D2E-402E-A7B1-A668EBD11F19}"/>
+                <a16:creationId xmlns:a16="http://schemas.microsoft.com/office/drawing/2014/main" id="{B6A803A4-BD0E-40AD-BB0B-80FE03FBD363}"/>
               </a:ext>
             </a:extLst>
           </p:cNvPr>
@@ -10033,7 +10193,7 @@
           <p:cNvPr id="20" name="">
             <a:extLst xmlns:a="http://schemas.openxmlformats.org/drawingml/2006/main">
               <a:ext uri="{FF2B5EF4-FFF2-40B4-BE49-F238E27FC236}">
-                <a16:creationId xmlns:a16="http://schemas.microsoft.com/office/drawing/2014/main" id="{DF1AA9B4-35E6-4CCA-BB58-81351392CF2A}"/>
+                <a16:creationId xmlns:a16="http://schemas.microsoft.com/office/drawing/2014/main" id="{96108642-7D91-4589-9C1D-83127D746F82}"/>
               </a:ext>
             </a:extLst>
           </p:cNvPr>
@@ -10090,7 +10250,7 @@
           <p:cNvPr id="21" name="">
             <a:extLst xmlns:a="http://schemas.openxmlformats.org/drawingml/2006/main">
               <a:ext uri="{FF2B5EF4-FFF2-40B4-BE49-F238E27FC236}">
-                <a16:creationId xmlns:a16="http://schemas.microsoft.com/office/drawing/2014/main" id="{DF31BA23-3C27-4F7C-8DB6-7B7D0F9EF213}"/>
+                <a16:creationId xmlns:a16="http://schemas.microsoft.com/office/drawing/2014/main" id="{DEC697FB-79E7-4D43-9037-2512A7C4CCC1}"/>
               </a:ext>
             </a:extLst>
           </p:cNvPr>
@@ -10147,7 +10307,7 @@
           <p:cNvPr id="22" name="">
             <a:extLst xmlns:a="http://schemas.openxmlformats.org/drawingml/2006/main">
               <a:ext uri="{FF2B5EF4-FFF2-40B4-BE49-F238E27FC236}">
-                <a16:creationId xmlns:a16="http://schemas.microsoft.com/office/drawing/2014/main" id="{8661E394-5E79-4342-8963-4672DF6A754D}"/>
+                <a16:creationId xmlns:a16="http://schemas.microsoft.com/office/drawing/2014/main" id="{DD772957-EEEE-4D89-B423-64718A23764F}"/>
               </a:ext>
             </a:extLst>
           </p:cNvPr>
@@ -10204,7 +10364,7 @@
           <p:cNvPr id="23" name="">
             <a:extLst xmlns:a="http://schemas.openxmlformats.org/drawingml/2006/main">
               <a:ext uri="{FF2B5EF4-FFF2-40B4-BE49-F238E27FC236}">
-                <a16:creationId xmlns:a16="http://schemas.microsoft.com/office/drawing/2014/main" id="{9AA1A324-96B8-406B-AA60-6E76B4BAF9D6}"/>
+                <a16:creationId xmlns:a16="http://schemas.microsoft.com/office/drawing/2014/main" id="{76E9E70B-82F2-46E0-8D73-3E14CA430153}"/>
               </a:ext>
             </a:extLst>
           </p:cNvPr>
@@ -10236,7 +10396,7 @@
           <p:cNvPr id="24" name="">
             <a:extLst xmlns:a="http://schemas.openxmlformats.org/drawingml/2006/main">
               <a:ext uri="{FF2B5EF4-FFF2-40B4-BE49-F238E27FC236}">
-                <a16:creationId xmlns:a16="http://schemas.microsoft.com/office/drawing/2014/main" id="{F34533BF-E109-4D24-968B-1DCD5C0782B0}"/>
+                <a16:creationId xmlns:a16="http://schemas.microsoft.com/office/drawing/2014/main" id="{0F82248A-2FF7-497D-81EA-E2904D7276F6}"/>
               </a:ext>
             </a:extLst>
           </p:cNvPr>
@@ -10293,7 +10453,7 @@
           <p:cNvPr id="25" name="">
             <a:extLst xmlns:a="http://schemas.openxmlformats.org/drawingml/2006/main">
               <a:ext uri="{FF2B5EF4-FFF2-40B4-BE49-F238E27FC236}">
-                <a16:creationId xmlns:a16="http://schemas.microsoft.com/office/drawing/2014/main" id="{6FD348C6-2819-4343-BFCF-E815028C8A7A}"/>
+                <a16:creationId xmlns:a16="http://schemas.microsoft.com/office/drawing/2014/main" id="{3480697A-99DF-42DA-90D6-F6BC94DDF2E0}"/>
               </a:ext>
             </a:extLst>
           </p:cNvPr>
@@ -10350,7 +10510,7 @@
           <p:cNvPr id="26" name="">
             <a:extLst xmlns:a="http://schemas.openxmlformats.org/drawingml/2006/main">
               <a:ext uri="{FF2B5EF4-FFF2-40B4-BE49-F238E27FC236}">
-                <a16:creationId xmlns:a16="http://schemas.microsoft.com/office/drawing/2014/main" id="{39403F08-B785-4BA9-832D-B3225537D266}"/>
+                <a16:creationId xmlns:a16="http://schemas.microsoft.com/office/drawing/2014/main" id="{058C8B99-D31E-498D-9A96-369E72B5EB08}"/>
               </a:ext>
             </a:extLst>
           </p:cNvPr>
@@ -10407,7 +10567,7 @@
           <p:cNvPr id="27" name="">
             <a:extLst xmlns:a="http://schemas.openxmlformats.org/drawingml/2006/main">
               <a:ext uri="{FF2B5EF4-FFF2-40B4-BE49-F238E27FC236}">
-                <a16:creationId xmlns:a16="http://schemas.microsoft.com/office/drawing/2014/main" id="{1E49485E-CDA2-4AC6-9D06-769996115DE9}"/>
+                <a16:creationId xmlns:a16="http://schemas.microsoft.com/office/drawing/2014/main" id="{412F445F-0DE5-46EE-B9E4-0345AE52E530}"/>
               </a:ext>
             </a:extLst>
           </p:cNvPr>
@@ -10439,7 +10599,7 @@
           <p:cNvPr id="28" name="">
             <a:extLst xmlns:a="http://schemas.openxmlformats.org/drawingml/2006/main">
               <a:ext uri="{FF2B5EF4-FFF2-40B4-BE49-F238E27FC236}">
-                <a16:creationId xmlns:a16="http://schemas.microsoft.com/office/drawing/2014/main" id="{EC6436AB-5579-4A10-B9FA-DADF466DF868}"/>
+                <a16:creationId xmlns:a16="http://schemas.microsoft.com/office/drawing/2014/main" id="{BB25B735-ED66-4C16-B821-973DE76DA831}"/>
               </a:ext>
             </a:extLst>
           </p:cNvPr>
@@ -10496,7 +10656,7 @@
           <p:cNvPr id="29" name="">
             <a:extLst xmlns:a="http://schemas.openxmlformats.org/drawingml/2006/main">
               <a:ext uri="{FF2B5EF4-FFF2-40B4-BE49-F238E27FC236}">
-                <a16:creationId xmlns:a16="http://schemas.microsoft.com/office/drawing/2014/main" id="{C2500960-E766-44C3-93AA-8CDDC42806A3}"/>
+                <a16:creationId xmlns:a16="http://schemas.microsoft.com/office/drawing/2014/main" id="{746ABA2E-8CCA-4900-BE41-7FF4FCF03298}"/>
               </a:ext>
             </a:extLst>
           </p:cNvPr>
@@ -10553,7 +10713,7 @@
           <p:cNvPr id="30" name="">
             <a:extLst xmlns:a="http://schemas.openxmlformats.org/drawingml/2006/main">
               <a:ext uri="{FF2B5EF4-FFF2-40B4-BE49-F238E27FC236}">
-                <a16:creationId xmlns:a16="http://schemas.microsoft.com/office/drawing/2014/main" id="{E391D49F-2CC8-4E6B-8805-FE8D23392C61}"/>
+                <a16:creationId xmlns:a16="http://schemas.microsoft.com/office/drawing/2014/main" id="{62746010-044C-4D34-9E90-BC5EDAADA31B}"/>
               </a:ext>
             </a:extLst>
           </p:cNvPr>
@@ -10610,7 +10770,7 @@
           <p:cNvPr id="31" name="">
             <a:extLst xmlns:a="http://schemas.openxmlformats.org/drawingml/2006/main">
               <a:ext uri="{FF2B5EF4-FFF2-40B4-BE49-F238E27FC236}">
-                <a16:creationId xmlns:a16="http://schemas.microsoft.com/office/drawing/2014/main" id="{DED30063-54C8-48C7-8730-994DB7E148A8}"/>
+                <a16:creationId xmlns:a16="http://schemas.microsoft.com/office/drawing/2014/main" id="{11CA2313-2064-4B13-9092-9C04479FE582}"/>
               </a:ext>
             </a:extLst>
           </p:cNvPr>
@@ -10642,7 +10802,7 @@
           <p:cNvPr id="32" name="">
             <a:extLst xmlns:a="http://schemas.openxmlformats.org/drawingml/2006/main">
               <a:ext uri="{FF2B5EF4-FFF2-40B4-BE49-F238E27FC236}">
-                <a16:creationId xmlns:a16="http://schemas.microsoft.com/office/drawing/2014/main" id="{EC079F08-C489-4F6F-88CB-838FC98C0378}"/>
+                <a16:creationId xmlns:a16="http://schemas.microsoft.com/office/drawing/2014/main" id="{661C1F80-376B-42E8-9108-9D42AC43DB46}"/>
               </a:ext>
             </a:extLst>
           </p:cNvPr>
@@ -10699,7 +10859,7 @@
           <p:cNvPr id="33" name="">
             <a:extLst xmlns:a="http://schemas.openxmlformats.org/drawingml/2006/main">
               <a:ext uri="{FF2B5EF4-FFF2-40B4-BE49-F238E27FC236}">
-                <a16:creationId xmlns:a16="http://schemas.microsoft.com/office/drawing/2014/main" id="{A427B279-DD51-4BD8-B473-5032C2C081B8}"/>
+                <a16:creationId xmlns:a16="http://schemas.microsoft.com/office/drawing/2014/main" id="{2929FECB-5B3C-4507-B5C9-C3E5B24CF201}"/>
               </a:ext>
             </a:extLst>
           </p:cNvPr>
@@ -10756,7 +10916,7 @@
           <p:cNvPr id="34" name="">
             <a:extLst xmlns:a="http://schemas.openxmlformats.org/drawingml/2006/main">
               <a:ext uri="{FF2B5EF4-FFF2-40B4-BE49-F238E27FC236}">
-                <a16:creationId xmlns:a16="http://schemas.microsoft.com/office/drawing/2014/main" id="{0BBA3BB1-E42D-40F1-A326-D434AEA1462D}"/>
+                <a16:creationId xmlns:a16="http://schemas.microsoft.com/office/drawing/2014/main" id="{72CA8FA6-56AD-4C3D-8D7D-3C3853289F6F}"/>
               </a:ext>
             </a:extLst>
           </p:cNvPr>
@@ -10813,7 +10973,7 @@
           <p:cNvPr id="35" name="">
             <a:extLst xmlns:a="http://schemas.openxmlformats.org/drawingml/2006/main">
               <a:ext uri="{FF2B5EF4-FFF2-40B4-BE49-F238E27FC236}">
-                <a16:creationId xmlns:a16="http://schemas.microsoft.com/office/drawing/2014/main" id="{10C90455-DAC0-4820-AA11-FE4A14CF77FA}"/>
+                <a16:creationId xmlns:a16="http://schemas.microsoft.com/office/drawing/2014/main" id="{3B02F7D0-CDFB-48E1-BB90-6B3D2CF0FE86}"/>
               </a:ext>
             </a:extLst>
           </p:cNvPr>
@@ -10843,7 +11003,7 @@
           <p:cNvPr id="36" name="">
             <a:extLst xmlns:a="http://schemas.openxmlformats.org/drawingml/2006/main">
               <a:ext uri="{FF2B5EF4-FFF2-40B4-BE49-F238E27FC236}">
-                <a16:creationId xmlns:a16="http://schemas.microsoft.com/office/drawing/2014/main" id="{B77128B6-4AE6-46F7-AC3F-55223FC1A2A0}"/>
+                <a16:creationId xmlns:a16="http://schemas.microsoft.com/office/drawing/2014/main" id="{EB3C3122-3046-4F92-8CB1-56A71E5B1E64}"/>
               </a:ext>
             </a:extLst>
           </p:cNvPr>
@@ -10900,7 +11060,7 @@
           <p:cNvPr id="37" name="">
             <a:extLst xmlns:a="http://schemas.openxmlformats.org/drawingml/2006/main">
               <a:ext uri="{FF2B5EF4-FFF2-40B4-BE49-F238E27FC236}">
-                <a16:creationId xmlns:a16="http://schemas.microsoft.com/office/drawing/2014/main" id="{EE104A90-5EEF-4D3B-B6BC-C9621734C9D2}"/>
+                <a16:creationId xmlns:a16="http://schemas.microsoft.com/office/drawing/2014/main" id="{679E2695-D6F9-4EDB-ABE2-C63C59AA3907}"/>
               </a:ext>
             </a:extLst>
           </p:cNvPr>
@@ -10957,7 +11117,7 @@
           <p:cNvPr id="38" name="">
             <a:extLst xmlns:a="http://schemas.openxmlformats.org/drawingml/2006/main">
               <a:ext uri="{FF2B5EF4-FFF2-40B4-BE49-F238E27FC236}">
-                <a16:creationId xmlns:a16="http://schemas.microsoft.com/office/drawing/2014/main" id="{66DFC6F2-97AF-4D12-BDF8-6E11D64B8DE3}"/>
+                <a16:creationId xmlns:a16="http://schemas.microsoft.com/office/drawing/2014/main" id="{0D0673AF-61C9-453B-9358-FFB2DD322E74}"/>
               </a:ext>
             </a:extLst>
           </p:cNvPr>
@@ -11014,7 +11174,7 @@
           <p:cNvPr id="39" name="">
             <a:extLst xmlns:a="http://schemas.openxmlformats.org/drawingml/2006/main">
               <a:ext uri="{FF2B5EF4-FFF2-40B4-BE49-F238E27FC236}">
-                <a16:creationId xmlns:a16="http://schemas.microsoft.com/office/drawing/2014/main" id="{14DB572A-1965-488A-A437-B0E0088976F3}"/>
+                <a16:creationId xmlns:a16="http://schemas.microsoft.com/office/drawing/2014/main" id="{D8B62F59-C31E-4ADA-ABB3-C6F2B5260268}"/>
               </a:ext>
             </a:extLst>
           </p:cNvPr>
@@ -11069,7 +11229,7 @@
     </p:spTree>
     <p:extLst>
       <p:ext uri="{BB962C8B-B14F-4D97-AF65-F5344CB8AC3E}">
-        <p14:creationId xmlns:p14="http://schemas.microsoft.com/office/powerpoint/2010/main" val="1952398467"/>
+        <p14:creationId xmlns:p14="http://schemas.microsoft.com/office/powerpoint/2010/main" val="1901360165"/>
       </p:ext>
     </p:extLst>
   </p:cSld>
@@ -11100,7 +11260,7 @@
           <p:cNvPr id="24" name="">
             <a:extLst xmlns:a="http://schemas.openxmlformats.org/drawingml/2006/main">
               <a:ext uri="{FF2B5EF4-FFF2-40B4-BE49-F238E27FC236}">
-                <a16:creationId xmlns:a16="http://schemas.microsoft.com/office/drawing/2014/main" id="{0C44B89B-4A4C-47D2-A8DE-D9F9166A8228}"/>
+                <a16:creationId xmlns:a16="http://schemas.microsoft.com/office/drawing/2014/main" id="{39565305-CB14-46D9-89E7-AC3BFF73998F}"/>
               </a:ext>
             </a:extLst>
           </p:cNvPr>
@@ -11157,7 +11317,7 @@
           <p:cNvPr id="2" name="">
             <a:extLst xmlns:a="http://schemas.openxmlformats.org/drawingml/2006/main">
               <a:ext uri="{FF2B5EF4-FFF2-40B4-BE49-F238E27FC236}">
-                <a16:creationId xmlns:a16="http://schemas.microsoft.com/office/drawing/2014/main" id="{D9337BCE-B526-45ED-B308-7ED521996A4D}"/>
+                <a16:creationId xmlns:a16="http://schemas.microsoft.com/office/drawing/2014/main" id="{983192C9-F86A-486D-B5C8-E4BA4EB3CC4E}"/>
               </a:ext>
             </a:extLst>
           </p:cNvPr>
@@ -11214,7 +11374,7 @@
           <p:cNvPr id="3" name="">
             <a:extLst xmlns:a="http://schemas.openxmlformats.org/drawingml/2006/main">
               <a:ext uri="{FF2B5EF4-FFF2-40B4-BE49-F238E27FC236}">
-                <a16:creationId xmlns:a16="http://schemas.microsoft.com/office/drawing/2014/main" id="{6E313706-FD7D-4533-9FD1-AA901F08419F}"/>
+                <a16:creationId xmlns:a16="http://schemas.microsoft.com/office/drawing/2014/main" id="{9F6451DB-E21F-49CE-8CF5-9AEF54AC498A}"/>
               </a:ext>
             </a:extLst>
           </p:cNvPr>
@@ -11246,7 +11406,7 @@
           <p:cNvPr id="4" name="">
             <a:extLst xmlns:a="http://schemas.openxmlformats.org/drawingml/2006/main">
               <a:ext uri="{FF2B5EF4-FFF2-40B4-BE49-F238E27FC236}">
-                <a16:creationId xmlns:a16="http://schemas.microsoft.com/office/drawing/2014/main" id="{63037FD6-9999-4F8B-A610-1119C51E6D43}"/>
+                <a16:creationId xmlns:a16="http://schemas.microsoft.com/office/drawing/2014/main" id="{E1CBF66C-F8BB-411E-973B-873D229C1EA6}"/>
               </a:ext>
             </a:extLst>
           </p:cNvPr>
@@ -11293,7 +11453,7 @@
                 <a:ea typeface="Pretendard"/>
                 <a:cs typeface="Pretendard"/>
               </a:rPr>
-              <a:t>ESS 수명 예측을 위한 네 가지 핵심 시사점</a:t>
+              <a:t>ESS 수명 예측에서 확인한 네 가지 핵심 결론</a:t>
             </a:r>
           </a:p>
         </p:txBody>
@@ -11303,7 +11463,7 @@
           <p:cNvPr id="5" name="">
             <a:extLst xmlns:a="http://schemas.openxmlformats.org/drawingml/2006/main">
               <a:ext uri="{FF2B5EF4-FFF2-40B4-BE49-F238E27FC236}">
-                <a16:creationId xmlns:a16="http://schemas.microsoft.com/office/drawing/2014/main" id="{C776CC17-2C7D-49E4-94E6-0505D9EEC226}"/>
+                <a16:creationId xmlns:a16="http://schemas.microsoft.com/office/drawing/2014/main" id="{F1F87380-536A-4262-962B-B82473856581}"/>
               </a:ext>
             </a:extLst>
           </p:cNvPr>
@@ -11360,7 +11520,7 @@
           <p:cNvPr id="6" name="">
             <a:extLst xmlns:a="http://schemas.openxmlformats.org/drawingml/2006/main">
               <a:ext uri="{FF2B5EF4-FFF2-40B4-BE49-F238E27FC236}">
-                <a16:creationId xmlns:a16="http://schemas.microsoft.com/office/drawing/2014/main" id="{13202C08-A86A-44C3-BE04-5A9EB918CA90}"/>
+                <a16:creationId xmlns:a16="http://schemas.microsoft.com/office/drawing/2014/main" id="{C91BEE3B-64E3-4C67-83B7-12AA4E667C29}"/>
               </a:ext>
             </a:extLst>
           </p:cNvPr>
@@ -11392,7 +11552,7 @@
           <p:cNvPr id="7" name="">
             <a:extLst xmlns:a="http://schemas.openxmlformats.org/drawingml/2006/main">
               <a:ext uri="{FF2B5EF4-FFF2-40B4-BE49-F238E27FC236}">
-                <a16:creationId xmlns:a16="http://schemas.microsoft.com/office/drawing/2014/main" id="{D4532550-CF9C-43C3-8386-4D725624BE6F}"/>
+                <a16:creationId xmlns:a16="http://schemas.microsoft.com/office/drawing/2014/main" id="{586AED7B-E022-4025-81DA-208573664307}"/>
               </a:ext>
             </a:extLst>
           </p:cNvPr>
@@ -11449,7 +11609,7 @@
           <p:cNvPr id="8" name="">
             <a:extLst xmlns:a="http://schemas.openxmlformats.org/drawingml/2006/main">
               <a:ext uri="{FF2B5EF4-FFF2-40B4-BE49-F238E27FC236}">
-                <a16:creationId xmlns:a16="http://schemas.microsoft.com/office/drawing/2014/main" id="{4DEC9DEE-E192-4CED-AC76-5B3B1CAE8703}"/>
+                <a16:creationId xmlns:a16="http://schemas.microsoft.com/office/drawing/2014/main" id="{07B7A517-CB74-4890-859D-7018867DBA14}"/>
               </a:ext>
             </a:extLst>
           </p:cNvPr>
@@ -11506,7 +11666,7 @@
           <p:cNvPr id="9" name="">
             <a:extLst xmlns:a="http://schemas.openxmlformats.org/drawingml/2006/main">
               <a:ext uri="{FF2B5EF4-FFF2-40B4-BE49-F238E27FC236}">
-                <a16:creationId xmlns:a16="http://schemas.microsoft.com/office/drawing/2014/main" id="{3E3A26BD-B8EF-4479-BD9A-577E5D2AC02B}"/>
+                <a16:creationId xmlns:a16="http://schemas.microsoft.com/office/drawing/2014/main" id="{AF34A480-5885-41BF-8258-E98408FA4CC4}"/>
               </a:ext>
             </a:extLst>
           </p:cNvPr>
@@ -11563,7 +11723,7 @@
           <p:cNvPr id="10" name="">
             <a:extLst xmlns:a="http://schemas.openxmlformats.org/drawingml/2006/main">
               <a:ext uri="{FF2B5EF4-FFF2-40B4-BE49-F238E27FC236}">
-                <a16:creationId xmlns:a16="http://schemas.microsoft.com/office/drawing/2014/main" id="{52246146-052D-440B-BDC8-5F6D927C47AC}"/>
+                <a16:creationId xmlns:a16="http://schemas.microsoft.com/office/drawing/2014/main" id="{DEDEFB67-93CA-4947-96FD-C9696C3A5206}"/>
               </a:ext>
             </a:extLst>
           </p:cNvPr>
@@ -11595,7 +11755,7 @@
           <p:cNvPr id="11" name="">
             <a:extLst xmlns:a="http://schemas.openxmlformats.org/drawingml/2006/main">
               <a:ext uri="{FF2B5EF4-FFF2-40B4-BE49-F238E27FC236}">
-                <a16:creationId xmlns:a16="http://schemas.microsoft.com/office/drawing/2014/main" id="{BBDE82FD-770D-4486-9850-F5D9D6D25543}"/>
+                <a16:creationId xmlns:a16="http://schemas.microsoft.com/office/drawing/2014/main" id="{23415AF0-EA96-4D49-9878-BCB509429354}"/>
               </a:ext>
             </a:extLst>
           </p:cNvPr>
@@ -11652,7 +11812,7 @@
           <p:cNvPr id="12" name="">
             <a:extLst xmlns:a="http://schemas.openxmlformats.org/drawingml/2006/main">
               <a:ext uri="{FF2B5EF4-FFF2-40B4-BE49-F238E27FC236}">
-                <a16:creationId xmlns:a16="http://schemas.microsoft.com/office/drawing/2014/main" id="{47F66E16-1EF8-44AF-9EE3-59D9B939603B}"/>
+                <a16:creationId xmlns:a16="http://schemas.microsoft.com/office/drawing/2014/main" id="{8E001D93-F499-4815-A330-B20B9B46C236}"/>
               </a:ext>
             </a:extLst>
           </p:cNvPr>
@@ -11709,7 +11869,7 @@
           <p:cNvPr id="13" name="">
             <a:extLst xmlns:a="http://schemas.openxmlformats.org/drawingml/2006/main">
               <a:ext uri="{FF2B5EF4-FFF2-40B4-BE49-F238E27FC236}">
-                <a16:creationId xmlns:a16="http://schemas.microsoft.com/office/drawing/2014/main" id="{928D046E-4633-4D77-A01F-AECC570850E1}"/>
+                <a16:creationId xmlns:a16="http://schemas.microsoft.com/office/drawing/2014/main" id="{0F587ECC-63C6-46DB-AF48-AD7BE6CAF45D}"/>
               </a:ext>
             </a:extLst>
           </p:cNvPr>
@@ -11766,7 +11926,7 @@
           <p:cNvPr id="14" name="">
             <a:extLst xmlns:a="http://schemas.openxmlformats.org/drawingml/2006/main">
               <a:ext uri="{FF2B5EF4-FFF2-40B4-BE49-F238E27FC236}">
-                <a16:creationId xmlns:a16="http://schemas.microsoft.com/office/drawing/2014/main" id="{0354B072-62C9-4060-A4C1-682DF7D8BB14}"/>
+                <a16:creationId xmlns:a16="http://schemas.microsoft.com/office/drawing/2014/main" id="{6CE61B5D-5CBD-4213-9283-7CF5C3A6D142}"/>
               </a:ext>
             </a:extLst>
           </p:cNvPr>
@@ -11798,7 +11958,7 @@
           <p:cNvPr id="15" name="">
             <a:extLst xmlns:a="http://schemas.openxmlformats.org/drawingml/2006/main">
               <a:ext uri="{FF2B5EF4-FFF2-40B4-BE49-F238E27FC236}">
-                <a16:creationId xmlns:a16="http://schemas.microsoft.com/office/drawing/2014/main" id="{8BC469EE-6C92-4A5B-97B5-7EAF59A28877}"/>
+                <a16:creationId xmlns:a16="http://schemas.microsoft.com/office/drawing/2014/main" id="{0791BF06-797F-4398-88E2-DD68607AFB93}"/>
               </a:ext>
             </a:extLst>
           </p:cNvPr>
@@ -11855,7 +12015,7 @@
           <p:cNvPr id="16" name="">
             <a:extLst xmlns:a="http://schemas.openxmlformats.org/drawingml/2006/main">
               <a:ext uri="{FF2B5EF4-FFF2-40B4-BE49-F238E27FC236}">
-                <a16:creationId xmlns:a16="http://schemas.microsoft.com/office/drawing/2014/main" id="{433F01E8-471C-4416-A10C-51BFB9F1F6F3}"/>
+                <a16:creationId xmlns:a16="http://schemas.microsoft.com/office/drawing/2014/main" id="{543156BE-42DE-44AE-9FD4-CC1012E36893}"/>
               </a:ext>
             </a:extLst>
           </p:cNvPr>
@@ -11912,7 +12072,7 @@
           <p:cNvPr id="17" name="">
             <a:extLst xmlns:a="http://schemas.openxmlformats.org/drawingml/2006/main">
               <a:ext uri="{FF2B5EF4-FFF2-40B4-BE49-F238E27FC236}">
-                <a16:creationId xmlns:a16="http://schemas.microsoft.com/office/drawing/2014/main" id="{5630E4F6-2165-4F8E-8770-C65EA6907CC3}"/>
+                <a16:creationId xmlns:a16="http://schemas.microsoft.com/office/drawing/2014/main" id="{A665FF74-4D04-4DD5-95CA-15D4432EA358}"/>
               </a:ext>
             </a:extLst>
           </p:cNvPr>
@@ -11969,7 +12129,7 @@
           <p:cNvPr id="18" name="">
             <a:extLst xmlns:a="http://schemas.openxmlformats.org/drawingml/2006/main">
               <a:ext uri="{FF2B5EF4-FFF2-40B4-BE49-F238E27FC236}">
-                <a16:creationId xmlns:a16="http://schemas.microsoft.com/office/drawing/2014/main" id="{C1719D7C-D679-4D4D-985E-F2D9A1E198C8}"/>
+                <a16:creationId xmlns:a16="http://schemas.microsoft.com/office/drawing/2014/main" id="{9F98D21C-3CF4-4FF8-B5A7-F9E472F05ADE}"/>
               </a:ext>
             </a:extLst>
           </p:cNvPr>
@@ -12001,7 +12161,7 @@
           <p:cNvPr id="19" name="">
             <a:extLst xmlns:a="http://schemas.openxmlformats.org/drawingml/2006/main">
               <a:ext uri="{FF2B5EF4-FFF2-40B4-BE49-F238E27FC236}">
-                <a16:creationId xmlns:a16="http://schemas.microsoft.com/office/drawing/2014/main" id="{56426299-C68B-4066-8210-C12037A28557}"/>
+                <a16:creationId xmlns:a16="http://schemas.microsoft.com/office/drawing/2014/main" id="{E24E2F5E-CFBF-4BB5-B770-7822BC2C0C4E}"/>
               </a:ext>
             </a:extLst>
           </p:cNvPr>
@@ -12058,7 +12218,7 @@
           <p:cNvPr id="20" name="">
             <a:extLst xmlns:a="http://schemas.openxmlformats.org/drawingml/2006/main">
               <a:ext uri="{FF2B5EF4-FFF2-40B4-BE49-F238E27FC236}">
-                <a16:creationId xmlns:a16="http://schemas.microsoft.com/office/drawing/2014/main" id="{6B3B5454-D4D8-4DC8-AB61-93C7056BEF77}"/>
+                <a16:creationId xmlns:a16="http://schemas.microsoft.com/office/drawing/2014/main" id="{1D52E156-58C7-4BB5-AE95-9A682FB13D97}"/>
               </a:ext>
             </a:extLst>
           </p:cNvPr>
@@ -12115,7 +12275,7 @@
           <p:cNvPr id="21" name="">
             <a:extLst xmlns:a="http://schemas.openxmlformats.org/drawingml/2006/main">
               <a:ext uri="{FF2B5EF4-FFF2-40B4-BE49-F238E27FC236}">
-                <a16:creationId xmlns:a16="http://schemas.microsoft.com/office/drawing/2014/main" id="{0C036CBB-DD74-48C9-8B9B-9BFDE668668A}"/>
+                <a16:creationId xmlns:a16="http://schemas.microsoft.com/office/drawing/2014/main" id="{DDF5FC8C-91DB-4F64-8F63-94A31456E548}"/>
               </a:ext>
             </a:extLst>
           </p:cNvPr>
@@ -12172,7 +12332,7 @@
           <p:cNvPr id="22" name="">
             <a:extLst xmlns:a="http://schemas.openxmlformats.org/drawingml/2006/main">
               <a:ext uri="{FF2B5EF4-FFF2-40B4-BE49-F238E27FC236}">
-                <a16:creationId xmlns:a16="http://schemas.microsoft.com/office/drawing/2014/main" id="{84DF9B1B-CAAE-4781-A91D-C0C8524200D5}"/>
+                <a16:creationId xmlns:a16="http://schemas.microsoft.com/office/drawing/2014/main" id="{34FB1D31-5AEC-4FF8-A4AB-0AB7E145976A}"/>
               </a:ext>
             </a:extLst>
           </p:cNvPr>
@@ -12204,7 +12364,7 @@
           <p:cNvPr id="23" name="">
             <a:extLst xmlns:a="http://schemas.openxmlformats.org/drawingml/2006/main">
               <a:ext uri="{FF2B5EF4-FFF2-40B4-BE49-F238E27FC236}">
-                <a16:creationId xmlns:a16="http://schemas.microsoft.com/office/drawing/2014/main" id="{BC43FFCF-A259-4D42-9B5D-4EFF567ABFAD}"/>
+                <a16:creationId xmlns:a16="http://schemas.microsoft.com/office/drawing/2014/main" id="{C1FF88FA-9C30-47CE-B517-3D172A9D0329}"/>
               </a:ext>
             </a:extLst>
           </p:cNvPr>
@@ -12259,7 +12419,7 @@
     </p:spTree>
     <p:extLst>
       <p:ext uri="{BB962C8B-B14F-4D97-AF65-F5344CB8AC3E}">
-        <p14:creationId xmlns:p14="http://schemas.microsoft.com/office/powerpoint/2010/main" val="648493558"/>
+        <p14:creationId xmlns:p14="http://schemas.microsoft.com/office/powerpoint/2010/main" val="673031858"/>
       </p:ext>
     </p:extLst>
   </p:cSld>
